--- a/01_経過報告/計画進捗_中間発表資料_0704/計画進捗・中間発表_23F302020_v01.pptx
+++ b/01_経過報告/計画進捗_中間発表資料_0704/計画進捗・中間発表_23F302020_v01.pptx
@@ -4,22 +4,25 @@
   <p:sldMasterIdLst>
     <p:sldMasterId id="2147483648" r:id="rId1"/>
   </p:sldMasterIdLst>
+  <p:notesMasterIdLst>
+    <p:notesMasterId r:id="rId15"/>
+  </p:notesMasterIdLst>
   <p:sldIdLst>
-    <p:sldId id="256" r:id="rId7"/>
-    <p:sldId id="257" r:id="rId8"/>
-    <p:sldId id="258" r:id="rId9"/>
-    <p:sldId id="259" r:id="rId10"/>
-    <p:sldId id="260" r:id="rId11"/>
-    <p:sldId id="261" r:id="rId12"/>
-    <p:sldId id="262" r:id="rId13"/>
-    <p:sldId id="263" r:id="rId14"/>
-    <p:sldId id="264" r:id="rId15"/>
-    <p:sldId id="265" r:id="rId16"/>
-    <p:sldId id="266" r:id="rId17"/>
-    <p:sldId id="267" r:id="rId18"/>
-    <p:sldId id="268" r:id="rId19"/>
+    <p:sldId id="256" r:id="rId2"/>
+    <p:sldId id="257" r:id="rId3"/>
+    <p:sldId id="258" r:id="rId4"/>
+    <p:sldId id="259" r:id="rId5"/>
+    <p:sldId id="260" r:id="rId6"/>
+    <p:sldId id="261" r:id="rId7"/>
+    <p:sldId id="262" r:id="rId8"/>
+    <p:sldId id="263" r:id="rId9"/>
+    <p:sldId id="264" r:id="rId10"/>
+    <p:sldId id="265" r:id="rId11"/>
+    <p:sldId id="266" r:id="rId12"/>
+    <p:sldId id="267" r:id="rId13"/>
+    <p:sldId id="268" r:id="rId14"/>
   </p:sldIdLst>
-  <p:sldSz cx="12193200" cy="6858000" type="screen4x3"/>
+  <p:sldSz cx="12193588" cy="6858000"/>
   <p:notesSz cx="6858000" cy="9144000"/>
   <p:defaultTextStyle>
     <a:defPPr>
@@ -116,7 +119,1118 @@
       </a:defRPr>
     </a:lvl9pPr>
   </p:defaultTextStyle>
+  <p:extLst>
+    <p:ext uri="{EFAFB233-063F-42B5-8137-9DF3F51BA10A}">
+      <p15:sldGuideLst xmlns:p15="http://schemas.microsoft.com/office/powerpoint/2012/main">
+        <p15:guide id="1" orient="horz" pos="2160">
+          <p15:clr>
+            <a:srgbClr val="A4A3A4"/>
+          </p15:clr>
+        </p15:guide>
+        <p15:guide id="2" pos="2880">
+          <p15:clr>
+            <a:srgbClr val="A4A3A4"/>
+          </p15:clr>
+        </p15:guide>
+      </p15:sldGuideLst>
+    </p:ext>
+  </p:extLst>
 </p:presentation>
+</file>
+
+<file path=ppt/revisionInfo.xml><?xml version="1.0" encoding="utf-8"?>
+<p1510:revInfo xmlns:a="http://schemas.openxmlformats.org/drawingml/2006/main" xmlns:r="http://schemas.openxmlformats.org/officeDocument/2006/relationships" xmlns:p1510="http://schemas.microsoft.com/office/powerpoint/2015/10/main">
+  <p1510:revLst>
+    <p1510:client id="{0DB907D6-BE2E-4309-AE00-BE648F8E3900}" v="12" dt="2026-05-22T03:52:12.974"/>
+  </p1510:revLst>
+</p1510:revInfo>
+</file>
+
+<file path=ppt/changesInfos/changesInfo1.xml><?xml version="1.0" encoding="utf-8"?>
+<pc:chgInfo xmlns:a="http://schemas.openxmlformats.org/drawingml/2006/main" xmlns:r="http://schemas.openxmlformats.org/officeDocument/2006/relationships" xmlns:ac="http://schemas.microsoft.com/office/drawing/2013/main/command" xmlns:pc="http://schemas.microsoft.com/office/powerpoint/2013/main/command">
+  <pc:docChgLst>
+    <pc:chgData name="古賀 玲次" userId="d2163e72-4ab4-4222-a3af-dcf152636f21" providerId="ADAL" clId="{4CED5798-B995-4604-96BA-7E646074EB82}"/>
+    <pc:docChg chg="undo custSel modSld">
+      <pc:chgData name="古賀 玲次" userId="d2163e72-4ab4-4222-a3af-dcf152636f21" providerId="ADAL" clId="{4CED5798-B995-4604-96BA-7E646074EB82}" dt="2026-05-22T03:55:58.948" v="115" actId="1076"/>
+      <pc:docMkLst>
+        <pc:docMk/>
+      </pc:docMkLst>
+      <pc:sldChg chg="modSp mod">
+        <pc:chgData name="古賀 玲次" userId="d2163e72-4ab4-4222-a3af-dcf152636f21" providerId="ADAL" clId="{4CED5798-B995-4604-96BA-7E646074EB82}" dt="2026-05-22T03:44:09.565" v="46" actId="1076"/>
+        <pc:sldMkLst>
+          <pc:docMk/>
+          <pc:sldMk cId="0" sldId="256"/>
+        </pc:sldMkLst>
+        <pc:spChg chg="mod">
+          <ac:chgData name="古賀 玲次" userId="d2163e72-4ab4-4222-a3af-dcf152636f21" providerId="ADAL" clId="{4CED5798-B995-4604-96BA-7E646074EB82}" dt="2026-05-22T03:41:32.125" v="34" actId="122"/>
+          <ac:spMkLst>
+            <pc:docMk/>
+            <pc:sldMk cId="0" sldId="256"/>
+            <ac:spMk id="3" creationId="{00000000-0000-0000-0000-000000000000}"/>
+          </ac:spMkLst>
+        </pc:spChg>
+        <pc:spChg chg="mod">
+          <ac:chgData name="古賀 玲次" userId="d2163e72-4ab4-4222-a3af-dcf152636f21" providerId="ADAL" clId="{4CED5798-B995-4604-96BA-7E646074EB82}" dt="2026-05-22T03:43:01.004" v="42" actId="1076"/>
+          <ac:spMkLst>
+            <pc:docMk/>
+            <pc:sldMk cId="0" sldId="256"/>
+            <ac:spMk id="4" creationId="{00000000-0000-0000-0000-000000000000}"/>
+          </ac:spMkLst>
+        </pc:spChg>
+        <pc:spChg chg="mod">
+          <ac:chgData name="古賀 玲次" userId="d2163e72-4ab4-4222-a3af-dcf152636f21" providerId="ADAL" clId="{4CED5798-B995-4604-96BA-7E646074EB82}" dt="2026-05-22T03:41:22.185" v="33" actId="14100"/>
+          <ac:spMkLst>
+            <pc:docMk/>
+            <pc:sldMk cId="0" sldId="256"/>
+            <ac:spMk id="5" creationId="{00000000-0000-0000-0000-000000000000}"/>
+          </ac:spMkLst>
+        </pc:spChg>
+        <pc:spChg chg="mod">
+          <ac:chgData name="古賀 玲次" userId="d2163e72-4ab4-4222-a3af-dcf152636f21" providerId="ADAL" clId="{4CED5798-B995-4604-96BA-7E646074EB82}" dt="2026-05-22T03:43:22.356" v="44" actId="1076"/>
+          <ac:spMkLst>
+            <pc:docMk/>
+            <pc:sldMk cId="0" sldId="256"/>
+            <ac:spMk id="6" creationId="{00000000-0000-0000-0000-000000000000}"/>
+          </ac:spMkLst>
+        </pc:spChg>
+        <pc:spChg chg="mod">
+          <ac:chgData name="古賀 玲次" userId="d2163e72-4ab4-4222-a3af-dcf152636f21" providerId="ADAL" clId="{4CED5798-B995-4604-96BA-7E646074EB82}" dt="2026-05-22T03:43:52.475" v="45" actId="1076"/>
+          <ac:spMkLst>
+            <pc:docMk/>
+            <pc:sldMk cId="0" sldId="256"/>
+            <ac:spMk id="7" creationId="{00000000-0000-0000-0000-000000000000}"/>
+          </ac:spMkLst>
+        </pc:spChg>
+        <pc:spChg chg="mod">
+          <ac:chgData name="古賀 玲次" userId="d2163e72-4ab4-4222-a3af-dcf152636f21" providerId="ADAL" clId="{4CED5798-B995-4604-96BA-7E646074EB82}" dt="2026-05-22T03:44:09.565" v="46" actId="1076"/>
+          <ac:spMkLst>
+            <pc:docMk/>
+            <pc:sldMk cId="0" sldId="256"/>
+            <ac:spMk id="8" creationId="{00000000-0000-0000-0000-000000000000}"/>
+          </ac:spMkLst>
+        </pc:spChg>
+        <pc:spChg chg="mod">
+          <ac:chgData name="古賀 玲次" userId="d2163e72-4ab4-4222-a3af-dcf152636f21" providerId="ADAL" clId="{4CED5798-B995-4604-96BA-7E646074EB82}" dt="2026-05-22T03:44:09.565" v="46" actId="1076"/>
+          <ac:spMkLst>
+            <pc:docMk/>
+            <pc:sldMk cId="0" sldId="256"/>
+            <ac:spMk id="9" creationId="{00000000-0000-0000-0000-000000000000}"/>
+          </ac:spMkLst>
+        </pc:spChg>
+      </pc:sldChg>
+      <pc:sldChg chg="addSp modSp mod">
+        <pc:chgData name="古賀 玲次" userId="d2163e72-4ab4-4222-a3af-dcf152636f21" providerId="ADAL" clId="{4CED5798-B995-4604-96BA-7E646074EB82}" dt="2026-05-22T03:47:02.071" v="67" actId="1076"/>
+        <pc:sldMkLst>
+          <pc:docMk/>
+          <pc:sldMk cId="0" sldId="257"/>
+        </pc:sldMkLst>
+        <pc:spChg chg="mod">
+          <ac:chgData name="古賀 玲次" userId="d2163e72-4ab4-4222-a3af-dcf152636f21" providerId="ADAL" clId="{4CED5798-B995-4604-96BA-7E646074EB82}" dt="2026-05-22T03:46:25.258" v="60" actId="1076"/>
+          <ac:spMkLst>
+            <pc:docMk/>
+            <pc:sldMk cId="0" sldId="257"/>
+            <ac:spMk id="8" creationId="{00000000-0000-0000-0000-000000000000}"/>
+          </ac:spMkLst>
+        </pc:spChg>
+        <pc:spChg chg="mod">
+          <ac:chgData name="古賀 玲次" userId="d2163e72-4ab4-4222-a3af-dcf152636f21" providerId="ADAL" clId="{4CED5798-B995-4604-96BA-7E646074EB82}" dt="2026-05-22T03:45:48.052" v="52" actId="1076"/>
+          <ac:spMkLst>
+            <pc:docMk/>
+            <pc:sldMk cId="0" sldId="257"/>
+            <ac:spMk id="9" creationId="{00000000-0000-0000-0000-000000000000}"/>
+          </ac:spMkLst>
+        </pc:spChg>
+        <pc:spChg chg="mod">
+          <ac:chgData name="古賀 玲次" userId="d2163e72-4ab4-4222-a3af-dcf152636f21" providerId="ADAL" clId="{4CED5798-B995-4604-96BA-7E646074EB82}" dt="2026-05-22T03:45:38.004" v="51" actId="1076"/>
+          <ac:spMkLst>
+            <pc:docMk/>
+            <pc:sldMk cId="0" sldId="257"/>
+            <ac:spMk id="10" creationId="{00000000-0000-0000-0000-000000000000}"/>
+          </ac:spMkLst>
+        </pc:spChg>
+        <pc:spChg chg="mod">
+          <ac:chgData name="古賀 玲次" userId="d2163e72-4ab4-4222-a3af-dcf152636f21" providerId="ADAL" clId="{4CED5798-B995-4604-96BA-7E646074EB82}" dt="2026-05-22T03:46:30.611" v="61" actId="1076"/>
+          <ac:spMkLst>
+            <pc:docMk/>
+            <pc:sldMk cId="0" sldId="257"/>
+            <ac:spMk id="11" creationId="{00000000-0000-0000-0000-000000000000}"/>
+          </ac:spMkLst>
+        </pc:spChg>
+        <pc:spChg chg="mod">
+          <ac:chgData name="古賀 玲次" userId="d2163e72-4ab4-4222-a3af-dcf152636f21" providerId="ADAL" clId="{4CED5798-B995-4604-96BA-7E646074EB82}" dt="2026-05-22T03:45:38.004" v="51" actId="1076"/>
+          <ac:spMkLst>
+            <pc:docMk/>
+            <pc:sldMk cId="0" sldId="257"/>
+            <ac:spMk id="12" creationId="{00000000-0000-0000-0000-000000000000}"/>
+          </ac:spMkLst>
+        </pc:spChg>
+        <pc:spChg chg="mod">
+          <ac:chgData name="古賀 玲次" userId="d2163e72-4ab4-4222-a3af-dcf152636f21" providerId="ADAL" clId="{4CED5798-B995-4604-96BA-7E646074EB82}" dt="2026-05-22T03:45:48.052" v="52" actId="1076"/>
+          <ac:spMkLst>
+            <pc:docMk/>
+            <pc:sldMk cId="0" sldId="257"/>
+            <ac:spMk id="13" creationId="{00000000-0000-0000-0000-000000000000}"/>
+          </ac:spMkLst>
+        </pc:spChg>
+        <pc:spChg chg="mod">
+          <ac:chgData name="古賀 玲次" userId="d2163e72-4ab4-4222-a3af-dcf152636f21" providerId="ADAL" clId="{4CED5798-B995-4604-96BA-7E646074EB82}" dt="2026-05-22T03:45:38.004" v="51" actId="1076"/>
+          <ac:spMkLst>
+            <pc:docMk/>
+            <pc:sldMk cId="0" sldId="257"/>
+            <ac:spMk id="14" creationId="{00000000-0000-0000-0000-000000000000}"/>
+          </ac:spMkLst>
+        </pc:spChg>
+        <pc:spChg chg="mod">
+          <ac:chgData name="古賀 玲次" userId="d2163e72-4ab4-4222-a3af-dcf152636f21" providerId="ADAL" clId="{4CED5798-B995-4604-96BA-7E646074EB82}" dt="2026-05-22T03:46:41.307" v="63" actId="1076"/>
+          <ac:spMkLst>
+            <pc:docMk/>
+            <pc:sldMk cId="0" sldId="257"/>
+            <ac:spMk id="15" creationId="{00000000-0000-0000-0000-000000000000}"/>
+          </ac:spMkLst>
+        </pc:spChg>
+        <pc:spChg chg="mod">
+          <ac:chgData name="古賀 玲次" userId="d2163e72-4ab4-4222-a3af-dcf152636f21" providerId="ADAL" clId="{4CED5798-B995-4604-96BA-7E646074EB82}" dt="2026-05-22T03:45:48.052" v="52" actId="1076"/>
+          <ac:spMkLst>
+            <pc:docMk/>
+            <pc:sldMk cId="0" sldId="257"/>
+            <ac:spMk id="17" creationId="{00000000-0000-0000-0000-000000000000}"/>
+          </ac:spMkLst>
+        </pc:spChg>
+        <pc:spChg chg="mod">
+          <ac:chgData name="古賀 玲次" userId="d2163e72-4ab4-4222-a3af-dcf152636f21" providerId="ADAL" clId="{4CED5798-B995-4604-96BA-7E646074EB82}" dt="2026-05-22T03:45:38.004" v="51" actId="1076"/>
+          <ac:spMkLst>
+            <pc:docMk/>
+            <pc:sldMk cId="0" sldId="257"/>
+            <ac:spMk id="18" creationId="{00000000-0000-0000-0000-000000000000}"/>
+          </ac:spMkLst>
+        </pc:spChg>
+        <pc:spChg chg="mod">
+          <ac:chgData name="古賀 玲次" userId="d2163e72-4ab4-4222-a3af-dcf152636f21" providerId="ADAL" clId="{4CED5798-B995-4604-96BA-7E646074EB82}" dt="2026-05-22T03:46:53.873" v="65" actId="1076"/>
+          <ac:spMkLst>
+            <pc:docMk/>
+            <pc:sldMk cId="0" sldId="257"/>
+            <ac:spMk id="19" creationId="{00000000-0000-0000-0000-000000000000}"/>
+          </ac:spMkLst>
+        </pc:spChg>
+        <pc:spChg chg="mod">
+          <ac:chgData name="古賀 玲次" userId="d2163e72-4ab4-4222-a3af-dcf152636f21" providerId="ADAL" clId="{4CED5798-B995-4604-96BA-7E646074EB82}" dt="2026-05-22T03:45:38.004" v="51" actId="1076"/>
+          <ac:spMkLst>
+            <pc:docMk/>
+            <pc:sldMk cId="0" sldId="257"/>
+            <ac:spMk id="20" creationId="{00000000-0000-0000-0000-000000000000}"/>
+          </ac:spMkLst>
+        </pc:spChg>
+        <pc:spChg chg="mod">
+          <ac:chgData name="古賀 玲次" userId="d2163e72-4ab4-4222-a3af-dcf152636f21" providerId="ADAL" clId="{4CED5798-B995-4604-96BA-7E646074EB82}" dt="2026-05-22T03:45:48.052" v="52" actId="1076"/>
+          <ac:spMkLst>
+            <pc:docMk/>
+            <pc:sldMk cId="0" sldId="257"/>
+            <ac:spMk id="21" creationId="{00000000-0000-0000-0000-000000000000}"/>
+          </ac:spMkLst>
+        </pc:spChg>
+        <pc:spChg chg="mod">
+          <ac:chgData name="古賀 玲次" userId="d2163e72-4ab4-4222-a3af-dcf152636f21" providerId="ADAL" clId="{4CED5798-B995-4604-96BA-7E646074EB82}" dt="2026-05-22T03:47:02.071" v="67" actId="1076"/>
+          <ac:spMkLst>
+            <pc:docMk/>
+            <pc:sldMk cId="0" sldId="257"/>
+            <ac:spMk id="23" creationId="{00000000-0000-0000-0000-000000000000}"/>
+          </ac:spMkLst>
+        </pc:spChg>
+        <pc:spChg chg="mod">
+          <ac:chgData name="古賀 玲次" userId="d2163e72-4ab4-4222-a3af-dcf152636f21" providerId="ADAL" clId="{4CED5798-B995-4604-96BA-7E646074EB82}" dt="2026-05-22T03:45:06.969" v="50" actId="255"/>
+          <ac:spMkLst>
+            <pc:docMk/>
+            <pc:sldMk cId="0" sldId="257"/>
+            <ac:spMk id="24" creationId="{00000000-0000-0000-0000-000000000000}"/>
+          </ac:spMkLst>
+        </pc:spChg>
+        <pc:spChg chg="add mod">
+          <ac:chgData name="古賀 玲次" userId="d2163e72-4ab4-4222-a3af-dcf152636f21" providerId="ADAL" clId="{4CED5798-B995-4604-96BA-7E646074EB82}" dt="2026-05-22T03:44:24.220" v="48" actId="571"/>
+          <ac:spMkLst>
+            <pc:docMk/>
+            <pc:sldMk cId="0" sldId="257"/>
+            <ac:spMk id="25" creationId="{E1D9DF31-2513-1E09-559C-5F985D384824}"/>
+          </ac:spMkLst>
+        </pc:spChg>
+      </pc:sldChg>
+      <pc:sldChg chg="modSp mod">
+        <pc:chgData name="古賀 玲次" userId="d2163e72-4ab4-4222-a3af-dcf152636f21" providerId="ADAL" clId="{4CED5798-B995-4604-96BA-7E646074EB82}" dt="2026-05-22T03:49:22.523" v="83" actId="2710"/>
+        <pc:sldMkLst>
+          <pc:docMk/>
+          <pc:sldMk cId="0" sldId="258"/>
+        </pc:sldMkLst>
+        <pc:spChg chg="mod">
+          <ac:chgData name="古賀 玲次" userId="d2163e72-4ab4-4222-a3af-dcf152636f21" providerId="ADAL" clId="{4CED5798-B995-4604-96BA-7E646074EB82}" dt="2026-05-22T03:47:59.433" v="68" actId="1076"/>
+          <ac:spMkLst>
+            <pc:docMk/>
+            <pc:sldMk cId="0" sldId="258"/>
+            <ac:spMk id="7" creationId="{00000000-0000-0000-0000-000000000000}"/>
+          </ac:spMkLst>
+        </pc:spChg>
+        <pc:spChg chg="mod">
+          <ac:chgData name="古賀 玲次" userId="d2163e72-4ab4-4222-a3af-dcf152636f21" providerId="ADAL" clId="{4CED5798-B995-4604-96BA-7E646074EB82}" dt="2026-05-22T03:48:26.635" v="71" actId="2710"/>
+          <ac:spMkLst>
+            <pc:docMk/>
+            <pc:sldMk cId="0" sldId="258"/>
+            <ac:spMk id="8" creationId="{00000000-0000-0000-0000-000000000000}"/>
+          </ac:spMkLst>
+        </pc:spChg>
+        <pc:spChg chg="mod">
+          <ac:chgData name="古賀 玲次" userId="d2163e72-4ab4-4222-a3af-dcf152636f21" providerId="ADAL" clId="{4CED5798-B995-4604-96BA-7E646074EB82}" dt="2026-05-22T03:47:59.433" v="68" actId="1076"/>
+          <ac:spMkLst>
+            <pc:docMk/>
+            <pc:sldMk cId="0" sldId="258"/>
+            <ac:spMk id="9" creationId="{00000000-0000-0000-0000-000000000000}"/>
+          </ac:spMkLst>
+        </pc:spChg>
+        <pc:spChg chg="mod">
+          <ac:chgData name="古賀 玲次" userId="d2163e72-4ab4-4222-a3af-dcf152636f21" providerId="ADAL" clId="{4CED5798-B995-4604-96BA-7E646074EB82}" dt="2026-05-22T03:47:59.433" v="68" actId="1076"/>
+          <ac:spMkLst>
+            <pc:docMk/>
+            <pc:sldMk cId="0" sldId="258"/>
+            <ac:spMk id="10" creationId="{00000000-0000-0000-0000-000000000000}"/>
+          </ac:spMkLst>
+        </pc:spChg>
+        <pc:spChg chg="mod">
+          <ac:chgData name="古賀 玲次" userId="d2163e72-4ab4-4222-a3af-dcf152636f21" providerId="ADAL" clId="{4CED5798-B995-4604-96BA-7E646074EB82}" dt="2026-05-22T03:47:59.433" v="68" actId="1076"/>
+          <ac:spMkLst>
+            <pc:docMk/>
+            <pc:sldMk cId="0" sldId="258"/>
+            <ac:spMk id="12" creationId="{00000000-0000-0000-0000-000000000000}"/>
+          </ac:spMkLst>
+        </pc:spChg>
+        <pc:spChg chg="mod">
+          <ac:chgData name="古賀 玲次" userId="d2163e72-4ab4-4222-a3af-dcf152636f21" providerId="ADAL" clId="{4CED5798-B995-4604-96BA-7E646074EB82}" dt="2026-05-22T03:48:56.206" v="77"/>
+          <ac:spMkLst>
+            <pc:docMk/>
+            <pc:sldMk cId="0" sldId="258"/>
+            <ac:spMk id="13" creationId="{00000000-0000-0000-0000-000000000000}"/>
+          </ac:spMkLst>
+        </pc:spChg>
+        <pc:spChg chg="mod">
+          <ac:chgData name="古賀 玲次" userId="d2163e72-4ab4-4222-a3af-dcf152636f21" providerId="ADAL" clId="{4CED5798-B995-4604-96BA-7E646074EB82}" dt="2026-05-22T03:48:17.064" v="70" actId="1076"/>
+          <ac:spMkLst>
+            <pc:docMk/>
+            <pc:sldMk cId="0" sldId="258"/>
+            <ac:spMk id="14" creationId="{00000000-0000-0000-0000-000000000000}"/>
+          </ac:spMkLst>
+        </pc:spChg>
+        <pc:spChg chg="mod">
+          <ac:chgData name="古賀 玲次" userId="d2163e72-4ab4-4222-a3af-dcf152636f21" providerId="ADAL" clId="{4CED5798-B995-4604-96BA-7E646074EB82}" dt="2026-05-22T03:48:07.451" v="69" actId="1076"/>
+          <ac:spMkLst>
+            <pc:docMk/>
+            <pc:sldMk cId="0" sldId="258"/>
+            <ac:spMk id="15" creationId="{00000000-0000-0000-0000-000000000000}"/>
+          </ac:spMkLst>
+        </pc:spChg>
+        <pc:spChg chg="mod">
+          <ac:chgData name="古賀 玲次" userId="d2163e72-4ab4-4222-a3af-dcf152636f21" providerId="ADAL" clId="{4CED5798-B995-4604-96BA-7E646074EB82}" dt="2026-05-22T03:47:59.433" v="68" actId="1076"/>
+          <ac:spMkLst>
+            <pc:docMk/>
+            <pc:sldMk cId="0" sldId="258"/>
+            <ac:spMk id="16" creationId="{00000000-0000-0000-0000-000000000000}"/>
+          </ac:spMkLst>
+        </pc:spChg>
+        <pc:spChg chg="mod">
+          <ac:chgData name="古賀 玲次" userId="d2163e72-4ab4-4222-a3af-dcf152636f21" providerId="ADAL" clId="{4CED5798-B995-4604-96BA-7E646074EB82}" dt="2026-05-22T03:47:59.433" v="68" actId="1076"/>
+          <ac:spMkLst>
+            <pc:docMk/>
+            <pc:sldMk cId="0" sldId="258"/>
+            <ac:spMk id="17" creationId="{00000000-0000-0000-0000-000000000000}"/>
+          </ac:spMkLst>
+        </pc:spChg>
+        <pc:spChg chg="mod">
+          <ac:chgData name="古賀 玲次" userId="d2163e72-4ab4-4222-a3af-dcf152636f21" providerId="ADAL" clId="{4CED5798-B995-4604-96BA-7E646074EB82}" dt="2026-05-22T03:49:06.322" v="79" actId="2710"/>
+          <ac:spMkLst>
+            <pc:docMk/>
+            <pc:sldMk cId="0" sldId="258"/>
+            <ac:spMk id="18" creationId="{00000000-0000-0000-0000-000000000000}"/>
+          </ac:spMkLst>
+        </pc:spChg>
+        <pc:spChg chg="mod">
+          <ac:chgData name="古賀 玲次" userId="d2163e72-4ab4-4222-a3af-dcf152636f21" providerId="ADAL" clId="{4CED5798-B995-4604-96BA-7E646074EB82}" dt="2026-05-22T03:48:17.064" v="70" actId="1076"/>
+          <ac:spMkLst>
+            <pc:docMk/>
+            <pc:sldMk cId="0" sldId="258"/>
+            <ac:spMk id="19" creationId="{00000000-0000-0000-0000-000000000000}"/>
+          </ac:spMkLst>
+        </pc:spChg>
+        <pc:spChg chg="mod">
+          <ac:chgData name="古賀 玲次" userId="d2163e72-4ab4-4222-a3af-dcf152636f21" providerId="ADAL" clId="{4CED5798-B995-4604-96BA-7E646074EB82}" dt="2026-05-22T03:47:59.433" v="68" actId="1076"/>
+          <ac:spMkLst>
+            <pc:docMk/>
+            <pc:sldMk cId="0" sldId="258"/>
+            <ac:spMk id="20" creationId="{00000000-0000-0000-0000-000000000000}"/>
+          </ac:spMkLst>
+        </pc:spChg>
+        <pc:spChg chg="mod">
+          <ac:chgData name="古賀 玲次" userId="d2163e72-4ab4-4222-a3af-dcf152636f21" providerId="ADAL" clId="{4CED5798-B995-4604-96BA-7E646074EB82}" dt="2026-05-22T03:48:07.451" v="69" actId="1076"/>
+          <ac:spMkLst>
+            <pc:docMk/>
+            <pc:sldMk cId="0" sldId="258"/>
+            <ac:spMk id="21" creationId="{00000000-0000-0000-0000-000000000000}"/>
+          </ac:spMkLst>
+        </pc:spChg>
+        <pc:spChg chg="mod">
+          <ac:chgData name="古賀 玲次" userId="d2163e72-4ab4-4222-a3af-dcf152636f21" providerId="ADAL" clId="{4CED5798-B995-4604-96BA-7E646074EB82}" dt="2026-05-22T03:49:22.523" v="83" actId="2710"/>
+          <ac:spMkLst>
+            <pc:docMk/>
+            <pc:sldMk cId="0" sldId="258"/>
+            <ac:spMk id="23" creationId="{00000000-0000-0000-0000-000000000000}"/>
+          </ac:spMkLst>
+        </pc:spChg>
+      </pc:sldChg>
+      <pc:sldChg chg="modSp mod">
+        <pc:chgData name="古賀 玲次" userId="d2163e72-4ab4-4222-a3af-dcf152636f21" providerId="ADAL" clId="{4CED5798-B995-4604-96BA-7E646074EB82}" dt="2026-05-22T03:51:08.182" v="90" actId="1076"/>
+        <pc:sldMkLst>
+          <pc:docMk/>
+          <pc:sldMk cId="0" sldId="259"/>
+        </pc:sldMkLst>
+        <pc:spChg chg="mod">
+          <ac:chgData name="古賀 玲次" userId="d2163e72-4ab4-4222-a3af-dcf152636f21" providerId="ADAL" clId="{4CED5798-B995-4604-96BA-7E646074EB82}" dt="2026-05-22T03:50:36.090" v="87" actId="1076"/>
+          <ac:spMkLst>
+            <pc:docMk/>
+            <pc:sldMk cId="0" sldId="259"/>
+            <ac:spMk id="7" creationId="{00000000-0000-0000-0000-000000000000}"/>
+          </ac:spMkLst>
+        </pc:spChg>
+        <pc:spChg chg="mod">
+          <ac:chgData name="古賀 玲次" userId="d2163e72-4ab4-4222-a3af-dcf152636f21" providerId="ADAL" clId="{4CED5798-B995-4604-96BA-7E646074EB82}" dt="2026-05-22T03:50:36.090" v="87" actId="1076"/>
+          <ac:spMkLst>
+            <pc:docMk/>
+            <pc:sldMk cId="0" sldId="259"/>
+            <ac:spMk id="8" creationId="{00000000-0000-0000-0000-000000000000}"/>
+          </ac:spMkLst>
+        </pc:spChg>
+        <pc:spChg chg="mod">
+          <ac:chgData name="古賀 玲次" userId="d2163e72-4ab4-4222-a3af-dcf152636f21" providerId="ADAL" clId="{4CED5798-B995-4604-96BA-7E646074EB82}" dt="2026-05-22T03:51:08.182" v="90" actId="1076"/>
+          <ac:spMkLst>
+            <pc:docMk/>
+            <pc:sldMk cId="0" sldId="259"/>
+            <ac:spMk id="9" creationId="{00000000-0000-0000-0000-000000000000}"/>
+          </ac:spMkLst>
+        </pc:spChg>
+        <pc:spChg chg="mod">
+          <ac:chgData name="古賀 玲次" userId="d2163e72-4ab4-4222-a3af-dcf152636f21" providerId="ADAL" clId="{4CED5798-B995-4604-96BA-7E646074EB82}" dt="2026-05-22T03:50:48.682" v="88" actId="1076"/>
+          <ac:spMkLst>
+            <pc:docMk/>
+            <pc:sldMk cId="0" sldId="259"/>
+            <ac:spMk id="10" creationId="{00000000-0000-0000-0000-000000000000}"/>
+          </ac:spMkLst>
+        </pc:spChg>
+        <pc:spChg chg="mod">
+          <ac:chgData name="古賀 玲次" userId="d2163e72-4ab4-4222-a3af-dcf152636f21" providerId="ADAL" clId="{4CED5798-B995-4604-96BA-7E646074EB82}" dt="2026-05-22T03:50:36.090" v="87" actId="1076"/>
+          <ac:spMkLst>
+            <pc:docMk/>
+            <pc:sldMk cId="0" sldId="259"/>
+            <ac:spMk id="11" creationId="{00000000-0000-0000-0000-000000000000}"/>
+          </ac:spMkLst>
+        </pc:spChg>
+        <pc:spChg chg="mod">
+          <ac:chgData name="古賀 玲次" userId="d2163e72-4ab4-4222-a3af-dcf152636f21" providerId="ADAL" clId="{4CED5798-B995-4604-96BA-7E646074EB82}" dt="2026-05-22T03:50:36.090" v="87" actId="1076"/>
+          <ac:spMkLst>
+            <pc:docMk/>
+            <pc:sldMk cId="0" sldId="259"/>
+            <ac:spMk id="12" creationId="{00000000-0000-0000-0000-000000000000}"/>
+          </ac:spMkLst>
+        </pc:spChg>
+        <pc:spChg chg="mod">
+          <ac:chgData name="古賀 玲次" userId="d2163e72-4ab4-4222-a3af-dcf152636f21" providerId="ADAL" clId="{4CED5798-B995-4604-96BA-7E646074EB82}" dt="2026-05-22T03:51:08.182" v="90" actId="1076"/>
+          <ac:spMkLst>
+            <pc:docMk/>
+            <pc:sldMk cId="0" sldId="259"/>
+            <ac:spMk id="13" creationId="{00000000-0000-0000-0000-000000000000}"/>
+          </ac:spMkLst>
+        </pc:spChg>
+        <pc:spChg chg="mod">
+          <ac:chgData name="古賀 玲次" userId="d2163e72-4ab4-4222-a3af-dcf152636f21" providerId="ADAL" clId="{4CED5798-B995-4604-96BA-7E646074EB82}" dt="2026-05-22T03:50:48.682" v="88" actId="1076"/>
+          <ac:spMkLst>
+            <pc:docMk/>
+            <pc:sldMk cId="0" sldId="259"/>
+            <ac:spMk id="14" creationId="{00000000-0000-0000-0000-000000000000}"/>
+          </ac:spMkLst>
+        </pc:spChg>
+        <pc:spChg chg="mod">
+          <ac:chgData name="古賀 玲次" userId="d2163e72-4ab4-4222-a3af-dcf152636f21" providerId="ADAL" clId="{4CED5798-B995-4604-96BA-7E646074EB82}" dt="2026-05-22T03:50:36.090" v="87" actId="1076"/>
+          <ac:spMkLst>
+            <pc:docMk/>
+            <pc:sldMk cId="0" sldId="259"/>
+            <ac:spMk id="15" creationId="{00000000-0000-0000-0000-000000000000}"/>
+          </ac:spMkLst>
+        </pc:spChg>
+        <pc:spChg chg="mod">
+          <ac:chgData name="古賀 玲次" userId="d2163e72-4ab4-4222-a3af-dcf152636f21" providerId="ADAL" clId="{4CED5798-B995-4604-96BA-7E646074EB82}" dt="2026-05-22T03:51:08.182" v="90" actId="1076"/>
+          <ac:spMkLst>
+            <pc:docMk/>
+            <pc:sldMk cId="0" sldId="259"/>
+            <ac:spMk id="17" creationId="{00000000-0000-0000-0000-000000000000}"/>
+          </ac:spMkLst>
+        </pc:spChg>
+        <pc:spChg chg="mod">
+          <ac:chgData name="古賀 玲次" userId="d2163e72-4ab4-4222-a3af-dcf152636f21" providerId="ADAL" clId="{4CED5798-B995-4604-96BA-7E646074EB82}" dt="2026-05-22T03:50:48.682" v="88" actId="1076"/>
+          <ac:spMkLst>
+            <pc:docMk/>
+            <pc:sldMk cId="0" sldId="259"/>
+            <ac:spMk id="18" creationId="{00000000-0000-0000-0000-000000000000}"/>
+          </ac:spMkLst>
+        </pc:spChg>
+        <pc:spChg chg="mod">
+          <ac:chgData name="古賀 玲次" userId="d2163e72-4ab4-4222-a3af-dcf152636f21" providerId="ADAL" clId="{4CED5798-B995-4604-96BA-7E646074EB82}" dt="2026-05-22T03:50:36.090" v="87" actId="1076"/>
+          <ac:spMkLst>
+            <pc:docMk/>
+            <pc:sldMk cId="0" sldId="259"/>
+            <ac:spMk id="19" creationId="{00000000-0000-0000-0000-000000000000}"/>
+          </ac:spMkLst>
+        </pc:spChg>
+        <pc:spChg chg="mod">
+          <ac:chgData name="古賀 玲次" userId="d2163e72-4ab4-4222-a3af-dcf152636f21" providerId="ADAL" clId="{4CED5798-B995-4604-96BA-7E646074EB82}" dt="2026-05-22T03:50:36.090" v="87" actId="1076"/>
+          <ac:spMkLst>
+            <pc:docMk/>
+            <pc:sldMk cId="0" sldId="259"/>
+            <ac:spMk id="20" creationId="{00000000-0000-0000-0000-000000000000}"/>
+          </ac:spMkLst>
+        </pc:spChg>
+        <pc:spChg chg="mod">
+          <ac:chgData name="古賀 玲次" userId="d2163e72-4ab4-4222-a3af-dcf152636f21" providerId="ADAL" clId="{4CED5798-B995-4604-96BA-7E646074EB82}" dt="2026-05-22T03:51:08.182" v="90" actId="1076"/>
+          <ac:spMkLst>
+            <pc:docMk/>
+            <pc:sldMk cId="0" sldId="259"/>
+            <ac:spMk id="21" creationId="{00000000-0000-0000-0000-000000000000}"/>
+          </ac:spMkLst>
+        </pc:spChg>
+        <pc:spChg chg="mod">
+          <ac:chgData name="古賀 玲次" userId="d2163e72-4ab4-4222-a3af-dcf152636f21" providerId="ADAL" clId="{4CED5798-B995-4604-96BA-7E646074EB82}" dt="2026-05-22T03:50:08.225" v="86" actId="1076"/>
+          <ac:spMkLst>
+            <pc:docMk/>
+            <pc:sldMk cId="0" sldId="259"/>
+            <ac:spMk id="22" creationId="{00000000-0000-0000-0000-000000000000}"/>
+          </ac:spMkLst>
+        </pc:spChg>
+        <pc:spChg chg="mod">
+          <ac:chgData name="古賀 玲次" userId="d2163e72-4ab4-4222-a3af-dcf152636f21" providerId="ADAL" clId="{4CED5798-B995-4604-96BA-7E646074EB82}" dt="2026-05-22T03:50:08.225" v="86" actId="1076"/>
+          <ac:spMkLst>
+            <pc:docMk/>
+            <pc:sldMk cId="0" sldId="259"/>
+            <ac:spMk id="23" creationId="{00000000-0000-0000-0000-000000000000}"/>
+          </ac:spMkLst>
+        </pc:spChg>
+        <pc:spChg chg="mod">
+          <ac:chgData name="古賀 玲次" userId="d2163e72-4ab4-4222-a3af-dcf152636f21" providerId="ADAL" clId="{4CED5798-B995-4604-96BA-7E646074EB82}" dt="2026-05-22T03:50:08.225" v="86" actId="1076"/>
+          <ac:spMkLst>
+            <pc:docMk/>
+            <pc:sldMk cId="0" sldId="259"/>
+            <ac:spMk id="24" creationId="{00000000-0000-0000-0000-000000000000}"/>
+          </ac:spMkLst>
+        </pc:spChg>
+      </pc:sldChg>
+      <pc:sldChg chg="modSp mod">
+        <pc:chgData name="古賀 玲次" userId="d2163e72-4ab4-4222-a3af-dcf152636f21" providerId="ADAL" clId="{4CED5798-B995-4604-96BA-7E646074EB82}" dt="2026-05-22T03:52:24.159" v="106" actId="2710"/>
+        <pc:sldMkLst>
+          <pc:docMk/>
+          <pc:sldMk cId="0" sldId="264"/>
+        </pc:sldMkLst>
+        <pc:spChg chg="mod">
+          <ac:chgData name="古賀 玲次" userId="d2163e72-4ab4-4222-a3af-dcf152636f21" providerId="ADAL" clId="{4CED5798-B995-4604-96BA-7E646074EB82}" dt="2026-05-22T03:52:15.735" v="105" actId="20577"/>
+          <ac:spMkLst>
+            <pc:docMk/>
+            <pc:sldMk cId="0" sldId="264"/>
+            <ac:spMk id="5" creationId="{00000000-0000-0000-0000-000000000000}"/>
+          </ac:spMkLst>
+        </pc:spChg>
+        <pc:spChg chg="mod">
+          <ac:chgData name="古賀 玲次" userId="d2163e72-4ab4-4222-a3af-dcf152636f21" providerId="ADAL" clId="{4CED5798-B995-4604-96BA-7E646074EB82}" dt="2026-05-22T03:52:24.159" v="106" actId="2710"/>
+          <ac:spMkLst>
+            <pc:docMk/>
+            <pc:sldMk cId="0" sldId="264"/>
+            <ac:spMk id="12" creationId="{00000000-0000-0000-0000-000000000000}"/>
+          </ac:spMkLst>
+        </pc:spChg>
+      </pc:sldChg>
+      <pc:sldChg chg="modSp mod">
+        <pc:chgData name="古賀 玲次" userId="d2163e72-4ab4-4222-a3af-dcf152636f21" providerId="ADAL" clId="{4CED5798-B995-4604-96BA-7E646074EB82}" dt="2026-05-22T03:54:00.398" v="109" actId="2710"/>
+        <pc:sldMkLst>
+          <pc:docMk/>
+          <pc:sldMk cId="0" sldId="266"/>
+        </pc:sldMkLst>
+        <pc:spChg chg="mod">
+          <ac:chgData name="古賀 玲次" userId="d2163e72-4ab4-4222-a3af-dcf152636f21" providerId="ADAL" clId="{4CED5798-B995-4604-96BA-7E646074EB82}" dt="2026-05-22T03:53:35.288" v="108" actId="122"/>
+          <ac:spMkLst>
+            <pc:docMk/>
+            <pc:sldMk cId="0" sldId="266"/>
+            <ac:spMk id="9" creationId="{00000000-0000-0000-0000-000000000000}"/>
+          </ac:spMkLst>
+        </pc:spChg>
+        <pc:spChg chg="mod">
+          <ac:chgData name="古賀 玲次" userId="d2163e72-4ab4-4222-a3af-dcf152636f21" providerId="ADAL" clId="{4CED5798-B995-4604-96BA-7E646074EB82}" dt="2026-05-22T03:54:00.398" v="109" actId="2710"/>
+          <ac:spMkLst>
+            <pc:docMk/>
+            <pc:sldMk cId="0" sldId="266"/>
+            <ac:spMk id="12" creationId="{00000000-0000-0000-0000-000000000000}"/>
+          </ac:spMkLst>
+        </pc:spChg>
+        <pc:spChg chg="mod">
+          <ac:chgData name="古賀 玲次" userId="d2163e72-4ab4-4222-a3af-dcf152636f21" providerId="ADAL" clId="{4CED5798-B995-4604-96BA-7E646074EB82}" dt="2026-05-22T03:54:00.398" v="109" actId="2710"/>
+          <ac:spMkLst>
+            <pc:docMk/>
+            <pc:sldMk cId="0" sldId="266"/>
+            <ac:spMk id="15" creationId="{00000000-0000-0000-0000-000000000000}"/>
+          </ac:spMkLst>
+        </pc:spChg>
+      </pc:sldChg>
+      <pc:sldChg chg="modSp mod">
+        <pc:chgData name="古賀 玲次" userId="d2163e72-4ab4-4222-a3af-dcf152636f21" providerId="ADAL" clId="{4CED5798-B995-4604-96BA-7E646074EB82}" dt="2026-05-22T03:54:59.664" v="111" actId="122"/>
+        <pc:sldMkLst>
+          <pc:docMk/>
+          <pc:sldMk cId="0" sldId="267"/>
+        </pc:sldMkLst>
+        <pc:spChg chg="mod">
+          <ac:chgData name="古賀 玲次" userId="d2163e72-4ab4-4222-a3af-dcf152636f21" providerId="ADAL" clId="{4CED5798-B995-4604-96BA-7E646074EB82}" dt="2026-05-22T03:54:17.264" v="110" actId="1076"/>
+          <ac:spMkLst>
+            <pc:docMk/>
+            <pc:sldMk cId="0" sldId="267"/>
+            <ac:spMk id="8" creationId="{00000000-0000-0000-0000-000000000000}"/>
+          </ac:spMkLst>
+        </pc:spChg>
+        <pc:spChg chg="mod">
+          <ac:chgData name="古賀 玲次" userId="d2163e72-4ab4-4222-a3af-dcf152636f21" providerId="ADAL" clId="{4CED5798-B995-4604-96BA-7E646074EB82}" dt="2026-05-22T03:54:59.664" v="111" actId="122"/>
+          <ac:spMkLst>
+            <pc:docMk/>
+            <pc:sldMk cId="0" sldId="267"/>
+            <ac:spMk id="9" creationId="{00000000-0000-0000-0000-000000000000}"/>
+          </ac:spMkLst>
+        </pc:spChg>
+      </pc:sldChg>
+      <pc:sldChg chg="modSp mod">
+        <pc:chgData name="古賀 玲次" userId="d2163e72-4ab4-4222-a3af-dcf152636f21" providerId="ADAL" clId="{4CED5798-B995-4604-96BA-7E646074EB82}" dt="2026-05-22T03:55:58.948" v="115" actId="1076"/>
+        <pc:sldMkLst>
+          <pc:docMk/>
+          <pc:sldMk cId="0" sldId="268"/>
+        </pc:sldMkLst>
+        <pc:spChg chg="mod">
+          <ac:chgData name="古賀 玲次" userId="d2163e72-4ab4-4222-a3af-dcf152636f21" providerId="ADAL" clId="{4CED5798-B995-4604-96BA-7E646074EB82}" dt="2026-05-22T03:55:50.266" v="114" actId="1076"/>
+          <ac:spMkLst>
+            <pc:docMk/>
+            <pc:sldMk cId="0" sldId="268"/>
+            <ac:spMk id="12" creationId="{00000000-0000-0000-0000-000000000000}"/>
+          </ac:spMkLst>
+        </pc:spChg>
+        <pc:spChg chg="mod">
+          <ac:chgData name="古賀 玲次" userId="d2163e72-4ab4-4222-a3af-dcf152636f21" providerId="ADAL" clId="{4CED5798-B995-4604-96BA-7E646074EB82}" dt="2026-05-22T03:55:58.948" v="115" actId="1076"/>
+          <ac:spMkLst>
+            <pc:docMk/>
+            <pc:sldMk cId="0" sldId="268"/>
+            <ac:spMk id="13" creationId="{00000000-0000-0000-0000-000000000000}"/>
+          </ac:spMkLst>
+        </pc:spChg>
+        <pc:spChg chg="mod">
+          <ac:chgData name="古賀 玲次" userId="d2163e72-4ab4-4222-a3af-dcf152636f21" providerId="ADAL" clId="{4CED5798-B995-4604-96BA-7E646074EB82}" dt="2026-05-22T03:55:50.266" v="114" actId="1076"/>
+          <ac:spMkLst>
+            <pc:docMk/>
+            <pc:sldMk cId="0" sldId="268"/>
+            <ac:spMk id="16" creationId="{00000000-0000-0000-0000-000000000000}"/>
+          </ac:spMkLst>
+        </pc:spChg>
+        <pc:spChg chg="mod">
+          <ac:chgData name="古賀 玲次" userId="d2163e72-4ab4-4222-a3af-dcf152636f21" providerId="ADAL" clId="{4CED5798-B995-4604-96BA-7E646074EB82}" dt="2026-05-22T03:55:58.948" v="115" actId="1076"/>
+          <ac:spMkLst>
+            <pc:docMk/>
+            <pc:sldMk cId="0" sldId="268"/>
+            <ac:spMk id="17" creationId="{00000000-0000-0000-0000-000000000000}"/>
+          </ac:spMkLst>
+        </pc:spChg>
+        <pc:spChg chg="mod">
+          <ac:chgData name="古賀 玲次" userId="d2163e72-4ab4-4222-a3af-dcf152636f21" providerId="ADAL" clId="{4CED5798-B995-4604-96BA-7E646074EB82}" dt="2026-05-22T03:55:50.266" v="114" actId="1076"/>
+          <ac:spMkLst>
+            <pc:docMk/>
+            <pc:sldMk cId="0" sldId="268"/>
+            <ac:spMk id="20" creationId="{00000000-0000-0000-0000-000000000000}"/>
+          </ac:spMkLst>
+        </pc:spChg>
+        <pc:spChg chg="mod">
+          <ac:chgData name="古賀 玲次" userId="d2163e72-4ab4-4222-a3af-dcf152636f21" providerId="ADAL" clId="{4CED5798-B995-4604-96BA-7E646074EB82}" dt="2026-05-22T03:55:58.948" v="115" actId="1076"/>
+          <ac:spMkLst>
+            <pc:docMk/>
+            <pc:sldMk cId="0" sldId="268"/>
+            <ac:spMk id="21" creationId="{00000000-0000-0000-0000-000000000000}"/>
+          </ac:spMkLst>
+        </pc:spChg>
+        <pc:spChg chg="mod">
+          <ac:chgData name="古賀 玲次" userId="d2163e72-4ab4-4222-a3af-dcf152636f21" providerId="ADAL" clId="{4CED5798-B995-4604-96BA-7E646074EB82}" dt="2026-05-22T03:55:50.266" v="114" actId="1076"/>
+          <ac:spMkLst>
+            <pc:docMk/>
+            <pc:sldMk cId="0" sldId="268"/>
+            <ac:spMk id="24" creationId="{00000000-0000-0000-0000-000000000000}"/>
+          </ac:spMkLst>
+        </pc:spChg>
+      </pc:sldChg>
+    </pc:docChg>
+  </pc:docChgLst>
+</pc:chgInfo>
+</file>
+
+<file path=ppt/notesMasters/notesMaster1.xml><?xml version="1.0" encoding="utf-8"?>
+<p:notesMaster xmlns:a="http://schemas.openxmlformats.org/drawingml/2006/main" xmlns:r="http://schemas.openxmlformats.org/officeDocument/2006/relationships" xmlns:p="http://schemas.openxmlformats.org/presentationml/2006/main">
+  <p:cSld>
+    <p:bg>
+      <p:bgRef idx="1001">
+        <a:schemeClr val="bg1"/>
+      </p:bgRef>
+    </p:bg>
+    <p:spTree>
+      <p:nvGrpSpPr>
+        <p:cNvPr id="1" name=""/>
+        <p:cNvGrpSpPr/>
+        <p:nvPr/>
+      </p:nvGrpSpPr>
+      <p:grpSpPr>
+        <a:xfrm>
+          <a:off x="0" y="0"/>
+          <a:ext cx="0" cy="0"/>
+          <a:chOff x="0" y="0"/>
+          <a:chExt cx="0" cy="0"/>
+        </a:xfrm>
+      </p:grpSpPr>
+      <p:sp>
+        <p:nvSpPr>
+          <p:cNvPr id="2" name="ヘッダー プレースホルダー 1"/>
+          <p:cNvSpPr>
+            <a:spLocks noGrp="1"/>
+          </p:cNvSpPr>
+          <p:nvPr>
+            <p:ph type="hdr" sz="quarter"/>
+          </p:nvPr>
+        </p:nvSpPr>
+        <p:spPr>
+          <a:xfrm>
+            <a:off x="0" y="0"/>
+            <a:ext cx="2971800" cy="458788"/>
+          </a:xfrm>
+          <a:prstGeom prst="rect">
+            <a:avLst/>
+          </a:prstGeom>
+        </p:spPr>
+        <p:txBody>
+          <a:bodyPr vert="horz" lIns="91440" tIns="45720" rIns="91440" bIns="45720" rtlCol="0"/>
+          <a:lstStyle>
+            <a:lvl1pPr algn="l">
+              <a:defRPr sz="1200"/>
+            </a:lvl1pPr>
+          </a:lstStyle>
+          <a:p>
+            <a:endParaRPr kumimoji="1" lang="ja-JP" altLang="en-US"/>
+          </a:p>
+        </p:txBody>
+      </p:sp>
+      <p:sp>
+        <p:nvSpPr>
+          <p:cNvPr id="3" name="日付プレースホルダー 2"/>
+          <p:cNvSpPr>
+            <a:spLocks noGrp="1"/>
+          </p:cNvSpPr>
+          <p:nvPr>
+            <p:ph type="dt" idx="1"/>
+          </p:nvPr>
+        </p:nvSpPr>
+        <p:spPr>
+          <a:xfrm>
+            <a:off x="3884613" y="0"/>
+            <a:ext cx="2971800" cy="458788"/>
+          </a:xfrm>
+          <a:prstGeom prst="rect">
+            <a:avLst/>
+          </a:prstGeom>
+        </p:spPr>
+        <p:txBody>
+          <a:bodyPr vert="horz" lIns="91440" tIns="45720" rIns="91440" bIns="45720" rtlCol="0"/>
+          <a:lstStyle>
+            <a:lvl1pPr algn="r">
+              <a:defRPr sz="1200"/>
+            </a:lvl1pPr>
+          </a:lstStyle>
+          <a:p>
+            <a:fld id="{ED1BF8C0-1AC3-4ACA-AA65-73B95824CC49}" type="datetimeFigureOut">
+              <a:rPr kumimoji="1" lang="ja-JP" altLang="en-US" smtClean="0"/>
+              <a:t>2026/5/22</a:t>
+            </a:fld>
+            <a:endParaRPr kumimoji="1" lang="ja-JP" altLang="en-US"/>
+          </a:p>
+        </p:txBody>
+      </p:sp>
+      <p:sp>
+        <p:nvSpPr>
+          <p:cNvPr id="4" name="スライド イメージ プレースホルダー 3"/>
+          <p:cNvSpPr>
+            <a:spLocks noGrp="1" noRot="1" noChangeAspect="1"/>
+          </p:cNvSpPr>
+          <p:nvPr>
+            <p:ph type="sldImg" idx="2"/>
+          </p:nvPr>
+        </p:nvSpPr>
+        <p:spPr>
+          <a:xfrm>
+            <a:off x="685800" y="1143000"/>
+            <a:ext cx="5486400" cy="3086100"/>
+          </a:xfrm>
+          <a:prstGeom prst="rect">
+            <a:avLst/>
+          </a:prstGeom>
+          <a:noFill/>
+          <a:ln w="12700">
+            <a:solidFill>
+              <a:prstClr val="black"/>
+            </a:solidFill>
+          </a:ln>
+        </p:spPr>
+        <p:txBody>
+          <a:bodyPr vert="horz" lIns="91440" tIns="45720" rIns="91440" bIns="45720" rtlCol="0" anchor="ctr"/>
+          <a:lstStyle/>
+          <a:p>
+            <a:endParaRPr lang="ja-JP" altLang="en-US"/>
+          </a:p>
+        </p:txBody>
+      </p:sp>
+      <p:sp>
+        <p:nvSpPr>
+          <p:cNvPr id="5" name="ノート プレースホルダー 4"/>
+          <p:cNvSpPr>
+            <a:spLocks noGrp="1"/>
+          </p:cNvSpPr>
+          <p:nvPr>
+            <p:ph type="body" sz="quarter" idx="3"/>
+          </p:nvPr>
+        </p:nvSpPr>
+        <p:spPr>
+          <a:xfrm>
+            <a:off x="685800" y="4400550"/>
+            <a:ext cx="5486400" cy="3600450"/>
+          </a:xfrm>
+          <a:prstGeom prst="rect">
+            <a:avLst/>
+          </a:prstGeom>
+        </p:spPr>
+        <p:txBody>
+          <a:bodyPr vert="horz" lIns="91440" tIns="45720" rIns="91440" bIns="45720" rtlCol="0"/>
+          <a:lstStyle/>
+          <a:p>
+            <a:pPr lvl="0"/>
+            <a:r>
+              <a:rPr kumimoji="1" lang="ja-JP" altLang="en-US"/>
+              <a:t>マスター テキストの書式設定</a:t>
+            </a:r>
+          </a:p>
+          <a:p>
+            <a:pPr lvl="1"/>
+            <a:r>
+              <a:rPr kumimoji="1" lang="ja-JP" altLang="en-US"/>
+              <a:t>第 </a:t>
+            </a:r>
+            <a:r>
+              <a:rPr kumimoji="1" lang="en-US" altLang="ja-JP"/>
+              <a:t>2 </a:t>
+            </a:r>
+            <a:r>
+              <a:rPr kumimoji="1" lang="ja-JP" altLang="en-US"/>
+              <a:t>レベル</a:t>
+            </a:r>
+          </a:p>
+          <a:p>
+            <a:pPr lvl="2"/>
+            <a:r>
+              <a:rPr kumimoji="1" lang="ja-JP" altLang="en-US"/>
+              <a:t>第 </a:t>
+            </a:r>
+            <a:r>
+              <a:rPr kumimoji="1" lang="en-US" altLang="ja-JP"/>
+              <a:t>3 </a:t>
+            </a:r>
+            <a:r>
+              <a:rPr kumimoji="1" lang="ja-JP" altLang="en-US"/>
+              <a:t>レベル</a:t>
+            </a:r>
+          </a:p>
+          <a:p>
+            <a:pPr lvl="3"/>
+            <a:r>
+              <a:rPr kumimoji="1" lang="ja-JP" altLang="en-US"/>
+              <a:t>第 </a:t>
+            </a:r>
+            <a:r>
+              <a:rPr kumimoji="1" lang="en-US" altLang="ja-JP"/>
+              <a:t>4 </a:t>
+            </a:r>
+            <a:r>
+              <a:rPr kumimoji="1" lang="ja-JP" altLang="en-US"/>
+              <a:t>レベル</a:t>
+            </a:r>
+          </a:p>
+          <a:p>
+            <a:pPr lvl="4"/>
+            <a:r>
+              <a:rPr kumimoji="1" lang="ja-JP" altLang="en-US"/>
+              <a:t>第 </a:t>
+            </a:r>
+            <a:r>
+              <a:rPr kumimoji="1" lang="en-US" altLang="ja-JP"/>
+              <a:t>5 </a:t>
+            </a:r>
+            <a:r>
+              <a:rPr kumimoji="1" lang="ja-JP" altLang="en-US"/>
+              <a:t>レベル</a:t>
+            </a:r>
+          </a:p>
+        </p:txBody>
+      </p:sp>
+      <p:sp>
+        <p:nvSpPr>
+          <p:cNvPr id="6" name="フッター プレースホルダー 5"/>
+          <p:cNvSpPr>
+            <a:spLocks noGrp="1"/>
+          </p:cNvSpPr>
+          <p:nvPr>
+            <p:ph type="ftr" sz="quarter" idx="4"/>
+          </p:nvPr>
+        </p:nvSpPr>
+        <p:spPr>
+          <a:xfrm>
+            <a:off x="0" y="8685213"/>
+            <a:ext cx="2971800" cy="458787"/>
+          </a:xfrm>
+          <a:prstGeom prst="rect">
+            <a:avLst/>
+          </a:prstGeom>
+        </p:spPr>
+        <p:txBody>
+          <a:bodyPr vert="horz" lIns="91440" tIns="45720" rIns="91440" bIns="45720" rtlCol="0" anchor="b"/>
+          <a:lstStyle>
+            <a:lvl1pPr algn="l">
+              <a:defRPr sz="1200"/>
+            </a:lvl1pPr>
+          </a:lstStyle>
+          <a:p>
+            <a:endParaRPr kumimoji="1" lang="ja-JP" altLang="en-US"/>
+          </a:p>
+        </p:txBody>
+      </p:sp>
+      <p:sp>
+        <p:nvSpPr>
+          <p:cNvPr id="7" name="スライド番号プレースホルダー 6"/>
+          <p:cNvSpPr>
+            <a:spLocks noGrp="1"/>
+          </p:cNvSpPr>
+          <p:nvPr>
+            <p:ph type="sldNum" sz="quarter" idx="5"/>
+          </p:nvPr>
+        </p:nvSpPr>
+        <p:spPr>
+          <a:xfrm>
+            <a:off x="3884613" y="8685213"/>
+            <a:ext cx="2971800" cy="458787"/>
+          </a:xfrm>
+          <a:prstGeom prst="rect">
+            <a:avLst/>
+          </a:prstGeom>
+        </p:spPr>
+        <p:txBody>
+          <a:bodyPr vert="horz" lIns="91440" tIns="45720" rIns="91440" bIns="45720" rtlCol="0" anchor="b"/>
+          <a:lstStyle>
+            <a:lvl1pPr algn="r">
+              <a:defRPr sz="1200"/>
+            </a:lvl1pPr>
+          </a:lstStyle>
+          <a:p>
+            <a:fld id="{EA3568CA-8AD4-462C-BC67-B710F5AC22AA}" type="slidenum">
+              <a:rPr kumimoji="1" lang="ja-JP" altLang="en-US" smtClean="0"/>
+              <a:t>‹#›</a:t>
+            </a:fld>
+            <a:endParaRPr kumimoji="1" lang="ja-JP" altLang="en-US"/>
+          </a:p>
+        </p:txBody>
+      </p:sp>
+    </p:spTree>
+    <p:extLst>
+      <p:ext uri="{BB962C8B-B14F-4D97-AF65-F5344CB8AC3E}">
+        <p14:creationId xmlns:p14="http://schemas.microsoft.com/office/powerpoint/2010/main" val="3974904395"/>
+      </p:ext>
+    </p:extLst>
+  </p:cSld>
+  <p:clrMap bg1="lt1" tx1="dk1" bg2="lt2" tx2="dk2" accent1="accent1" accent2="accent2" accent3="accent3" accent4="accent4" accent5="accent5" accent6="accent6" hlink="hlink" folHlink="folHlink"/>
+  <p:notesStyle>
+    <a:lvl1pPr marL="0" algn="l" defTabSz="914400" rtl="0" eaLnBrk="1" latinLnBrk="0" hangingPunct="1">
+      <a:defRPr kumimoji="1" sz="1200" kern="1200">
+        <a:solidFill>
+          <a:schemeClr val="tx1"/>
+        </a:solidFill>
+        <a:latin typeface="+mn-lt"/>
+        <a:ea typeface="+mn-ea"/>
+        <a:cs typeface="+mn-cs"/>
+      </a:defRPr>
+    </a:lvl1pPr>
+    <a:lvl2pPr marL="457200" algn="l" defTabSz="914400" rtl="0" eaLnBrk="1" latinLnBrk="0" hangingPunct="1">
+      <a:defRPr kumimoji="1" sz="1200" kern="1200">
+        <a:solidFill>
+          <a:schemeClr val="tx1"/>
+        </a:solidFill>
+        <a:latin typeface="+mn-lt"/>
+        <a:ea typeface="+mn-ea"/>
+        <a:cs typeface="+mn-cs"/>
+      </a:defRPr>
+    </a:lvl2pPr>
+    <a:lvl3pPr marL="914400" algn="l" defTabSz="914400" rtl="0" eaLnBrk="1" latinLnBrk="0" hangingPunct="1">
+      <a:defRPr kumimoji="1" sz="1200" kern="1200">
+        <a:solidFill>
+          <a:schemeClr val="tx1"/>
+        </a:solidFill>
+        <a:latin typeface="+mn-lt"/>
+        <a:ea typeface="+mn-ea"/>
+        <a:cs typeface="+mn-cs"/>
+      </a:defRPr>
+    </a:lvl3pPr>
+    <a:lvl4pPr marL="1371600" algn="l" defTabSz="914400" rtl="0" eaLnBrk="1" latinLnBrk="0" hangingPunct="1">
+      <a:defRPr kumimoji="1" sz="1200" kern="1200">
+        <a:solidFill>
+          <a:schemeClr val="tx1"/>
+        </a:solidFill>
+        <a:latin typeface="+mn-lt"/>
+        <a:ea typeface="+mn-ea"/>
+        <a:cs typeface="+mn-cs"/>
+      </a:defRPr>
+    </a:lvl4pPr>
+    <a:lvl5pPr marL="1828800" algn="l" defTabSz="914400" rtl="0" eaLnBrk="1" latinLnBrk="0" hangingPunct="1">
+      <a:defRPr kumimoji="1" sz="1200" kern="1200">
+        <a:solidFill>
+          <a:schemeClr val="tx1"/>
+        </a:solidFill>
+        <a:latin typeface="+mn-lt"/>
+        <a:ea typeface="+mn-ea"/>
+        <a:cs typeface="+mn-cs"/>
+      </a:defRPr>
+    </a:lvl5pPr>
+    <a:lvl6pPr marL="2286000" algn="l" defTabSz="914400" rtl="0" eaLnBrk="1" latinLnBrk="0" hangingPunct="1">
+      <a:defRPr kumimoji="1" sz="1200" kern="1200">
+        <a:solidFill>
+          <a:schemeClr val="tx1"/>
+        </a:solidFill>
+        <a:latin typeface="+mn-lt"/>
+        <a:ea typeface="+mn-ea"/>
+        <a:cs typeface="+mn-cs"/>
+      </a:defRPr>
+    </a:lvl6pPr>
+    <a:lvl7pPr marL="2743200" algn="l" defTabSz="914400" rtl="0" eaLnBrk="1" latinLnBrk="0" hangingPunct="1">
+      <a:defRPr kumimoji="1" sz="1200" kern="1200">
+        <a:solidFill>
+          <a:schemeClr val="tx1"/>
+        </a:solidFill>
+        <a:latin typeface="+mn-lt"/>
+        <a:ea typeface="+mn-ea"/>
+        <a:cs typeface="+mn-cs"/>
+      </a:defRPr>
+    </a:lvl7pPr>
+    <a:lvl8pPr marL="3200400" algn="l" defTabSz="914400" rtl="0" eaLnBrk="1" latinLnBrk="0" hangingPunct="1">
+      <a:defRPr kumimoji="1" sz="1200" kern="1200">
+        <a:solidFill>
+          <a:schemeClr val="tx1"/>
+        </a:solidFill>
+        <a:latin typeface="+mn-lt"/>
+        <a:ea typeface="+mn-ea"/>
+        <a:cs typeface="+mn-cs"/>
+      </a:defRPr>
+    </a:lvl8pPr>
+    <a:lvl9pPr marL="3657600" algn="l" defTabSz="914400" rtl="0" eaLnBrk="1" latinLnBrk="0" hangingPunct="1">
+      <a:defRPr kumimoji="1" sz="1200" kern="1200">
+        <a:solidFill>
+          <a:schemeClr val="tx1"/>
+        </a:solidFill>
+        <a:latin typeface="+mn-lt"/>
+        <a:ea typeface="+mn-ea"/>
+        <a:cs typeface="+mn-cs"/>
+      </a:defRPr>
+    </a:lvl9pPr>
+  </p:notesStyle>
+</p:notesMaster>
+</file>
+
+<file path=ppt/notesSlides/notesSlide1.xml><?xml version="1.0" encoding="utf-8"?>
+<p:notes xmlns:a="http://schemas.openxmlformats.org/drawingml/2006/main" xmlns:r="http://schemas.openxmlformats.org/officeDocument/2006/relationships" xmlns:p="http://schemas.openxmlformats.org/presentationml/2006/main">
+  <p:cSld>
+    <p:spTree>
+      <p:nvGrpSpPr>
+        <p:cNvPr id="1" name=""/>
+        <p:cNvGrpSpPr/>
+        <p:nvPr/>
+      </p:nvGrpSpPr>
+      <p:grpSpPr>
+        <a:xfrm>
+          <a:off x="0" y="0"/>
+          <a:ext cx="0" cy="0"/>
+          <a:chOff x="0" y="0"/>
+          <a:chExt cx="0" cy="0"/>
+        </a:xfrm>
+      </p:grpSpPr>
+      <p:sp>
+        <p:nvSpPr>
+          <p:cNvPr id="2" name="スライド イメージ プレースホルダー 1"/>
+          <p:cNvSpPr>
+            <a:spLocks noGrp="1" noRot="1" noChangeAspect="1"/>
+          </p:cNvSpPr>
+          <p:nvPr>
+            <p:ph type="sldImg"/>
+          </p:nvPr>
+        </p:nvSpPr>
+        <p:spPr/>
+      </p:sp>
+      <p:sp>
+        <p:nvSpPr>
+          <p:cNvPr id="3" name="ノート プレースホルダー 2"/>
+          <p:cNvSpPr>
+            <a:spLocks noGrp="1"/>
+          </p:cNvSpPr>
+          <p:nvPr>
+            <p:ph type="body" idx="1"/>
+          </p:nvPr>
+        </p:nvSpPr>
+        <p:spPr/>
+        <p:txBody>
+          <a:bodyPr/>
+          <a:lstStyle/>
+          <a:p>
+            <a:endParaRPr kumimoji="1" lang="ja-JP" altLang="en-US" dirty="0"/>
+          </a:p>
+        </p:txBody>
+      </p:sp>
+      <p:sp>
+        <p:nvSpPr>
+          <p:cNvPr id="4" name="スライド番号プレースホルダー 3"/>
+          <p:cNvSpPr>
+            <a:spLocks noGrp="1"/>
+          </p:cNvSpPr>
+          <p:nvPr>
+            <p:ph type="sldNum" sz="quarter" idx="5"/>
+          </p:nvPr>
+        </p:nvSpPr>
+        <p:spPr/>
+        <p:txBody>
+          <a:bodyPr/>
+          <a:lstStyle/>
+          <a:p>
+            <a:fld id="{EA3568CA-8AD4-462C-BC67-B710F5AC22AA}" type="slidenum">
+              <a:rPr kumimoji="1" lang="ja-JP" altLang="en-US" smtClean="0"/>
+              <a:t>4</a:t>
+            </a:fld>
+            <a:endParaRPr kumimoji="1" lang="ja-JP" altLang="en-US"/>
+          </a:p>
+        </p:txBody>
+      </p:sp>
+    </p:spTree>
+    <p:extLst>
+      <p:ext uri="{BB962C8B-B14F-4D97-AF65-F5344CB8AC3E}">
+        <p14:creationId xmlns:p14="http://schemas.microsoft.com/office/powerpoint/2010/main" val="2826975933"/>
+      </p:ext>
+    </p:extLst>
+  </p:cSld>
+  <p:clrMapOvr>
+    <a:masterClrMapping/>
+  </p:clrMapOvr>
+</p:notes>
 </file>
 
 <file path=ppt/slideLayouts/slideLayout1.xml><?xml version="1.0" encoding="utf-8"?>
@@ -157,10 +1271,9 @@
           <a:lstStyle/>
           <a:p>
             <a:r>
-              <a:rPr lang="en-US" smtClean="0"/>
+              <a:rPr lang="en-US"/>
               <a:t>Click to edit Master title style</a:t>
             </a:r>
-            <a:endParaRPr lang="en-US"/>
           </a:p>
         </p:txBody>
       </p:sp>
@@ -276,10 +1389,9 @@
           </a:lstStyle>
           <a:p>
             <a:r>
-              <a:rPr lang="en-US" smtClean="0"/>
+              <a:rPr lang="en-US"/>
               <a:t>Click to edit Master subtitle style</a:t>
             </a:r>
-            <a:endParaRPr lang="en-US"/>
           </a:p>
         </p:txBody>
       </p:sp>
@@ -300,7 +1412,7 @@
           <a:p>
             <a:fld id="{5BCAD085-E8A6-8845-BD4E-CB4CCA059FC4}" type="datetimeFigureOut">
               <a:rPr lang="en-US" smtClean="0"/>
-              <a:t>1/27/13</a:t>
+              <a:t>5/22/2026</a:t>
             </a:fld>
             <a:endParaRPr lang="en-US"/>
           </a:p>
@@ -394,10 +1506,9 @@
           <a:lstStyle/>
           <a:p>
             <a:r>
-              <a:rPr lang="en-US" smtClean="0"/>
+              <a:rPr lang="en-US"/>
               <a:t>Click to edit Master title style</a:t>
             </a:r>
-            <a:endParaRPr lang="en-US"/>
           </a:p>
         </p:txBody>
       </p:sp>
@@ -418,38 +1529,37 @@
           <a:p>
             <a:pPr lvl="0"/>
             <a:r>
-              <a:rPr lang="en-US" smtClean="0"/>
+              <a:rPr lang="en-US"/>
               <a:t>Click to edit Master text styles</a:t>
             </a:r>
           </a:p>
           <a:p>
             <a:pPr lvl="1"/>
             <a:r>
-              <a:rPr lang="en-US" smtClean="0"/>
+              <a:rPr lang="en-US"/>
               <a:t>Second level</a:t>
             </a:r>
           </a:p>
           <a:p>
             <a:pPr lvl="2"/>
             <a:r>
-              <a:rPr lang="en-US" smtClean="0"/>
+              <a:rPr lang="en-US"/>
               <a:t>Third level</a:t>
             </a:r>
           </a:p>
           <a:p>
             <a:pPr lvl="3"/>
             <a:r>
-              <a:rPr lang="en-US" smtClean="0"/>
+              <a:rPr lang="en-US"/>
               <a:t>Fourth level</a:t>
             </a:r>
           </a:p>
           <a:p>
             <a:pPr lvl="4"/>
             <a:r>
-              <a:rPr lang="en-US" smtClean="0"/>
+              <a:rPr lang="en-US"/>
               <a:t>Fifth level</a:t>
             </a:r>
-            <a:endParaRPr lang="en-US"/>
           </a:p>
         </p:txBody>
       </p:sp>
@@ -470,7 +1580,7 @@
           <a:p>
             <a:fld id="{5BCAD085-E8A6-8845-BD4E-CB4CCA059FC4}" type="datetimeFigureOut">
               <a:rPr lang="en-US" smtClean="0"/>
-              <a:t>1/27/13</a:t>
+              <a:t>5/22/2026</a:t>
             </a:fld>
             <a:endParaRPr lang="en-US"/>
           </a:p>
@@ -569,10 +1679,9 @@
           <a:lstStyle/>
           <a:p>
             <a:r>
-              <a:rPr lang="en-US" smtClean="0"/>
+              <a:rPr lang="en-US"/>
               <a:t>Click to edit Master title style</a:t>
             </a:r>
-            <a:endParaRPr lang="en-US"/>
           </a:p>
         </p:txBody>
       </p:sp>
@@ -598,38 +1707,37 @@
           <a:p>
             <a:pPr lvl="0"/>
             <a:r>
-              <a:rPr lang="en-US" smtClean="0"/>
+              <a:rPr lang="en-US"/>
               <a:t>Click to edit Master text styles</a:t>
             </a:r>
           </a:p>
           <a:p>
             <a:pPr lvl="1"/>
             <a:r>
-              <a:rPr lang="en-US" smtClean="0"/>
+              <a:rPr lang="en-US"/>
               <a:t>Second level</a:t>
             </a:r>
           </a:p>
           <a:p>
             <a:pPr lvl="2"/>
             <a:r>
-              <a:rPr lang="en-US" smtClean="0"/>
+              <a:rPr lang="en-US"/>
               <a:t>Third level</a:t>
             </a:r>
           </a:p>
           <a:p>
             <a:pPr lvl="3"/>
             <a:r>
-              <a:rPr lang="en-US" smtClean="0"/>
+              <a:rPr lang="en-US"/>
               <a:t>Fourth level</a:t>
             </a:r>
           </a:p>
           <a:p>
             <a:pPr lvl="4"/>
             <a:r>
-              <a:rPr lang="en-US" smtClean="0"/>
+              <a:rPr lang="en-US"/>
               <a:t>Fifth level</a:t>
             </a:r>
-            <a:endParaRPr lang="en-US"/>
           </a:p>
         </p:txBody>
       </p:sp>
@@ -650,7 +1758,7 @@
           <a:p>
             <a:fld id="{5BCAD085-E8A6-8845-BD4E-CB4CCA059FC4}" type="datetimeFigureOut">
               <a:rPr lang="en-US" smtClean="0"/>
-              <a:t>1/27/13</a:t>
+              <a:t>5/22/2026</a:t>
             </a:fld>
             <a:endParaRPr lang="en-US"/>
           </a:p>
@@ -744,10 +1852,9 @@
           <a:lstStyle/>
           <a:p>
             <a:r>
-              <a:rPr lang="en-US" smtClean="0"/>
+              <a:rPr lang="en-US"/>
               <a:t>Click to edit Master title style</a:t>
             </a:r>
-            <a:endParaRPr lang="en-US"/>
           </a:p>
         </p:txBody>
       </p:sp>
@@ -768,38 +1875,37 @@
           <a:p>
             <a:pPr lvl="0"/>
             <a:r>
-              <a:rPr lang="en-US" smtClean="0"/>
+              <a:rPr lang="en-US"/>
               <a:t>Click to edit Master text styles</a:t>
             </a:r>
           </a:p>
           <a:p>
             <a:pPr lvl="1"/>
             <a:r>
-              <a:rPr lang="en-US" smtClean="0"/>
+              <a:rPr lang="en-US"/>
               <a:t>Second level</a:t>
             </a:r>
           </a:p>
           <a:p>
             <a:pPr lvl="2"/>
             <a:r>
-              <a:rPr lang="en-US" smtClean="0"/>
+              <a:rPr lang="en-US"/>
               <a:t>Third level</a:t>
             </a:r>
           </a:p>
           <a:p>
             <a:pPr lvl="3"/>
             <a:r>
-              <a:rPr lang="en-US" smtClean="0"/>
+              <a:rPr lang="en-US"/>
               <a:t>Fourth level</a:t>
             </a:r>
           </a:p>
           <a:p>
             <a:pPr lvl="4"/>
             <a:r>
-              <a:rPr lang="en-US" smtClean="0"/>
+              <a:rPr lang="en-US"/>
               <a:t>Fifth level</a:t>
             </a:r>
-            <a:endParaRPr lang="en-US"/>
           </a:p>
         </p:txBody>
       </p:sp>
@@ -820,7 +1926,7 @@
           <a:p>
             <a:fld id="{5BCAD085-E8A6-8845-BD4E-CB4CCA059FC4}" type="datetimeFigureOut">
               <a:rPr lang="en-US" smtClean="0"/>
-              <a:t>1/27/13</a:t>
+              <a:t>5/22/2026</a:t>
             </a:fld>
             <a:endParaRPr lang="en-US"/>
           </a:p>
@@ -923,10 +2029,9 @@
           </a:lstStyle>
           <a:p>
             <a:r>
-              <a:rPr lang="en-US" smtClean="0"/>
+              <a:rPr lang="en-US"/>
               <a:t>Click to edit Master title style</a:t>
             </a:r>
-            <a:endParaRPr lang="en-US"/>
           </a:p>
         </p:txBody>
       </p:sp>
@@ -1043,7 +2148,7 @@
           <a:p>
             <a:pPr lvl="0"/>
             <a:r>
-              <a:rPr lang="en-US" smtClean="0"/>
+              <a:rPr lang="en-US"/>
               <a:t>Click to edit Master text styles</a:t>
             </a:r>
           </a:p>
@@ -1066,7 +2171,7 @@
           <a:p>
             <a:fld id="{5BCAD085-E8A6-8845-BD4E-CB4CCA059FC4}" type="datetimeFigureOut">
               <a:rPr lang="en-US" smtClean="0"/>
-              <a:t>1/27/13</a:t>
+              <a:t>5/22/2026</a:t>
             </a:fld>
             <a:endParaRPr lang="en-US"/>
           </a:p>
@@ -1160,10 +2265,9 @@
           <a:lstStyle/>
           <a:p>
             <a:r>
-              <a:rPr lang="en-US" smtClean="0"/>
+              <a:rPr lang="en-US"/>
               <a:t>Click to edit Master title style</a:t>
             </a:r>
-            <a:endParaRPr lang="en-US"/>
           </a:p>
         </p:txBody>
       </p:sp>
@@ -1217,38 +2321,37 @@
           <a:p>
             <a:pPr lvl="0"/>
             <a:r>
-              <a:rPr lang="en-US" smtClean="0"/>
+              <a:rPr lang="en-US"/>
               <a:t>Click to edit Master text styles</a:t>
             </a:r>
           </a:p>
           <a:p>
             <a:pPr lvl="1"/>
             <a:r>
-              <a:rPr lang="en-US" smtClean="0"/>
+              <a:rPr lang="en-US"/>
               <a:t>Second level</a:t>
             </a:r>
           </a:p>
           <a:p>
             <a:pPr lvl="2"/>
             <a:r>
-              <a:rPr lang="en-US" smtClean="0"/>
+              <a:rPr lang="en-US"/>
               <a:t>Third level</a:t>
             </a:r>
           </a:p>
           <a:p>
             <a:pPr lvl="3"/>
             <a:r>
-              <a:rPr lang="en-US" smtClean="0"/>
+              <a:rPr lang="en-US"/>
               <a:t>Fourth level</a:t>
             </a:r>
           </a:p>
           <a:p>
             <a:pPr lvl="4"/>
             <a:r>
-              <a:rPr lang="en-US" smtClean="0"/>
+              <a:rPr lang="en-US"/>
               <a:t>Fifth level</a:t>
             </a:r>
-            <a:endParaRPr lang="en-US"/>
           </a:p>
         </p:txBody>
       </p:sp>
@@ -1302,38 +2405,37 @@
           <a:p>
             <a:pPr lvl="0"/>
             <a:r>
-              <a:rPr lang="en-US" smtClean="0"/>
+              <a:rPr lang="en-US"/>
               <a:t>Click to edit Master text styles</a:t>
             </a:r>
           </a:p>
           <a:p>
             <a:pPr lvl="1"/>
             <a:r>
-              <a:rPr lang="en-US" smtClean="0"/>
+              <a:rPr lang="en-US"/>
               <a:t>Second level</a:t>
             </a:r>
           </a:p>
           <a:p>
             <a:pPr lvl="2"/>
             <a:r>
-              <a:rPr lang="en-US" smtClean="0"/>
+              <a:rPr lang="en-US"/>
               <a:t>Third level</a:t>
             </a:r>
           </a:p>
           <a:p>
             <a:pPr lvl="3"/>
             <a:r>
-              <a:rPr lang="en-US" smtClean="0"/>
+              <a:rPr lang="en-US"/>
               <a:t>Fourth level</a:t>
             </a:r>
           </a:p>
           <a:p>
             <a:pPr lvl="4"/>
             <a:r>
-              <a:rPr lang="en-US" smtClean="0"/>
+              <a:rPr lang="en-US"/>
               <a:t>Fifth level</a:t>
             </a:r>
-            <a:endParaRPr lang="en-US"/>
           </a:p>
         </p:txBody>
       </p:sp>
@@ -1354,7 +2456,7 @@
           <a:p>
             <a:fld id="{5BCAD085-E8A6-8845-BD4E-CB4CCA059FC4}" type="datetimeFigureOut">
               <a:rPr lang="en-US" smtClean="0"/>
-              <a:t>1/27/13</a:t>
+              <a:t>5/22/2026</a:t>
             </a:fld>
             <a:endParaRPr lang="en-US"/>
           </a:p>
@@ -1452,10 +2554,9 @@
           </a:lstStyle>
           <a:p>
             <a:r>
-              <a:rPr lang="en-US" smtClean="0"/>
+              <a:rPr lang="en-US"/>
               <a:t>Click to edit Master title style</a:t>
             </a:r>
-            <a:endParaRPr lang="en-US"/>
           </a:p>
         </p:txBody>
       </p:sp>
@@ -1518,7 +2619,7 @@
           <a:p>
             <a:pPr lvl="0"/>
             <a:r>
-              <a:rPr lang="en-US" smtClean="0"/>
+              <a:rPr lang="en-US"/>
               <a:t>Click to edit Master text styles</a:t>
             </a:r>
           </a:p>
@@ -1574,38 +2675,37 @@
           <a:p>
             <a:pPr lvl="0"/>
             <a:r>
-              <a:rPr lang="en-US" smtClean="0"/>
+              <a:rPr lang="en-US"/>
               <a:t>Click to edit Master text styles</a:t>
             </a:r>
           </a:p>
           <a:p>
             <a:pPr lvl="1"/>
             <a:r>
-              <a:rPr lang="en-US" smtClean="0"/>
+              <a:rPr lang="en-US"/>
               <a:t>Second level</a:t>
             </a:r>
           </a:p>
           <a:p>
             <a:pPr lvl="2"/>
             <a:r>
-              <a:rPr lang="en-US" smtClean="0"/>
+              <a:rPr lang="en-US"/>
               <a:t>Third level</a:t>
             </a:r>
           </a:p>
           <a:p>
             <a:pPr lvl="3"/>
             <a:r>
-              <a:rPr lang="en-US" smtClean="0"/>
+              <a:rPr lang="en-US"/>
               <a:t>Fourth level</a:t>
             </a:r>
           </a:p>
           <a:p>
             <a:pPr lvl="4"/>
             <a:r>
-              <a:rPr lang="en-US" smtClean="0"/>
+              <a:rPr lang="en-US"/>
               <a:t>Fifth level</a:t>
             </a:r>
-            <a:endParaRPr lang="en-US"/>
           </a:p>
         </p:txBody>
       </p:sp>
@@ -1668,7 +2768,7 @@
           <a:p>
             <a:pPr lvl="0"/>
             <a:r>
-              <a:rPr lang="en-US" smtClean="0"/>
+              <a:rPr lang="en-US"/>
               <a:t>Click to edit Master text styles</a:t>
             </a:r>
           </a:p>
@@ -1724,38 +2824,37 @@
           <a:p>
             <a:pPr lvl="0"/>
             <a:r>
-              <a:rPr lang="en-US" smtClean="0"/>
+              <a:rPr lang="en-US"/>
               <a:t>Click to edit Master text styles</a:t>
             </a:r>
           </a:p>
           <a:p>
             <a:pPr lvl="1"/>
             <a:r>
-              <a:rPr lang="en-US" smtClean="0"/>
+              <a:rPr lang="en-US"/>
               <a:t>Second level</a:t>
             </a:r>
           </a:p>
           <a:p>
             <a:pPr lvl="2"/>
             <a:r>
-              <a:rPr lang="en-US" smtClean="0"/>
+              <a:rPr lang="en-US"/>
               <a:t>Third level</a:t>
             </a:r>
           </a:p>
           <a:p>
             <a:pPr lvl="3"/>
             <a:r>
-              <a:rPr lang="en-US" smtClean="0"/>
+              <a:rPr lang="en-US"/>
               <a:t>Fourth level</a:t>
             </a:r>
           </a:p>
           <a:p>
             <a:pPr lvl="4"/>
             <a:r>
-              <a:rPr lang="en-US" smtClean="0"/>
+              <a:rPr lang="en-US"/>
               <a:t>Fifth level</a:t>
             </a:r>
-            <a:endParaRPr lang="en-US"/>
           </a:p>
         </p:txBody>
       </p:sp>
@@ -1776,7 +2875,7 @@
           <a:p>
             <a:fld id="{5BCAD085-E8A6-8845-BD4E-CB4CCA059FC4}" type="datetimeFigureOut">
               <a:rPr lang="en-US" smtClean="0"/>
-              <a:t>1/27/13</a:t>
+              <a:t>5/22/2026</a:t>
             </a:fld>
             <a:endParaRPr lang="en-US"/>
           </a:p>
@@ -1870,10 +2969,9 @@
           <a:lstStyle/>
           <a:p>
             <a:r>
-              <a:rPr lang="en-US" smtClean="0"/>
+              <a:rPr lang="en-US"/>
               <a:t>Click to edit Master title style</a:t>
             </a:r>
-            <a:endParaRPr lang="en-US"/>
           </a:p>
         </p:txBody>
       </p:sp>
@@ -1894,7 +2992,7 @@
           <a:p>
             <a:fld id="{5BCAD085-E8A6-8845-BD4E-CB4CCA059FC4}" type="datetimeFigureOut">
               <a:rPr lang="en-US" smtClean="0"/>
-              <a:t>1/27/13</a:t>
+              <a:t>5/22/2026</a:t>
             </a:fld>
             <a:endParaRPr lang="en-US"/>
           </a:p>
@@ -1989,7 +3087,7 @@
           <a:p>
             <a:fld id="{5BCAD085-E8A6-8845-BD4E-CB4CCA059FC4}" type="datetimeFigureOut">
               <a:rPr lang="en-US" smtClean="0"/>
-              <a:t>1/27/13</a:t>
+              <a:t>5/22/2026</a:t>
             </a:fld>
             <a:endParaRPr lang="en-US"/>
           </a:p>
@@ -2092,10 +3190,9 @@
           </a:lstStyle>
           <a:p>
             <a:r>
-              <a:rPr lang="en-US" smtClean="0"/>
+              <a:rPr lang="en-US"/>
               <a:t>Click to edit Master title style</a:t>
             </a:r>
-            <a:endParaRPr lang="en-US"/>
           </a:p>
         </p:txBody>
       </p:sp>
@@ -2149,38 +3246,37 @@
           <a:p>
             <a:pPr lvl="0"/>
             <a:r>
-              <a:rPr lang="en-US" smtClean="0"/>
+              <a:rPr lang="en-US"/>
               <a:t>Click to edit Master text styles</a:t>
             </a:r>
           </a:p>
           <a:p>
             <a:pPr lvl="1"/>
             <a:r>
-              <a:rPr lang="en-US" smtClean="0"/>
+              <a:rPr lang="en-US"/>
               <a:t>Second level</a:t>
             </a:r>
           </a:p>
           <a:p>
             <a:pPr lvl="2"/>
             <a:r>
-              <a:rPr lang="en-US" smtClean="0"/>
+              <a:rPr lang="en-US"/>
               <a:t>Third level</a:t>
             </a:r>
           </a:p>
           <a:p>
             <a:pPr lvl="3"/>
             <a:r>
-              <a:rPr lang="en-US" smtClean="0"/>
+              <a:rPr lang="en-US"/>
               <a:t>Fourth level</a:t>
             </a:r>
           </a:p>
           <a:p>
             <a:pPr lvl="4"/>
             <a:r>
-              <a:rPr lang="en-US" smtClean="0"/>
+              <a:rPr lang="en-US"/>
               <a:t>Fifth level</a:t>
             </a:r>
-            <a:endParaRPr lang="en-US"/>
           </a:p>
         </p:txBody>
       </p:sp>
@@ -2243,7 +3339,7 @@
           <a:p>
             <a:pPr lvl="0"/>
             <a:r>
-              <a:rPr lang="en-US" smtClean="0"/>
+              <a:rPr lang="en-US"/>
               <a:t>Click to edit Master text styles</a:t>
             </a:r>
           </a:p>
@@ -2266,7 +3362,7 @@
           <a:p>
             <a:fld id="{5BCAD085-E8A6-8845-BD4E-CB4CCA059FC4}" type="datetimeFigureOut">
               <a:rPr lang="en-US" smtClean="0"/>
-              <a:t>1/27/13</a:t>
+              <a:t>5/22/2026</a:t>
             </a:fld>
             <a:endParaRPr lang="en-US"/>
           </a:p>
@@ -2369,10 +3465,9 @@
           </a:lstStyle>
           <a:p>
             <a:r>
-              <a:rPr lang="en-US" smtClean="0"/>
+              <a:rPr lang="en-US"/>
               <a:t>Click to edit Master title style</a:t>
             </a:r>
-            <a:endParaRPr lang="en-US"/>
           </a:p>
         </p:txBody>
       </p:sp>
@@ -2496,7 +3591,7 @@
           <a:p>
             <a:pPr lvl="0"/>
             <a:r>
-              <a:rPr lang="en-US" smtClean="0"/>
+              <a:rPr lang="en-US"/>
               <a:t>Click to edit Master text styles</a:t>
             </a:r>
           </a:p>
@@ -2519,7 +3614,7 @@
           <a:p>
             <a:fld id="{5BCAD085-E8A6-8845-BD4E-CB4CCA059FC4}" type="datetimeFigureOut">
               <a:rPr lang="en-US" smtClean="0"/>
-              <a:t>1/27/13</a:t>
+              <a:t>5/22/2026</a:t>
             </a:fld>
             <a:endParaRPr lang="en-US"/>
           </a:p>
@@ -2628,10 +3723,9 @@
           <a:lstStyle/>
           <a:p>
             <a:r>
-              <a:rPr lang="en-US" smtClean="0"/>
+              <a:rPr lang="en-US"/>
               <a:t>Click to edit Master title style</a:t>
             </a:r>
-            <a:endParaRPr lang="en-US"/>
           </a:p>
         </p:txBody>
       </p:sp>
@@ -2662,38 +3756,37 @@
           <a:p>
             <a:pPr lvl="0"/>
             <a:r>
-              <a:rPr lang="en-US" smtClean="0"/>
+              <a:rPr lang="en-US"/>
               <a:t>Click to edit Master text styles</a:t>
             </a:r>
           </a:p>
           <a:p>
             <a:pPr lvl="1"/>
             <a:r>
-              <a:rPr lang="en-US" smtClean="0"/>
+              <a:rPr lang="en-US"/>
               <a:t>Second level</a:t>
             </a:r>
           </a:p>
           <a:p>
             <a:pPr lvl="2"/>
             <a:r>
-              <a:rPr lang="en-US" smtClean="0"/>
+              <a:rPr lang="en-US"/>
               <a:t>Third level</a:t>
             </a:r>
           </a:p>
           <a:p>
             <a:pPr lvl="3"/>
             <a:r>
-              <a:rPr lang="en-US" smtClean="0"/>
+              <a:rPr lang="en-US"/>
               <a:t>Fourth level</a:t>
             </a:r>
           </a:p>
           <a:p>
             <a:pPr lvl="4"/>
             <a:r>
-              <a:rPr lang="en-US" smtClean="0"/>
+              <a:rPr lang="en-US"/>
               <a:t>Fifth level</a:t>
             </a:r>
-            <a:endParaRPr lang="en-US"/>
           </a:p>
         </p:txBody>
       </p:sp>
@@ -2732,7 +3825,7 @@
           <a:p>
             <a:fld id="{5BCAD085-E8A6-8845-BD4E-CB4CCA059FC4}" type="datetimeFigureOut">
               <a:rPr lang="en-US" smtClean="0"/>
-              <a:t>1/27/13</a:t>
+              <a:t>5/22/2026</a:t>
             </a:fld>
             <a:endParaRPr lang="en-US"/>
           </a:p>
@@ -3091,7 +4184,7 @@
 </file>
 
 <file path=ppt/slides/slide1.xml><?xml version="1.0" encoding="utf-8"?>
-<p:sld xmlns:a="http://schemas.openxmlformats.org/drawingml/2006/main" xmlns:p="http://schemas.openxmlformats.org/presentationml/2006/main" xmlns:r="http://schemas.openxmlformats.org/officeDocument/2006/relationships">
+<p:sld xmlns:a="http://schemas.openxmlformats.org/drawingml/2006/main" xmlns:r="http://schemas.openxmlformats.org/officeDocument/2006/relationships" xmlns:p="http://schemas.openxmlformats.org/presentationml/2006/main">
   <p:cSld>
     <p:spTree>
       <p:nvGrpSpPr>
@@ -3099,7 +4192,14 @@
         <p:cNvGrpSpPr/>
         <p:nvPr/>
       </p:nvGrpSpPr>
-      <p:grpSpPr/>
+      <p:grpSpPr>
+        <a:xfrm>
+          <a:off x="0" y="0"/>
+          <a:ext cx="0" cy="0"/>
+          <a:chOff x="0" y="0"/>
+          <a:chExt cx="0" cy="0"/>
+        </a:xfrm>
+      </p:grpSpPr>
       <p:sp>
         <p:nvSpPr>
           <p:cNvPr id="2" name="Rectangle 1"/>
@@ -3140,6 +4240,7 @@
           <a:lstStyle/>
           <a:p>
             <a:pPr algn="ctr"/>
+            <a:endParaRPr/>
           </a:p>
         </p:txBody>
       </p:sp>
@@ -3183,6 +4284,7 @@
           <a:lstStyle/>
           <a:p>
             <a:pPr algn="ctr"/>
+            <a:endParaRPr/>
           </a:p>
         </p:txBody>
       </p:sp>
@@ -3194,8 +4296,8 @@
         </p:nvSpPr>
         <p:spPr>
           <a:xfrm>
-            <a:off x="540000" y="1620000"/>
-            <a:ext cx="11113200" cy="3060000"/>
+            <a:off x="540000" y="452063"/>
+            <a:ext cx="10977330" cy="5989834"/>
           </a:xfrm>
           <a:prstGeom prst="rect">
             <a:avLst/>
@@ -3226,6 +4328,7 @@
           <a:lstStyle/>
           <a:p>
             <a:pPr algn="ctr"/>
+            <a:endParaRPr/>
           </a:p>
         </p:txBody>
       </p:sp>
@@ -3237,8 +4340,8 @@
         </p:nvSpPr>
         <p:spPr>
           <a:xfrm>
-            <a:off x="540000" y="1620000"/>
-            <a:ext cx="144000" cy="3060000"/>
+            <a:off x="540000" y="452063"/>
+            <a:ext cx="142239" cy="5989834"/>
           </a:xfrm>
           <a:prstGeom prst="rect">
             <a:avLst/>
@@ -3269,6 +4372,7 @@
           <a:lstStyle/>
           <a:p>
             <a:pPr algn="ctr"/>
+            <a:endParaRPr/>
           </a:p>
         </p:txBody>
       </p:sp>
@@ -3280,8 +4384,8 @@
         </p:nvSpPr>
         <p:spPr>
           <a:xfrm>
-            <a:off x="900000" y="1800000"/>
-            <a:ext cx="10440000" cy="1620000"/>
+            <a:off x="943604" y="2889280"/>
+            <a:ext cx="10312361" cy="954107"/>
           </a:xfrm>
           <a:prstGeom prst="rect">
             <a:avLst/>
@@ -3294,17 +4398,41 @@
           </a:bodyPr>
           <a:lstStyle/>
           <a:p>
-            <a:pPr algn="l"/>
-            <a:r>
-              <a:rPr sz="2800" b="1">
+            <a:pPr algn="ctr"/>
+            <a:r>
+              <a:rPr sz="2800" b="1" dirty="0" err="1">
                 <a:solidFill>
                   <a:srgbClr val="1E293B"/>
                 </a:solidFill>
                 <a:latin typeface="游ゴシック"/>
               </a:rPr>
-              <a:t>河川氾濫時における自家用車避難と
-デマンド交通バス活用の比較シミュレーション</a:t>
-            </a:r>
+              <a:t>河川氾濫時における自家用車避難と</a:t>
+            </a:r>
+            <a:r>
+              <a:rPr sz="2800" b="1" dirty="0">
+                <a:solidFill>
+                  <a:srgbClr val="1E293B"/>
+                </a:solidFill>
+                <a:latin typeface="游ゴシック"/>
+              </a:rPr>
+              <a:t>
+</a:t>
+            </a:r>
+            <a:r>
+              <a:rPr sz="2800" b="1" dirty="0" err="1">
+                <a:solidFill>
+                  <a:srgbClr val="1E293B"/>
+                </a:solidFill>
+                <a:latin typeface="游ゴシック"/>
+              </a:rPr>
+              <a:t>デマンド交通バス活用の比較シミュレーション</a:t>
+            </a:r>
+            <a:endParaRPr sz="2800" b="1" dirty="0">
+              <a:solidFill>
+                <a:srgbClr val="1E293B"/>
+              </a:solidFill>
+              <a:latin typeface="游ゴシック"/>
+            </a:endParaRPr>
           </a:p>
         </p:txBody>
       </p:sp>
@@ -3316,8 +4444,8 @@
         </p:nvSpPr>
         <p:spPr>
           <a:xfrm>
-            <a:off x="900000" y="3420000"/>
-            <a:ext cx="10440000" cy="288000"/>
+            <a:off x="1222239" y="1514942"/>
+            <a:ext cx="3424550" cy="338554"/>
           </a:xfrm>
           <a:prstGeom prst="rect">
             <a:avLst/>
@@ -3332,14 +4460,38 @@
           <a:p>
             <a:pPr algn="l"/>
             <a:r>
-              <a:rPr sz="1600" b="0">
+              <a:rPr sz="1600" b="0" dirty="0" err="1">
                 <a:solidFill>
                   <a:srgbClr val="64748B"/>
                 </a:solidFill>
                 <a:latin typeface="游ゴシック"/>
               </a:rPr>
-              <a:t>卒業研究 進捗発表会</a:t>
-            </a:r>
+              <a:t>卒業研究</a:t>
+            </a:r>
+            <a:r>
+              <a:rPr sz="1600" b="0" dirty="0">
+                <a:solidFill>
+                  <a:srgbClr val="64748B"/>
+                </a:solidFill>
+                <a:latin typeface="游ゴシック"/>
+              </a:rPr>
+              <a:t> </a:t>
+            </a:r>
+            <a:r>
+              <a:rPr sz="1600" b="0" dirty="0" err="1">
+                <a:solidFill>
+                  <a:srgbClr val="64748B"/>
+                </a:solidFill>
+                <a:latin typeface="游ゴシック"/>
+              </a:rPr>
+              <a:t>進捗発表会</a:t>
+            </a:r>
+            <a:endParaRPr sz="1600" b="0" dirty="0">
+              <a:solidFill>
+                <a:srgbClr val="64748B"/>
+              </a:solidFill>
+              <a:latin typeface="游ゴシック"/>
+            </a:endParaRPr>
           </a:p>
         </p:txBody>
       </p:sp>
@@ -3351,8 +4503,8 @@
         </p:nvSpPr>
         <p:spPr>
           <a:xfrm>
-            <a:off x="900000" y="3708000"/>
-            <a:ext cx="10440000" cy="288000"/>
+            <a:off x="7551506" y="4514444"/>
+            <a:ext cx="3424550" cy="338554"/>
           </a:xfrm>
           <a:prstGeom prst="rect">
             <a:avLst/>
@@ -3367,14 +4519,65 @@
           <a:p>
             <a:pPr algn="l"/>
             <a:r>
-              <a:rPr sz="1600" b="0">
+              <a:rPr lang="ja-JP" altLang="en-US" sz="1600" dirty="0">
                 <a:solidFill>
                   <a:srgbClr val="1E293B"/>
                 </a:solidFill>
                 <a:latin typeface="游ゴシック"/>
               </a:rPr>
-              <a:t>XX研究室　氏名：＿＿＿＿＿＿</a:t>
-            </a:r>
+              <a:t>眞坂</a:t>
+            </a:r>
+            <a:r>
+              <a:rPr sz="1600" b="0" dirty="0" err="1">
+                <a:solidFill>
+                  <a:srgbClr val="1E293B"/>
+                </a:solidFill>
+                <a:latin typeface="游ゴシック"/>
+              </a:rPr>
+              <a:t>研究室</a:t>
+            </a:r>
+            <a:r>
+              <a:rPr sz="1600" b="0" dirty="0">
+                <a:solidFill>
+                  <a:srgbClr val="1E293B"/>
+                </a:solidFill>
+                <a:latin typeface="游ゴシック"/>
+              </a:rPr>
+              <a:t>　</a:t>
+            </a:r>
+            <a:r>
+              <a:rPr sz="1600" b="0" dirty="0" err="1">
+                <a:solidFill>
+                  <a:srgbClr val="1E293B"/>
+                </a:solidFill>
+                <a:latin typeface="游ゴシック"/>
+              </a:rPr>
+              <a:t>氏名</a:t>
+            </a:r>
+            <a:r>
+              <a:rPr sz="1600" b="0" dirty="0">
+                <a:solidFill>
+                  <a:srgbClr val="1E293B"/>
+                </a:solidFill>
+                <a:latin typeface="游ゴシック"/>
+              </a:rPr>
+              <a:t>：</a:t>
+            </a:r>
+            <a:r>
+              <a:rPr lang="ja-JP" altLang="en-US" sz="1600" b="0" dirty="0">
+                <a:solidFill>
+                  <a:srgbClr val="1E293B"/>
+                </a:solidFill>
+                <a:latin typeface="游ゴシック"/>
+              </a:rPr>
+              <a:t>古賀玲次</a:t>
+            </a:r>
+            <a:endParaRPr sz="1600" b="0" dirty="0">
+              <a:solidFill>
+                <a:srgbClr val="1E293B"/>
+              </a:solidFill>
+              <a:latin typeface="游ゴシック"/>
+            </a:endParaRPr>
           </a:p>
         </p:txBody>
       </p:sp>
@@ -3386,8 +4589,8 @@
         </p:nvSpPr>
         <p:spPr>
           <a:xfrm>
-            <a:off x="900000" y="4031999"/>
-            <a:ext cx="10440000" cy="288000"/>
+            <a:off x="7551506" y="4838444"/>
+            <a:ext cx="3424550" cy="307777"/>
           </a:xfrm>
           <a:prstGeom prst="rect">
             <a:avLst/>
@@ -3402,7 +4605,7 @@
           <a:p>
             <a:pPr algn="l"/>
             <a:r>
-              <a:rPr sz="1400" b="0">
+              <a:rPr sz="1400" b="0" dirty="0">
                 <a:solidFill>
                   <a:srgbClr val="64748B"/>
                 </a:solidFill>
@@ -3422,7 +4625,7 @@
 </file>
 
 <file path=ppt/slides/slide10.xml><?xml version="1.0" encoding="utf-8"?>
-<p:sld xmlns:a="http://schemas.openxmlformats.org/drawingml/2006/main" xmlns:p="http://schemas.openxmlformats.org/presentationml/2006/main" xmlns:r="http://schemas.openxmlformats.org/officeDocument/2006/relationships">
+<p:sld xmlns:a="http://schemas.openxmlformats.org/drawingml/2006/main" xmlns:r="http://schemas.openxmlformats.org/officeDocument/2006/relationships" xmlns:p="http://schemas.openxmlformats.org/presentationml/2006/main">
   <p:cSld>
     <p:spTree>
       <p:nvGrpSpPr>
@@ -3430,7 +4633,14 @@
         <p:cNvGrpSpPr/>
         <p:nvPr/>
       </p:nvGrpSpPr>
-      <p:grpSpPr/>
+      <p:grpSpPr>
+        <a:xfrm>
+          <a:off x="0" y="0"/>
+          <a:ext cx="0" cy="0"/>
+          <a:chOff x="0" y="0"/>
+          <a:chExt cx="0" cy="0"/>
+        </a:xfrm>
+      </p:grpSpPr>
       <p:sp>
         <p:nvSpPr>
           <p:cNvPr id="2" name="Rectangle 1"/>
@@ -3471,6 +4681,7 @@
           <a:lstStyle/>
           <a:p>
             <a:pPr algn="ctr"/>
+            <a:endParaRPr/>
           </a:p>
         </p:txBody>
       </p:sp>
@@ -3514,6 +4725,7 @@
           <a:lstStyle/>
           <a:p>
             <a:pPr algn="ctr"/>
+            <a:endParaRPr/>
           </a:p>
         </p:txBody>
       </p:sp>
@@ -3592,6 +4804,7 @@
           <a:lstStyle/>
           <a:p>
             <a:pPr algn="ctr"/>
+            <a:endParaRPr/>
           </a:p>
         </p:txBody>
       </p:sp>
@@ -3618,15 +4831,7 @@
           <a:lstStyle/>
           <a:p>
             <a:pPr algn="r"/>
-            <a:r>
-              <a:rPr sz="1100" b="0">
-                <a:solidFill>
-                  <a:srgbClr val="64748B"/>
-                </a:solidFill>
-                <a:latin typeface="游ゴシック"/>
-              </a:rPr>
-              <a:t/>
-            </a:r>
+            <a:endParaRPr/>
           </a:p>
         </p:txBody>
       </p:sp>
@@ -3649,12 +4854,48 @@
                 <a:tableStyleId>{5C22544A-7EE6-4342-B048-85BDC9FD1C3A}</a:tableStyleId>
               </a:tblPr>
               <a:tblGrid>
-                <a:gridCol w="1620000"/>
-                <a:gridCol w="1620000"/>
-                <a:gridCol w="1620000"/>
-                <a:gridCol w="1620000"/>
-                <a:gridCol w="1440000"/>
-                <a:gridCol w="3193199"/>
+                <a:gridCol w="1620000">
+                  <a:extLst>
+                    <a:ext uri="{9D8B030D-6E8A-4147-A177-3AD203B41FA5}">
+                      <a16:colId xmlns:a16="http://schemas.microsoft.com/office/drawing/2014/main" val="20000"/>
+                    </a:ext>
+                  </a:extLst>
+                </a:gridCol>
+                <a:gridCol w="1620000">
+                  <a:extLst>
+                    <a:ext uri="{9D8B030D-6E8A-4147-A177-3AD203B41FA5}">
+                      <a16:colId xmlns:a16="http://schemas.microsoft.com/office/drawing/2014/main" val="20001"/>
+                    </a:ext>
+                  </a:extLst>
+                </a:gridCol>
+                <a:gridCol w="1620000">
+                  <a:extLst>
+                    <a:ext uri="{9D8B030D-6E8A-4147-A177-3AD203B41FA5}">
+                      <a16:colId xmlns:a16="http://schemas.microsoft.com/office/drawing/2014/main" val="20002"/>
+                    </a:ext>
+                  </a:extLst>
+                </a:gridCol>
+                <a:gridCol w="1620000">
+                  <a:extLst>
+                    <a:ext uri="{9D8B030D-6E8A-4147-A177-3AD203B41FA5}">
+                      <a16:colId xmlns:a16="http://schemas.microsoft.com/office/drawing/2014/main" val="20003"/>
+                    </a:ext>
+                  </a:extLst>
+                </a:gridCol>
+                <a:gridCol w="1440000">
+                  <a:extLst>
+                    <a:ext uri="{9D8B030D-6E8A-4147-A177-3AD203B41FA5}">
+                      <a16:colId xmlns:a16="http://schemas.microsoft.com/office/drawing/2014/main" val="20004"/>
+                    </a:ext>
+                  </a:extLst>
+                </a:gridCol>
+                <a:gridCol w="3193199">
+                  <a:extLst>
+                    <a:ext uri="{9D8B030D-6E8A-4147-A177-3AD203B41FA5}">
+                      <a16:colId xmlns:a16="http://schemas.microsoft.com/office/drawing/2014/main" val="20005"/>
+                    </a:ext>
+                  </a:extLst>
+                </a:gridCol>
               </a:tblGrid>
               <a:tr h="675000">
                 <a:tc>
@@ -3795,6 +5036,11 @@
                     </a:solidFill>
                   </a:tcPr>
                 </a:tc>
+                <a:extLst>
+                  <a:ext uri="{0D108BD9-81ED-4DB2-BD59-A6C34878D82A}">
+                    <a16:rowId xmlns:a16="http://schemas.microsoft.com/office/drawing/2014/main" val="10000"/>
+                  </a:ext>
+                </a:extLst>
               </a:tr>
               <a:tr h="675000">
                 <a:tc>
@@ -3893,6 +5139,11 @@
                   </a:txBody>
                   <a:tcPr/>
                 </a:tc>
+                <a:extLst>
+                  <a:ext uri="{0D108BD9-81ED-4DB2-BD59-A6C34878D82A}">
+                    <a16:rowId xmlns:a16="http://schemas.microsoft.com/office/drawing/2014/main" val="10001"/>
+                  </a:ext>
+                </a:extLst>
               </a:tr>
               <a:tr h="675000">
                 <a:tc>
@@ -4015,6 +5266,11 @@
                     </a:solidFill>
                   </a:tcPr>
                 </a:tc>
+                <a:extLst>
+                  <a:ext uri="{0D108BD9-81ED-4DB2-BD59-A6C34878D82A}">
+                    <a16:rowId xmlns:a16="http://schemas.microsoft.com/office/drawing/2014/main" val="10002"/>
+                  </a:ext>
+                </a:extLst>
               </a:tr>
               <a:tr h="675000">
                 <a:tc>
@@ -4113,6 +5369,11 @@
                   </a:txBody>
                   <a:tcPr/>
                 </a:tc>
+                <a:extLst>
+                  <a:ext uri="{0D108BD9-81ED-4DB2-BD59-A6C34878D82A}">
+                    <a16:rowId xmlns:a16="http://schemas.microsoft.com/office/drawing/2014/main" val="10003"/>
+                  </a:ext>
+                </a:extLst>
               </a:tr>
             </a:tbl>
           </a:graphicData>
@@ -4160,6 +5421,7 @@
           <a:lstStyle/>
           <a:p>
             <a:pPr algn="ctr"/>
+            <a:endParaRPr/>
           </a:p>
         </p:txBody>
       </p:sp>
@@ -4276,6 +5538,7 @@
           <a:lstStyle/>
           <a:p>
             <a:pPr algn="ctr"/>
+            <a:endParaRPr/>
           </a:p>
         </p:txBody>
       </p:sp>
@@ -4394,7 +5657,7 @@
 </file>
 
 <file path=ppt/slides/slide11.xml><?xml version="1.0" encoding="utf-8"?>
-<p:sld xmlns:a="http://schemas.openxmlformats.org/drawingml/2006/main" xmlns:p="http://schemas.openxmlformats.org/presentationml/2006/main" xmlns:r="http://schemas.openxmlformats.org/officeDocument/2006/relationships">
+<p:sld xmlns:a="http://schemas.openxmlformats.org/drawingml/2006/main" xmlns:r="http://schemas.openxmlformats.org/officeDocument/2006/relationships" xmlns:p="http://schemas.openxmlformats.org/presentationml/2006/main">
   <p:cSld>
     <p:spTree>
       <p:nvGrpSpPr>
@@ -4402,7 +5665,14 @@
         <p:cNvGrpSpPr/>
         <p:nvPr/>
       </p:nvGrpSpPr>
-      <p:grpSpPr/>
+      <p:grpSpPr>
+        <a:xfrm>
+          <a:off x="0" y="0"/>
+          <a:ext cx="0" cy="0"/>
+          <a:chOff x="0" y="0"/>
+          <a:chExt cx="0" cy="0"/>
+        </a:xfrm>
+      </p:grpSpPr>
       <p:sp>
         <p:nvSpPr>
           <p:cNvPr id="2" name="Rectangle 1"/>
@@ -4443,6 +5713,7 @@
           <a:lstStyle/>
           <a:p>
             <a:pPr algn="ctr"/>
+            <a:endParaRPr/>
           </a:p>
         </p:txBody>
       </p:sp>
@@ -4486,6 +5757,7 @@
           <a:lstStyle/>
           <a:p>
             <a:pPr algn="ctr"/>
+            <a:endParaRPr/>
           </a:p>
         </p:txBody>
       </p:sp>
@@ -4564,6 +5836,7 @@
           <a:lstStyle/>
           <a:p>
             <a:pPr algn="ctr"/>
+            <a:endParaRPr/>
           </a:p>
         </p:txBody>
       </p:sp>
@@ -4590,15 +5863,7 @@
           <a:lstStyle/>
           <a:p>
             <a:pPr algn="r"/>
-            <a:r>
-              <a:rPr sz="1100" b="0">
-                <a:solidFill>
-                  <a:srgbClr val="64748B"/>
-                </a:solidFill>
-                <a:latin typeface="游ゴシック"/>
-              </a:rPr>
-              <a:t/>
-            </a:r>
+            <a:endParaRPr/>
           </a:p>
         </p:txBody>
       </p:sp>
@@ -4621,11 +5886,41 @@
                 <a:tableStyleId>{5C22544A-7EE6-4342-B048-85BDC9FD1C3A}</a:tableStyleId>
               </a:tblPr>
               <a:tblGrid>
-                <a:gridCol w="2700000"/>
-                <a:gridCol w="1800000"/>
-                <a:gridCol w="1800000"/>
-                <a:gridCol w="2160000"/>
-                <a:gridCol w="2653200"/>
+                <a:gridCol w="2700000">
+                  <a:extLst>
+                    <a:ext uri="{9D8B030D-6E8A-4147-A177-3AD203B41FA5}">
+                      <a16:colId xmlns:a16="http://schemas.microsoft.com/office/drawing/2014/main" val="20000"/>
+                    </a:ext>
+                  </a:extLst>
+                </a:gridCol>
+                <a:gridCol w="1800000">
+                  <a:extLst>
+                    <a:ext uri="{9D8B030D-6E8A-4147-A177-3AD203B41FA5}">
+                      <a16:colId xmlns:a16="http://schemas.microsoft.com/office/drawing/2014/main" val="20001"/>
+                    </a:ext>
+                  </a:extLst>
+                </a:gridCol>
+                <a:gridCol w="1800000">
+                  <a:extLst>
+                    <a:ext uri="{9D8B030D-6E8A-4147-A177-3AD203B41FA5}">
+                      <a16:colId xmlns:a16="http://schemas.microsoft.com/office/drawing/2014/main" val="20002"/>
+                    </a:ext>
+                  </a:extLst>
+                </a:gridCol>
+                <a:gridCol w="2160000">
+                  <a:extLst>
+                    <a:ext uri="{9D8B030D-6E8A-4147-A177-3AD203B41FA5}">
+                      <a16:colId xmlns:a16="http://schemas.microsoft.com/office/drawing/2014/main" val="20003"/>
+                    </a:ext>
+                  </a:extLst>
+                </a:gridCol>
+                <a:gridCol w="2653200">
+                  <a:extLst>
+                    <a:ext uri="{9D8B030D-6E8A-4147-A177-3AD203B41FA5}">
+                      <a16:colId xmlns:a16="http://schemas.microsoft.com/office/drawing/2014/main" val="20004"/>
+                    </a:ext>
+                  </a:extLst>
+                </a:gridCol>
               </a:tblGrid>
               <a:tr h="900000">
                 <a:tc>
@@ -4743,6 +6038,11 @@
                     </a:solidFill>
                   </a:tcPr>
                 </a:tc>
+                <a:extLst>
+                  <a:ext uri="{0D108BD9-81ED-4DB2-BD59-A6C34878D82A}">
+                    <a16:rowId xmlns:a16="http://schemas.microsoft.com/office/drawing/2014/main" val="10000"/>
+                  </a:ext>
+                </a:extLst>
               </a:tr>
               <a:tr h="900000">
                 <a:tc>
@@ -4830,6 +6130,11 @@
                   </a:txBody>
                   <a:tcPr/>
                 </a:tc>
+                <a:extLst>
+                  <a:ext uri="{0D108BD9-81ED-4DB2-BD59-A6C34878D82A}">
+                    <a16:rowId xmlns:a16="http://schemas.microsoft.com/office/drawing/2014/main" val="10001"/>
+                  </a:ext>
+                </a:extLst>
               </a:tr>
               <a:tr h="900000">
                 <a:tc>
@@ -4932,6 +6237,11 @@
                     </a:solidFill>
                   </a:tcPr>
                 </a:tc>
+                <a:extLst>
+                  <a:ext uri="{0D108BD9-81ED-4DB2-BD59-A6C34878D82A}">
+                    <a16:rowId xmlns:a16="http://schemas.microsoft.com/office/drawing/2014/main" val="10002"/>
+                  </a:ext>
+                </a:extLst>
               </a:tr>
             </a:tbl>
           </a:graphicData>
@@ -4979,6 +6289,7 @@
           <a:lstStyle/>
           <a:p>
             <a:pPr algn="ctr"/>
+            <a:endParaRPr/>
           </a:p>
         </p:txBody>
       </p:sp>
@@ -4991,7 +6302,7 @@
         <p:spPr>
           <a:xfrm>
             <a:off x="720000" y="3851999"/>
-            <a:ext cx="10440000" cy="576000"/>
+            <a:ext cx="10440000" cy="646331"/>
           </a:xfrm>
           <a:prstGeom prst="rect">
             <a:avLst/>
@@ -5004,17 +6315,32 @@
           </a:bodyPr>
           <a:lstStyle/>
           <a:p>
-            <a:pPr algn="l"/>
-            <a:r>
-              <a:rPr sz="1400" b="0">
+            <a:pPr algn="ctr"/>
+            <a:r>
+              <a:rPr b="0" dirty="0">
                 <a:solidFill>
                   <a:srgbClr val="7F1D1D"/>
                 </a:solidFill>
                 <a:latin typeface="游ゴシック"/>
               </a:rPr>
               <a:t>県道357号：停止台数105台、最低速度1.64 m/s（約6 km/h）
-  → 自家用車避難集中時に深刻な渋滞が発生</a:t>
-            </a:r>
+  → </a:t>
+            </a:r>
+            <a:r>
+              <a:rPr b="0" dirty="0" err="1">
+                <a:solidFill>
+                  <a:srgbClr val="7F1D1D"/>
+                </a:solidFill>
+                <a:latin typeface="游ゴシック"/>
+              </a:rPr>
+              <a:t>自家用車避難集中時に深刻な渋滞が発生</a:t>
+            </a:r>
+            <a:endParaRPr b="0" dirty="0">
+              <a:solidFill>
+                <a:srgbClr val="7F1D1D"/>
+              </a:solidFill>
+              <a:latin typeface="游ゴシック"/>
+            </a:endParaRPr>
           </a:p>
         </p:txBody>
       </p:sp>
@@ -5060,6 +6386,7 @@
           <a:lstStyle/>
           <a:p>
             <a:pPr algn="ctr"/>
+            <a:endParaRPr/>
           </a:p>
         </p:txBody>
       </p:sp>
@@ -5121,51 +6448,126 @@
           <a:lstStyle/>
           <a:p>
             <a:pPr>
+              <a:lnSpc>
+                <a:spcPct val="150000"/>
+              </a:lnSpc>
               <a:spcBef>
                 <a:spcPts val="400"/>
               </a:spcBef>
             </a:pPr>
             <a:r>
-              <a:rPr sz="1300">
+              <a:rPr sz="1300" dirty="0">
                 <a:solidFill>
                   <a:srgbClr val="1E293B"/>
                 </a:solidFill>
                 <a:latin typeface="游ゴシック"/>
               </a:rPr>
-              <a:t>・ 到着できたかの判定（到着/未到着）</a:t>
+              <a:t>・ </a:t>
+            </a:r>
+            <a:r>
+              <a:rPr sz="1300" dirty="0" err="1">
+                <a:solidFill>
+                  <a:srgbClr val="1E293B"/>
+                </a:solidFill>
+                <a:latin typeface="游ゴシック"/>
+              </a:rPr>
+              <a:t>到着できたかの判定（到着</a:t>
+            </a:r>
+            <a:r>
+              <a:rPr sz="1300" dirty="0">
+                <a:solidFill>
+                  <a:srgbClr val="1E293B"/>
+                </a:solidFill>
+                <a:latin typeface="游ゴシック"/>
+              </a:rPr>
+              <a:t>/</a:t>
+            </a:r>
+            <a:r>
+              <a:rPr sz="1300" dirty="0" err="1">
+                <a:solidFill>
+                  <a:srgbClr val="1E293B"/>
+                </a:solidFill>
+                <a:latin typeface="游ゴシック"/>
+              </a:rPr>
+              <a:t>未到着</a:t>
+            </a:r>
+            <a:r>
+              <a:rPr sz="1300" dirty="0">
+                <a:solidFill>
+                  <a:srgbClr val="1E293B"/>
+                </a:solidFill>
+                <a:latin typeface="游ゴシック"/>
+              </a:rPr>
+              <a:t>）</a:t>
             </a:r>
           </a:p>
           <a:p>
             <a:pPr>
+              <a:lnSpc>
+                <a:spcPct val="150000"/>
+              </a:lnSpc>
               <a:spcBef>
                 <a:spcPts val="400"/>
               </a:spcBef>
             </a:pPr>
             <a:r>
-              <a:rPr sz="1300">
+              <a:rPr sz="1300" dirty="0">
                 <a:solidFill>
                   <a:srgbClr val="1E293B"/>
                 </a:solidFill>
                 <a:latin typeface="游ゴシック"/>
               </a:rPr>
-              <a:t>・ どの道路に負荷が集中するか</a:t>
-            </a:r>
+              <a:t>・ </a:t>
+            </a:r>
+            <a:r>
+              <a:rPr sz="1300" dirty="0" err="1">
+                <a:solidFill>
+                  <a:srgbClr val="1E293B"/>
+                </a:solidFill>
+                <a:latin typeface="游ゴシック"/>
+              </a:rPr>
+              <a:t>どの道路に負荷が集中するか</a:t>
+            </a:r>
+            <a:endParaRPr sz="1300" dirty="0">
+              <a:solidFill>
+                <a:srgbClr val="1E293B"/>
+              </a:solidFill>
+              <a:latin typeface="游ゴシック"/>
+            </a:endParaRPr>
           </a:p>
           <a:p>
             <a:pPr>
+              <a:lnSpc>
+                <a:spcPct val="150000"/>
+              </a:lnSpc>
               <a:spcBef>
                 <a:spcPts val="400"/>
               </a:spcBef>
             </a:pPr>
             <a:r>
-              <a:rPr sz="1300">
+              <a:rPr sz="1300" dirty="0">
                 <a:solidFill>
                   <a:srgbClr val="1E293B"/>
                 </a:solidFill>
                 <a:latin typeface="游ゴシック"/>
               </a:rPr>
-              <a:t>・ 速度低下・停止が発生する区間</a:t>
-            </a:r>
+              <a:t>・ </a:t>
+            </a:r>
+            <a:r>
+              <a:rPr sz="1300" dirty="0" err="1">
+                <a:solidFill>
+                  <a:srgbClr val="1E293B"/>
+                </a:solidFill>
+                <a:latin typeface="游ゴシック"/>
+              </a:rPr>
+              <a:t>速度低下・停止が発生する区間</a:t>
+            </a:r>
+            <a:endParaRPr sz="1300" dirty="0">
+              <a:solidFill>
+                <a:srgbClr val="1E293B"/>
+              </a:solidFill>
+              <a:latin typeface="游ゴシック"/>
+            </a:endParaRPr>
           </a:p>
         </p:txBody>
       </p:sp>
@@ -5211,6 +6613,7 @@
           <a:lstStyle/>
           <a:p>
             <a:pPr algn="ctr"/>
+            <a:endParaRPr/>
           </a:p>
         </p:txBody>
       </p:sp>
@@ -5272,6 +6675,9 @@
           <a:lstStyle/>
           <a:p>
             <a:pPr>
+              <a:lnSpc>
+                <a:spcPct val="150000"/>
+              </a:lnSpc>
               <a:spcBef>
                 <a:spcPts val="400"/>
               </a:spcBef>
@@ -5288,6 +6694,9 @@
           </a:p>
           <a:p>
             <a:pPr>
+              <a:lnSpc>
+                <a:spcPct val="150000"/>
+              </a:lnSpc>
               <a:spcBef>
                 <a:spcPts val="400"/>
               </a:spcBef>
@@ -5304,6 +6713,9 @@
           </a:p>
           <a:p>
             <a:pPr>
+              <a:lnSpc>
+                <a:spcPct val="150000"/>
+              </a:lnSpc>
               <a:spcBef>
                 <a:spcPts val="400"/>
               </a:spcBef>
@@ -5329,7 +6741,7 @@
 </file>
 
 <file path=ppt/slides/slide12.xml><?xml version="1.0" encoding="utf-8"?>
-<p:sld xmlns:a="http://schemas.openxmlformats.org/drawingml/2006/main" xmlns:p="http://schemas.openxmlformats.org/presentationml/2006/main" xmlns:r="http://schemas.openxmlformats.org/officeDocument/2006/relationships">
+<p:sld xmlns:a="http://schemas.openxmlformats.org/drawingml/2006/main" xmlns:r="http://schemas.openxmlformats.org/officeDocument/2006/relationships" xmlns:p="http://schemas.openxmlformats.org/presentationml/2006/main">
   <p:cSld>
     <p:spTree>
       <p:nvGrpSpPr>
@@ -5337,7 +6749,14 @@
         <p:cNvGrpSpPr/>
         <p:nvPr/>
       </p:nvGrpSpPr>
-      <p:grpSpPr/>
+      <p:grpSpPr>
+        <a:xfrm>
+          <a:off x="0" y="0"/>
+          <a:ext cx="0" cy="0"/>
+          <a:chOff x="0" y="0"/>
+          <a:chExt cx="0" cy="0"/>
+        </a:xfrm>
+      </p:grpSpPr>
       <p:sp>
         <p:nvSpPr>
           <p:cNvPr id="2" name="Rectangle 1"/>
@@ -5378,6 +6797,7 @@
           <a:lstStyle/>
           <a:p>
             <a:pPr algn="ctr"/>
+            <a:endParaRPr/>
           </a:p>
         </p:txBody>
       </p:sp>
@@ -5421,6 +6841,7 @@
           <a:lstStyle/>
           <a:p>
             <a:pPr algn="ctr"/>
+            <a:endParaRPr/>
           </a:p>
         </p:txBody>
       </p:sp>
@@ -5499,6 +6920,7 @@
           <a:lstStyle/>
           <a:p>
             <a:pPr algn="ctr"/>
+            <a:endParaRPr/>
           </a:p>
         </p:txBody>
       </p:sp>
@@ -5525,15 +6947,7 @@
           <a:lstStyle/>
           <a:p>
             <a:pPr algn="r"/>
-            <a:r>
-              <a:rPr sz="1100" b="0">
-                <a:solidFill>
-                  <a:srgbClr val="64748B"/>
-                </a:solidFill>
-                <a:latin typeface="游ゴシック"/>
-              </a:rPr>
-              <a:t/>
-            </a:r>
+            <a:endParaRPr/>
           </a:p>
         </p:txBody>
       </p:sp>
@@ -5556,9 +6970,27 @@
                 <a:tableStyleId>{5C22544A-7EE6-4342-B048-85BDC9FD1C3A}</a:tableStyleId>
               </a:tblPr>
               <a:tblGrid>
-                <a:gridCol w="1980000"/>
-                <a:gridCol w="4680000"/>
-                <a:gridCol w="4813200"/>
+                <a:gridCol w="1980000">
+                  <a:extLst>
+                    <a:ext uri="{9D8B030D-6E8A-4147-A177-3AD203B41FA5}">
+                      <a16:colId xmlns:a16="http://schemas.microsoft.com/office/drawing/2014/main" val="20000"/>
+                    </a:ext>
+                  </a:extLst>
+                </a:gridCol>
+                <a:gridCol w="4680000">
+                  <a:extLst>
+                    <a:ext uri="{9D8B030D-6E8A-4147-A177-3AD203B41FA5}">
+                      <a16:colId xmlns:a16="http://schemas.microsoft.com/office/drawing/2014/main" val="20001"/>
+                    </a:ext>
+                  </a:extLst>
+                </a:gridCol>
+                <a:gridCol w="4813200">
+                  <a:extLst>
+                    <a:ext uri="{9D8B030D-6E8A-4147-A177-3AD203B41FA5}">
+                      <a16:colId xmlns:a16="http://schemas.microsoft.com/office/drawing/2014/main" val="20002"/>
+                    </a:ext>
+                  </a:extLst>
+                </a:gridCol>
               </a:tblGrid>
               <a:tr h="840000">
                 <a:tc>
@@ -5630,6 +7062,11 @@
                     </a:solidFill>
                   </a:tcPr>
                 </a:tc>
+                <a:extLst>
+                  <a:ext uri="{0D108BD9-81ED-4DB2-BD59-A6C34878D82A}">
+                    <a16:rowId xmlns:a16="http://schemas.microsoft.com/office/drawing/2014/main" val="10000"/>
+                  </a:ext>
+                </a:extLst>
               </a:tr>
               <a:tr h="840000">
                 <a:tc>
@@ -5680,6 +7117,11 @@
                   </a:txBody>
                   <a:tcPr/>
                 </a:tc>
+                <a:extLst>
+                  <a:ext uri="{0D108BD9-81ED-4DB2-BD59-A6C34878D82A}">
+                    <a16:rowId xmlns:a16="http://schemas.microsoft.com/office/drawing/2014/main" val="10001"/>
+                  </a:ext>
+                </a:extLst>
               </a:tr>
               <a:tr h="840000">
                 <a:tc>
@@ -5742,6 +7184,11 @@
                     </a:solidFill>
                   </a:tcPr>
                 </a:tc>
+                <a:extLst>
+                  <a:ext uri="{0D108BD9-81ED-4DB2-BD59-A6C34878D82A}">
+                    <a16:rowId xmlns:a16="http://schemas.microsoft.com/office/drawing/2014/main" val="10002"/>
+                  </a:ext>
+                </a:extLst>
               </a:tr>
               <a:tr h="840000">
                 <a:tc>
@@ -5792,6 +7239,11 @@
                   </a:txBody>
                   <a:tcPr/>
                 </a:tc>
+                <a:extLst>
+                  <a:ext uri="{0D108BD9-81ED-4DB2-BD59-A6C34878D82A}">
+                    <a16:rowId xmlns:a16="http://schemas.microsoft.com/office/drawing/2014/main" val="10003"/>
+                  </a:ext>
+                </a:extLst>
               </a:tr>
               <a:tr h="840000">
                 <a:tc>
@@ -5854,6 +7306,11 @@
                     </a:solidFill>
                   </a:tcPr>
                 </a:tc>
+                <a:extLst>
+                  <a:ext uri="{0D108BD9-81ED-4DB2-BD59-A6C34878D82A}">
+                    <a16:rowId xmlns:a16="http://schemas.microsoft.com/office/drawing/2014/main" val="10004"/>
+                  </a:ext>
+                </a:extLst>
               </a:tr>
               <a:tr h="840000">
                 <a:tc>
@@ -5904,6 +7361,11 @@
                   </a:txBody>
                   <a:tcPr/>
                 </a:tc>
+                <a:extLst>
+                  <a:ext uri="{0D108BD9-81ED-4DB2-BD59-A6C34878D82A}">
+                    <a16:rowId xmlns:a16="http://schemas.microsoft.com/office/drawing/2014/main" val="10005"/>
+                  </a:ext>
+                </a:extLst>
               </a:tr>
             </a:tbl>
           </a:graphicData>
@@ -5917,7 +7379,7 @@
         </p:nvSpPr>
         <p:spPr>
           <a:xfrm>
-            <a:off x="360000" y="6192000"/>
+            <a:off x="360000" y="6075000"/>
             <a:ext cx="11473200" cy="432000"/>
           </a:xfrm>
           <a:prstGeom prst="rect">
@@ -5951,6 +7413,7 @@
           <a:lstStyle/>
           <a:p>
             <a:pPr algn="ctr"/>
+            <a:endParaRPr/>
           </a:p>
         </p:txBody>
       </p:sp>
@@ -5962,8 +7425,8 @@
         </p:nvSpPr>
         <p:spPr>
           <a:xfrm>
-            <a:off x="540000" y="6228000"/>
-            <a:ext cx="11160000" cy="360000"/>
+            <a:off x="540000" y="6111000"/>
+            <a:ext cx="11160000" cy="292388"/>
           </a:xfrm>
           <a:prstGeom prst="rect">
             <a:avLst/>
@@ -5976,7 +7439,7 @@
           </a:bodyPr>
           <a:lstStyle/>
           <a:p>
-            <a:pPr algn="l"/>
+            <a:pPr algn="ctr"/>
             <a:r>
               <a:rPr sz="1300" b="1">
                 <a:solidFill>
@@ -5998,7 +7461,7 @@
 </file>
 
 <file path=ppt/slides/slide13.xml><?xml version="1.0" encoding="utf-8"?>
-<p:sld xmlns:a="http://schemas.openxmlformats.org/drawingml/2006/main" xmlns:p="http://schemas.openxmlformats.org/presentationml/2006/main" xmlns:r="http://schemas.openxmlformats.org/officeDocument/2006/relationships">
+<p:sld xmlns:a="http://schemas.openxmlformats.org/drawingml/2006/main" xmlns:r="http://schemas.openxmlformats.org/officeDocument/2006/relationships" xmlns:p="http://schemas.openxmlformats.org/presentationml/2006/main">
   <p:cSld>
     <p:spTree>
       <p:nvGrpSpPr>
@@ -6006,7 +7469,14 @@
         <p:cNvGrpSpPr/>
         <p:nvPr/>
       </p:nvGrpSpPr>
-      <p:grpSpPr/>
+      <p:grpSpPr>
+        <a:xfrm>
+          <a:off x="0" y="0"/>
+          <a:ext cx="0" cy="0"/>
+          <a:chOff x="0" y="0"/>
+          <a:chExt cx="0" cy="0"/>
+        </a:xfrm>
+      </p:grpSpPr>
       <p:sp>
         <p:nvSpPr>
           <p:cNvPr id="2" name="Rectangle 1"/>
@@ -6047,6 +7517,7 @@
           <a:lstStyle/>
           <a:p>
             <a:pPr algn="ctr"/>
+            <a:endParaRPr/>
           </a:p>
         </p:txBody>
       </p:sp>
@@ -6090,6 +7561,7 @@
           <a:lstStyle/>
           <a:p>
             <a:pPr algn="ctr"/>
+            <a:endParaRPr/>
           </a:p>
         </p:txBody>
       </p:sp>
@@ -6203,6 +7675,7 @@
           <a:lstStyle/>
           <a:p>
             <a:pPr algn="ctr"/>
+            <a:endParaRPr/>
           </a:p>
         </p:txBody>
       </p:sp>
@@ -6229,15 +7702,7 @@
           <a:lstStyle/>
           <a:p>
             <a:pPr algn="r"/>
-            <a:r>
-              <a:rPr sz="1100" b="0">
-                <a:solidFill>
-                  <a:srgbClr val="64748B"/>
-                </a:solidFill>
-                <a:latin typeface="游ゴシック"/>
-              </a:rPr>
-              <a:t/>
-            </a:r>
+            <a:endParaRPr/>
           </a:p>
         </p:txBody>
       </p:sp>
@@ -6260,9 +7725,27 @@
                 <a:tableStyleId>{5C22544A-7EE6-4342-B048-85BDC9FD1C3A}</a:tableStyleId>
               </a:tblPr>
               <a:tblGrid>
-                <a:gridCol w="1980000"/>
-                <a:gridCol w="4680000"/>
-                <a:gridCol w="4813200"/>
+                <a:gridCol w="1980000">
+                  <a:extLst>
+                    <a:ext uri="{9D8B030D-6E8A-4147-A177-3AD203B41FA5}">
+                      <a16:colId xmlns:a16="http://schemas.microsoft.com/office/drawing/2014/main" val="20000"/>
+                    </a:ext>
+                  </a:extLst>
+                </a:gridCol>
+                <a:gridCol w="4680000">
+                  <a:extLst>
+                    <a:ext uri="{9D8B030D-6E8A-4147-A177-3AD203B41FA5}">
+                      <a16:colId xmlns:a16="http://schemas.microsoft.com/office/drawing/2014/main" val="20001"/>
+                    </a:ext>
+                  </a:extLst>
+                </a:gridCol>
+                <a:gridCol w="4813200">
+                  <a:extLst>
+                    <a:ext uri="{9D8B030D-6E8A-4147-A177-3AD203B41FA5}">
+                      <a16:colId xmlns:a16="http://schemas.microsoft.com/office/drawing/2014/main" val="20002"/>
+                    </a:ext>
+                  </a:extLst>
+                </a:gridCol>
               </a:tblGrid>
               <a:tr h="648000">
                 <a:tc>
@@ -6334,6 +7817,11 @@
                     </a:solidFill>
                   </a:tcPr>
                 </a:tc>
+                <a:extLst>
+                  <a:ext uri="{0D108BD9-81ED-4DB2-BD59-A6C34878D82A}">
+                    <a16:rowId xmlns:a16="http://schemas.microsoft.com/office/drawing/2014/main" val="10000"/>
+                  </a:ext>
+                </a:extLst>
               </a:tr>
               <a:tr h="648000">
                 <a:tc>
@@ -6384,6 +7872,11 @@
                   </a:txBody>
                   <a:tcPr/>
                 </a:tc>
+                <a:extLst>
+                  <a:ext uri="{0D108BD9-81ED-4DB2-BD59-A6C34878D82A}">
+                    <a16:rowId xmlns:a16="http://schemas.microsoft.com/office/drawing/2014/main" val="10001"/>
+                  </a:ext>
+                </a:extLst>
               </a:tr>
               <a:tr h="648000">
                 <a:tc>
@@ -6446,6 +7939,11 @@
                     </a:solidFill>
                   </a:tcPr>
                 </a:tc>
+                <a:extLst>
+                  <a:ext uri="{0D108BD9-81ED-4DB2-BD59-A6C34878D82A}">
+                    <a16:rowId xmlns:a16="http://schemas.microsoft.com/office/drawing/2014/main" val="10002"/>
+                  </a:ext>
+                </a:extLst>
               </a:tr>
               <a:tr h="648000">
                 <a:tc>
@@ -6496,6 +7994,11 @@
                   </a:txBody>
                   <a:tcPr/>
                 </a:tc>
+                <a:extLst>
+                  <a:ext uri="{0D108BD9-81ED-4DB2-BD59-A6C34878D82A}">
+                    <a16:rowId xmlns:a16="http://schemas.microsoft.com/office/drawing/2014/main" val="10003"/>
+                  </a:ext>
+                </a:extLst>
               </a:tr>
               <a:tr h="648000">
                 <a:tc>
@@ -6558,6 +8061,11 @@
                     </a:solidFill>
                   </a:tcPr>
                 </a:tc>
+                <a:extLst>
+                  <a:ext uri="{0D108BD9-81ED-4DB2-BD59-A6C34878D82A}">
+                    <a16:rowId xmlns:a16="http://schemas.microsoft.com/office/drawing/2014/main" val="10004"/>
+                  </a:ext>
+                </a:extLst>
               </a:tr>
             </a:tbl>
           </a:graphicData>
@@ -6638,6 +8146,7 @@
           <a:lstStyle/>
           <a:p>
             <a:pPr algn="ctr"/>
+            <a:endParaRPr/>
           </a:p>
         </p:txBody>
       </p:sp>
@@ -6684,8 +8193,8 @@
         </p:nvSpPr>
         <p:spPr>
           <a:xfrm>
-            <a:off x="432000" y="5220000"/>
-            <a:ext cx="2556000" cy="1080000"/>
+            <a:off x="432000" y="5034084"/>
+            <a:ext cx="2556000" cy="1011944"/>
           </a:xfrm>
           <a:prstGeom prst="rect">
             <a:avLst/>
@@ -6698,17 +8207,45 @@
           </a:bodyPr>
           <a:lstStyle/>
           <a:p>
-            <a:pPr algn="ctr"/>
-            <a:r>
-              <a:rPr sz="1300" b="0">
+            <a:pPr algn="ctr">
+              <a:lnSpc>
+                <a:spcPct val="200000"/>
+              </a:lnSpc>
+            </a:pPr>
+            <a:r>
+              <a:rPr sz="1600" b="0" dirty="0" err="1">
                 <a:solidFill>
                   <a:srgbClr val="BFDBFE"/>
                 </a:solidFill>
                 <a:latin typeface="游ゴシック"/>
               </a:rPr>
-              <a:t>台数・定員・運行方式
-利用者割り当てルール</a:t>
-            </a:r>
+              <a:t>台数・定員・運行方式</a:t>
+            </a:r>
+            <a:r>
+              <a:rPr sz="1600" b="0" dirty="0">
+                <a:solidFill>
+                  <a:srgbClr val="BFDBFE"/>
+                </a:solidFill>
+                <a:latin typeface="游ゴシック"/>
+              </a:rPr>
+              <a:t>
+</a:t>
+            </a:r>
+            <a:r>
+              <a:rPr sz="1600" b="0" dirty="0" err="1">
+                <a:solidFill>
+                  <a:srgbClr val="BFDBFE"/>
+                </a:solidFill>
+                <a:latin typeface="游ゴシック"/>
+              </a:rPr>
+              <a:t>利用者割り当てルール</a:t>
+            </a:r>
+            <a:endParaRPr sz="1600" b="0" dirty="0">
+              <a:solidFill>
+                <a:srgbClr val="BFDBFE"/>
+              </a:solidFill>
+              <a:latin typeface="游ゴシック"/>
+            </a:endParaRPr>
           </a:p>
         </p:txBody>
       </p:sp>
@@ -6720,7 +8257,7 @@
         </p:nvSpPr>
         <p:spPr>
           <a:xfrm>
-            <a:off x="3096000" y="5328000"/>
+            <a:off x="3024001" y="5297987"/>
             <a:ext cx="251999" cy="360000"/>
           </a:xfrm>
           <a:prstGeom prst="rect">
@@ -6787,6 +8324,7 @@
           <a:lstStyle/>
           <a:p>
             <a:pPr algn="ctr"/>
+            <a:endParaRPr/>
           </a:p>
         </p:txBody>
       </p:sp>
@@ -6833,8 +8371,8 @@
         </p:nvSpPr>
         <p:spPr>
           <a:xfrm>
-            <a:off x="3347999" y="5220000"/>
-            <a:ext cx="2556000" cy="1080000"/>
+            <a:off x="3347999" y="5034084"/>
+            <a:ext cx="2556000" cy="1011944"/>
           </a:xfrm>
           <a:prstGeom prst="rect">
             <a:avLst/>
@@ -6847,9 +8385,13 @@
           </a:bodyPr>
           <a:lstStyle/>
           <a:p>
-            <a:pPr algn="ctr"/>
-            <a:r>
-              <a:rPr sz="1300" b="0">
+            <a:pPr algn="ctr">
+              <a:lnSpc>
+                <a:spcPct val="200000"/>
+              </a:lnSpc>
+            </a:pPr>
+            <a:r>
+              <a:rPr sz="1600" b="0">
                 <a:solidFill>
                   <a:srgbClr val="BFDBFE"/>
                 </a:solidFill>
@@ -6869,7 +8411,7 @@
         </p:nvSpPr>
         <p:spPr>
           <a:xfrm>
-            <a:off x="6012000" y="5328000"/>
+            <a:off x="5940001" y="5297987"/>
             <a:ext cx="251999" cy="360000"/>
           </a:xfrm>
           <a:prstGeom prst="rect">
@@ -6936,6 +8478,7 @@
           <a:lstStyle/>
           <a:p>
             <a:pPr algn="ctr"/>
+            <a:endParaRPr/>
           </a:p>
         </p:txBody>
       </p:sp>
@@ -6982,8 +8525,8 @@
         </p:nvSpPr>
         <p:spPr>
           <a:xfrm>
-            <a:off x="6263999" y="5220000"/>
-            <a:ext cx="2556000" cy="1080000"/>
+            <a:off x="6263999" y="5034084"/>
+            <a:ext cx="2556000" cy="1011944"/>
           </a:xfrm>
           <a:prstGeom prst="rect">
             <a:avLst/>
@@ -6996,9 +8539,13 @@
           </a:bodyPr>
           <a:lstStyle/>
           <a:p>
-            <a:pPr algn="ctr"/>
-            <a:r>
-              <a:rPr sz="1300" b="0">
+            <a:pPr algn="ctr">
+              <a:lnSpc>
+                <a:spcPct val="200000"/>
+              </a:lnSpc>
+            </a:pPr>
+            <a:r>
+              <a:rPr sz="1600" b="0">
                 <a:solidFill>
                   <a:srgbClr val="BFDBFE"/>
                 </a:solidFill>
@@ -7018,7 +8565,7 @@
         </p:nvSpPr>
         <p:spPr>
           <a:xfrm>
-            <a:off x="8927999" y="5328000"/>
+            <a:off x="8856000" y="5297987"/>
             <a:ext cx="251999" cy="360000"/>
           </a:xfrm>
           <a:prstGeom prst="rect">
@@ -7085,6 +8632,7 @@
           <a:lstStyle/>
           <a:p>
             <a:pPr algn="ctr"/>
+            <a:endParaRPr/>
           </a:p>
         </p:txBody>
       </p:sp>
@@ -7131,8 +8679,8 @@
         </p:nvSpPr>
         <p:spPr>
           <a:xfrm>
-            <a:off x="9179999" y="5220000"/>
-            <a:ext cx="2556000" cy="1080000"/>
+            <a:off x="9179999" y="5034084"/>
+            <a:ext cx="2556000" cy="1011944"/>
           </a:xfrm>
           <a:prstGeom prst="rect">
             <a:avLst/>
@@ -7145,9 +8693,13 @@
           </a:bodyPr>
           <a:lstStyle/>
           <a:p>
-            <a:pPr algn="ctr"/>
-            <a:r>
-              <a:rPr sz="1300" b="0">
+            <a:pPr algn="ctr">
+              <a:lnSpc>
+                <a:spcPct val="200000"/>
+              </a:lnSpc>
+            </a:pPr>
+            <a:r>
+              <a:rPr sz="1600" b="0">
                 <a:solidFill>
                   <a:srgbClr val="BFDBFE"/>
                 </a:solidFill>
@@ -7168,7 +8720,7 @@
 </file>
 
 <file path=ppt/slides/slide2.xml><?xml version="1.0" encoding="utf-8"?>
-<p:sld xmlns:a="http://schemas.openxmlformats.org/drawingml/2006/main" xmlns:p="http://schemas.openxmlformats.org/presentationml/2006/main" xmlns:r="http://schemas.openxmlformats.org/officeDocument/2006/relationships">
+<p:sld xmlns:a="http://schemas.openxmlformats.org/drawingml/2006/main" xmlns:r="http://schemas.openxmlformats.org/officeDocument/2006/relationships" xmlns:p="http://schemas.openxmlformats.org/presentationml/2006/main">
   <p:cSld>
     <p:spTree>
       <p:nvGrpSpPr>
@@ -7176,7 +8728,14 @@
         <p:cNvGrpSpPr/>
         <p:nvPr/>
       </p:nvGrpSpPr>
-      <p:grpSpPr/>
+      <p:grpSpPr>
+        <a:xfrm>
+          <a:off x="0" y="0"/>
+          <a:ext cx="0" cy="0"/>
+          <a:chOff x="0" y="0"/>
+          <a:chExt cx="0" cy="0"/>
+        </a:xfrm>
+      </p:grpSpPr>
       <p:sp>
         <p:nvSpPr>
           <p:cNvPr id="2" name="Rectangle 1"/>
@@ -7217,6 +8776,7 @@
           <a:lstStyle/>
           <a:p>
             <a:pPr algn="ctr"/>
+            <a:endParaRPr/>
           </a:p>
         </p:txBody>
       </p:sp>
@@ -7260,6 +8820,7 @@
           <a:lstStyle/>
           <a:p>
             <a:pPr algn="ctr"/>
+            <a:endParaRPr/>
           </a:p>
         </p:txBody>
       </p:sp>
@@ -7373,6 +8934,7 @@
           <a:lstStyle/>
           <a:p>
             <a:pPr algn="ctr"/>
+            <a:endParaRPr/>
           </a:p>
         </p:txBody>
       </p:sp>
@@ -7399,15 +8961,7 @@
           <a:lstStyle/>
           <a:p>
             <a:pPr algn="r"/>
-            <a:r>
-              <a:rPr sz="1100" b="0">
-                <a:solidFill>
-                  <a:srgbClr val="64748B"/>
-                </a:solidFill>
-                <a:latin typeface="游ゴシック"/>
-              </a:rPr>
-              <a:t/>
-            </a:r>
+            <a:endParaRPr/>
           </a:p>
         </p:txBody>
       </p:sp>
@@ -7419,7 +8973,7 @@
         </p:nvSpPr>
         <p:spPr>
           <a:xfrm>
-            <a:off x="360000" y="1007999"/>
+            <a:off x="360000" y="2096779"/>
             <a:ext cx="2700000" cy="2520000"/>
           </a:xfrm>
           <a:prstGeom prst="rect">
@@ -7453,6 +9007,7 @@
           <a:lstStyle/>
           <a:p>
             <a:pPr algn="ctr"/>
+            <a:endParaRPr/>
           </a:p>
         </p:txBody>
       </p:sp>
@@ -7464,7 +9019,7 @@
         </p:nvSpPr>
         <p:spPr>
           <a:xfrm>
-            <a:off x="360000" y="1007999"/>
+            <a:off x="360000" y="2056169"/>
             <a:ext cx="2700000" cy="503999"/>
           </a:xfrm>
           <a:prstGeom prst="rect">
@@ -7496,6 +9051,7 @@
           <a:lstStyle/>
           <a:p>
             <a:pPr algn="ctr"/>
+            <a:endParaRPr/>
           </a:p>
         </p:txBody>
       </p:sp>
@@ -7507,7 +9063,7 @@
         </p:nvSpPr>
         <p:spPr>
           <a:xfrm>
-            <a:off x="432000" y="1044000"/>
+            <a:off x="432000" y="2132780"/>
             <a:ext cx="2556000" cy="432000"/>
           </a:xfrm>
           <a:prstGeom prst="rect">
@@ -7542,8 +9098,8 @@
         </p:nvSpPr>
         <p:spPr>
           <a:xfrm>
-            <a:off x="432000" y="1584000"/>
-            <a:ext cx="2556000" cy="1620000"/>
+            <a:off x="432000" y="2811479"/>
+            <a:ext cx="2556000" cy="1327864"/>
           </a:xfrm>
           <a:prstGeom prst="rect">
             <a:avLst/>
@@ -7556,18 +9112,55 @@
           </a:bodyPr>
           <a:lstStyle/>
           <a:p>
-            <a:pPr algn="ctr"/>
-            <a:r>
-              <a:rPr sz="1400" b="0">
+            <a:pPr algn="ctr">
+              <a:lnSpc>
+                <a:spcPct val="200000"/>
+              </a:lnSpc>
+            </a:pPr>
+            <a:r>
+              <a:rPr sz="1400" b="0" dirty="0">
                 <a:solidFill>
                   <a:srgbClr val="1E293B"/>
                 </a:solidFill>
                 <a:latin typeface="游ゴシック"/>
               </a:rPr>
               <a:t>2015年9月10日
-茨城県常総市三坂町付近
-鬼怒川左岸が決壊</a:t>
-            </a:r>
+</a:t>
+            </a:r>
+            <a:r>
+              <a:rPr sz="1400" b="0" dirty="0" err="1">
+                <a:solidFill>
+                  <a:srgbClr val="1E293B"/>
+                </a:solidFill>
+                <a:latin typeface="游ゴシック"/>
+              </a:rPr>
+              <a:t>茨城県常総市三坂町付近</a:t>
+            </a:r>
+            <a:r>
+              <a:rPr sz="1400" b="0" dirty="0">
+                <a:solidFill>
+                  <a:srgbClr val="1E293B"/>
+                </a:solidFill>
+                <a:latin typeface="游ゴシック"/>
+              </a:rPr>
+              <a:t>
+</a:t>
+            </a:r>
+            <a:r>
+              <a:rPr sz="1400" b="0" dirty="0" err="1">
+                <a:solidFill>
+                  <a:srgbClr val="1E293B"/>
+                </a:solidFill>
+                <a:latin typeface="游ゴシック"/>
+              </a:rPr>
+              <a:t>鬼怒川左岸が決壊</a:t>
+            </a:r>
+            <a:endParaRPr sz="1400" b="0" dirty="0">
+              <a:solidFill>
+                <a:srgbClr val="1E293B"/>
+              </a:solidFill>
+              <a:latin typeface="游ゴシック"/>
+            </a:endParaRPr>
           </a:p>
         </p:txBody>
       </p:sp>
@@ -7579,7 +9172,7 @@
         </p:nvSpPr>
         <p:spPr>
           <a:xfrm>
-            <a:off x="3204000" y="1007999"/>
+            <a:off x="3204000" y="2096779"/>
             <a:ext cx="2700000" cy="2520000"/>
           </a:xfrm>
           <a:prstGeom prst="rect">
@@ -7613,6 +9206,7 @@
           <a:lstStyle/>
           <a:p>
             <a:pPr algn="ctr"/>
+            <a:endParaRPr/>
           </a:p>
         </p:txBody>
       </p:sp>
@@ -7624,7 +9218,7 @@
         </p:nvSpPr>
         <p:spPr>
           <a:xfrm>
-            <a:off x="3204000" y="1007999"/>
+            <a:off x="3204000" y="2056169"/>
             <a:ext cx="2700000" cy="503999"/>
           </a:xfrm>
           <a:prstGeom prst="rect">
@@ -7656,6 +9250,7 @@
           <a:lstStyle/>
           <a:p>
             <a:pPr algn="ctr"/>
+            <a:endParaRPr/>
           </a:p>
         </p:txBody>
       </p:sp>
@@ -7667,7 +9262,7 @@
         </p:nvSpPr>
         <p:spPr>
           <a:xfrm>
-            <a:off x="3276000" y="1044000"/>
+            <a:off x="3276000" y="2132780"/>
             <a:ext cx="2556000" cy="432000"/>
           </a:xfrm>
           <a:prstGeom prst="rect">
@@ -7702,8 +9297,8 @@
         </p:nvSpPr>
         <p:spPr>
           <a:xfrm>
-            <a:off x="3276000" y="1584000"/>
-            <a:ext cx="2556000" cy="1620000"/>
+            <a:off x="3276000" y="2980511"/>
+            <a:ext cx="2556000" cy="896977"/>
           </a:xfrm>
           <a:prstGeom prst="rect">
             <a:avLst/>
@@ -7716,17 +9311,45 @@
           </a:bodyPr>
           <a:lstStyle/>
           <a:p>
-            <a:pPr algn="ctr"/>
-            <a:r>
-              <a:rPr sz="1400" b="0">
+            <a:pPr algn="ctr">
+              <a:lnSpc>
+                <a:spcPct val="200000"/>
+              </a:lnSpc>
+            </a:pPr>
+            <a:r>
+              <a:rPr sz="1400" b="0" dirty="0" err="1">
                 <a:solidFill>
                   <a:srgbClr val="1E293B"/>
                 </a:solidFill>
                 <a:latin typeface="游ゴシック"/>
               </a:rPr>
-              <a:t>広範囲の浸水により
-道路が通行困難になる</a:t>
-            </a:r>
+              <a:t>広範囲の浸水により</a:t>
+            </a:r>
+            <a:r>
+              <a:rPr sz="1400" b="0" dirty="0">
+                <a:solidFill>
+                  <a:srgbClr val="1E293B"/>
+                </a:solidFill>
+                <a:latin typeface="游ゴシック"/>
+              </a:rPr>
+              <a:t>
+</a:t>
+            </a:r>
+            <a:r>
+              <a:rPr sz="1400" b="0" dirty="0" err="1">
+                <a:solidFill>
+                  <a:srgbClr val="1E293B"/>
+                </a:solidFill>
+                <a:latin typeface="游ゴシック"/>
+              </a:rPr>
+              <a:t>道路が通行困難になる</a:t>
+            </a:r>
+            <a:endParaRPr sz="1400" b="0" dirty="0">
+              <a:solidFill>
+                <a:srgbClr val="1E293B"/>
+              </a:solidFill>
+              <a:latin typeface="游ゴシック"/>
+            </a:endParaRPr>
           </a:p>
         </p:txBody>
       </p:sp>
@@ -7738,7 +9361,7 @@
         </p:nvSpPr>
         <p:spPr>
           <a:xfrm>
-            <a:off x="6048000" y="1007999"/>
+            <a:off x="6048000" y="2096779"/>
             <a:ext cx="2700000" cy="2520000"/>
           </a:xfrm>
           <a:prstGeom prst="rect">
@@ -7772,6 +9395,7 @@
           <a:lstStyle/>
           <a:p>
             <a:pPr algn="ctr"/>
+            <a:endParaRPr/>
           </a:p>
         </p:txBody>
       </p:sp>
@@ -7783,7 +9407,7 @@
         </p:nvSpPr>
         <p:spPr>
           <a:xfrm>
-            <a:off x="6048000" y="1007999"/>
+            <a:off x="6048000" y="2056169"/>
             <a:ext cx="2700000" cy="503999"/>
           </a:xfrm>
           <a:prstGeom prst="rect">
@@ -7815,6 +9439,7 @@
           <a:lstStyle/>
           <a:p>
             <a:pPr algn="ctr"/>
+            <a:endParaRPr/>
           </a:p>
         </p:txBody>
       </p:sp>
@@ -7826,7 +9451,7 @@
         </p:nvSpPr>
         <p:spPr>
           <a:xfrm>
-            <a:off x="6120000" y="1044000"/>
+            <a:off x="6120000" y="2132780"/>
             <a:ext cx="2556000" cy="432000"/>
           </a:xfrm>
           <a:prstGeom prst="rect">
@@ -7861,8 +9486,8 @@
         </p:nvSpPr>
         <p:spPr>
           <a:xfrm>
-            <a:off x="6120000" y="1584000"/>
-            <a:ext cx="2556000" cy="1620000"/>
+            <a:off x="6120000" y="2980511"/>
+            <a:ext cx="2556000" cy="896977"/>
           </a:xfrm>
           <a:prstGeom prst="rect">
             <a:avLst/>
@@ -7875,17 +9500,45 @@
           </a:bodyPr>
           <a:lstStyle/>
           <a:p>
-            <a:pPr algn="ctr"/>
-            <a:r>
-              <a:rPr sz="1400" b="0">
+            <a:pPr algn="ctr">
+              <a:lnSpc>
+                <a:spcPct val="200000"/>
+              </a:lnSpc>
+            </a:pPr>
+            <a:r>
+              <a:rPr sz="1400" b="0" dirty="0" err="1">
                 <a:solidFill>
                   <a:srgbClr val="1E293B"/>
                 </a:solidFill>
                 <a:latin typeface="游ゴシック"/>
               </a:rPr>
-              <a:t>自家用車避難が集中し
-混雑・逃げ遅れの恐れ</a:t>
-            </a:r>
+              <a:t>自家用車避難が集中し</a:t>
+            </a:r>
+            <a:r>
+              <a:rPr sz="1400" b="0" dirty="0">
+                <a:solidFill>
+                  <a:srgbClr val="1E293B"/>
+                </a:solidFill>
+                <a:latin typeface="游ゴシック"/>
+              </a:rPr>
+              <a:t>
+</a:t>
+            </a:r>
+            <a:r>
+              <a:rPr sz="1400" b="0" dirty="0" err="1">
+                <a:solidFill>
+                  <a:srgbClr val="1E293B"/>
+                </a:solidFill>
+                <a:latin typeface="游ゴシック"/>
+              </a:rPr>
+              <a:t>混雑・逃げ遅れの恐れ</a:t>
+            </a:r>
+            <a:endParaRPr sz="1400" b="0" dirty="0">
+              <a:solidFill>
+                <a:srgbClr val="1E293B"/>
+              </a:solidFill>
+              <a:latin typeface="游ゴシック"/>
+            </a:endParaRPr>
           </a:p>
         </p:txBody>
       </p:sp>
@@ -7897,7 +9550,7 @@
         </p:nvSpPr>
         <p:spPr>
           <a:xfrm>
-            <a:off x="8892000" y="1007999"/>
+            <a:off x="8892000" y="2096779"/>
             <a:ext cx="2700000" cy="2520000"/>
           </a:xfrm>
           <a:prstGeom prst="rect">
@@ -7931,6 +9584,7 @@
           <a:lstStyle/>
           <a:p>
             <a:pPr algn="ctr"/>
+            <a:endParaRPr/>
           </a:p>
         </p:txBody>
       </p:sp>
@@ -7942,7 +9596,7 @@
         </p:nvSpPr>
         <p:spPr>
           <a:xfrm>
-            <a:off x="8892000" y="1007999"/>
+            <a:off x="8892000" y="2056169"/>
             <a:ext cx="2700000" cy="503999"/>
           </a:xfrm>
           <a:prstGeom prst="rect">
@@ -7974,6 +9628,7 @@
           <a:lstStyle/>
           <a:p>
             <a:pPr algn="ctr"/>
+            <a:endParaRPr/>
           </a:p>
         </p:txBody>
       </p:sp>
@@ -7985,7 +9640,7 @@
         </p:nvSpPr>
         <p:spPr>
           <a:xfrm>
-            <a:off x="8964000" y="1044000"/>
+            <a:off x="8964000" y="2132780"/>
             <a:ext cx="2556000" cy="432000"/>
           </a:xfrm>
           <a:prstGeom prst="rect">
@@ -8020,8 +9675,8 @@
         </p:nvSpPr>
         <p:spPr>
           <a:xfrm>
-            <a:off x="8964000" y="1584000"/>
-            <a:ext cx="2556000" cy="1620000"/>
+            <a:off x="8964000" y="3026922"/>
+            <a:ext cx="2556000" cy="896977"/>
           </a:xfrm>
           <a:prstGeom prst="rect">
             <a:avLst/>
@@ -8034,17 +9689,45 @@
           </a:bodyPr>
           <a:lstStyle/>
           <a:p>
-            <a:pPr algn="ctr"/>
-            <a:r>
-              <a:rPr sz="1400" b="0">
+            <a:pPr algn="ctr">
+              <a:lnSpc>
+                <a:spcPct val="200000"/>
+              </a:lnSpc>
+            </a:pPr>
+            <a:r>
+              <a:rPr sz="1400" b="0" dirty="0" err="1">
                 <a:solidFill>
                   <a:srgbClr val="1E293B"/>
                 </a:solidFill>
                 <a:latin typeface="游ゴシック"/>
               </a:rPr>
-              <a:t>高齢者・車非保有者への
-避難支援が必要</a:t>
-            </a:r>
+              <a:t>高齢者・車非保有者への</a:t>
+            </a:r>
+            <a:r>
+              <a:rPr sz="1400" b="0" dirty="0">
+                <a:solidFill>
+                  <a:srgbClr val="1E293B"/>
+                </a:solidFill>
+                <a:latin typeface="游ゴシック"/>
+              </a:rPr>
+              <a:t>
+</a:t>
+            </a:r>
+            <a:r>
+              <a:rPr sz="1400" b="0" dirty="0" err="1">
+                <a:solidFill>
+                  <a:srgbClr val="1E293B"/>
+                </a:solidFill>
+                <a:latin typeface="游ゴシック"/>
+              </a:rPr>
+              <a:t>避難支援が必要</a:t>
+            </a:r>
+            <a:endParaRPr sz="1400" b="0" dirty="0">
+              <a:solidFill>
+                <a:srgbClr val="1E293B"/>
+              </a:solidFill>
+              <a:latin typeface="游ゴシック"/>
+            </a:endParaRPr>
           </a:p>
         </p:txBody>
       </p:sp>
@@ -8056,8 +9739,8 @@
         </p:nvSpPr>
         <p:spPr>
           <a:xfrm>
-            <a:off x="720000" y="3780000"/>
-            <a:ext cx="10800000" cy="360000"/>
+            <a:off x="540000" y="5346002"/>
+            <a:ext cx="10800000" cy="584775"/>
           </a:xfrm>
           <a:prstGeom prst="rect">
             <a:avLst/>
@@ -8072,14 +9755,29 @@
           <a:p>
             <a:pPr algn="ctr"/>
             <a:r>
-              <a:rPr sz="1700" b="1">
+              <a:rPr sz="3200" b="1" dirty="0">
                 <a:solidFill>
                   <a:srgbClr val="2563EB"/>
                 </a:solidFill>
                 <a:latin typeface="游ゴシック"/>
               </a:rPr>
-              <a:t>→ 避難シミュレーションによる定量的な評価が必要</a:t>
-            </a:r>
+              <a:t>→ </a:t>
+            </a:r>
+            <a:r>
+              <a:rPr sz="3200" b="1" dirty="0" err="1">
+                <a:solidFill>
+                  <a:srgbClr val="2563EB"/>
+                </a:solidFill>
+                <a:latin typeface="游ゴシック"/>
+              </a:rPr>
+              <a:t>避難シミュレーションによる定量的な評価が必要</a:t>
+            </a:r>
+            <a:endParaRPr sz="3200" b="1" dirty="0">
+              <a:solidFill>
+                <a:srgbClr val="2563EB"/>
+              </a:solidFill>
+              <a:latin typeface="游ゴシック"/>
+            </a:endParaRPr>
           </a:p>
         </p:txBody>
       </p:sp>
@@ -8092,7 +9790,7 @@
 </file>
 
 <file path=ppt/slides/slide3.xml><?xml version="1.0" encoding="utf-8"?>
-<p:sld xmlns:a="http://schemas.openxmlformats.org/drawingml/2006/main" xmlns:p="http://schemas.openxmlformats.org/presentationml/2006/main" xmlns:r="http://schemas.openxmlformats.org/officeDocument/2006/relationships">
+<p:sld xmlns:a="http://schemas.openxmlformats.org/drawingml/2006/main" xmlns:r="http://schemas.openxmlformats.org/officeDocument/2006/relationships" xmlns:p="http://schemas.openxmlformats.org/presentationml/2006/main">
   <p:cSld>
     <p:spTree>
       <p:nvGrpSpPr>
@@ -8100,7 +9798,14 @@
         <p:cNvGrpSpPr/>
         <p:nvPr/>
       </p:nvGrpSpPr>
-      <p:grpSpPr/>
+      <p:grpSpPr>
+        <a:xfrm>
+          <a:off x="0" y="0"/>
+          <a:ext cx="0" cy="0"/>
+          <a:chOff x="0" y="0"/>
+          <a:chExt cx="0" cy="0"/>
+        </a:xfrm>
+      </p:grpSpPr>
       <p:sp>
         <p:nvSpPr>
           <p:cNvPr id="2" name="Rectangle 1"/>
@@ -8141,6 +9846,7 @@
           <a:lstStyle/>
           <a:p>
             <a:pPr algn="ctr"/>
+            <a:endParaRPr/>
           </a:p>
         </p:txBody>
       </p:sp>
@@ -8184,6 +9890,7 @@
           <a:lstStyle/>
           <a:p>
             <a:pPr algn="ctr"/>
+            <a:endParaRPr/>
           </a:p>
         </p:txBody>
       </p:sp>
@@ -8262,6 +9969,7 @@
           <a:lstStyle/>
           <a:p>
             <a:pPr algn="ctr"/>
+            <a:endParaRPr/>
           </a:p>
         </p:txBody>
       </p:sp>
@@ -8288,15 +9996,7 @@
           <a:lstStyle/>
           <a:p>
             <a:pPr algn="r"/>
-            <a:r>
-              <a:rPr sz="1100" b="0">
-                <a:solidFill>
-                  <a:srgbClr val="64748B"/>
-                </a:solidFill>
-                <a:latin typeface="游ゴシック"/>
-              </a:rPr>
-              <a:t/>
-            </a:r>
+            <a:endParaRPr/>
           </a:p>
         </p:txBody>
       </p:sp>
@@ -8308,7 +10008,7 @@
         </p:nvSpPr>
         <p:spPr>
           <a:xfrm>
-            <a:off x="540000" y="900000"/>
+            <a:off x="540000" y="1773000"/>
             <a:ext cx="11113200" cy="1080000"/>
           </a:xfrm>
           <a:prstGeom prst="rect">
@@ -8342,6 +10042,7 @@
           <a:lstStyle/>
           <a:p>
             <a:pPr algn="ctr"/>
+            <a:endParaRPr/>
           </a:p>
         </p:txBody>
       </p:sp>
@@ -8353,8 +10054,8 @@
         </p:nvSpPr>
         <p:spPr>
           <a:xfrm>
-            <a:off x="720000" y="972000"/>
-            <a:ext cx="10800000" cy="900000"/>
+            <a:off x="720000" y="1845000"/>
+            <a:ext cx="10800000" cy="927754"/>
           </a:xfrm>
           <a:prstGeom prst="rect">
             <a:avLst/>
@@ -8367,17 +10068,45 @@
           </a:bodyPr>
           <a:lstStyle/>
           <a:p>
-            <a:pPr algn="ctr"/>
-            <a:r>
-              <a:rPr sz="1900" b="1">
+            <a:pPr algn="ctr">
+              <a:lnSpc>
+                <a:spcPct val="150000"/>
+              </a:lnSpc>
+            </a:pPr>
+            <a:r>
+              <a:rPr sz="1900" b="1" dirty="0" err="1">
                 <a:solidFill>
                   <a:srgbClr val="1E40AF"/>
                 </a:solidFill>
                 <a:latin typeface="游ゴシック"/>
               </a:rPr>
-              <a:t>浸水時の道路閉鎖を考慮した避難シミュレーションを構築し、
-自家用車避難とデマンド交通バス活用を定量的に比較する</a:t>
-            </a:r>
+              <a:t>浸水時の道路閉鎖を考慮した避難シミュレーションを構築し</a:t>
+            </a:r>
+            <a:r>
+              <a:rPr sz="1900" b="1" dirty="0">
+                <a:solidFill>
+                  <a:srgbClr val="1E40AF"/>
+                </a:solidFill>
+                <a:latin typeface="游ゴシック"/>
+              </a:rPr>
+              <a:t>、
+</a:t>
+            </a:r>
+            <a:r>
+              <a:rPr sz="1900" b="1" dirty="0" err="1">
+                <a:solidFill>
+                  <a:srgbClr val="1E40AF"/>
+                </a:solidFill>
+                <a:latin typeface="游ゴシック"/>
+              </a:rPr>
+              <a:t>自家用車避難とデマンド交通バス活用を定量的に比較する</a:t>
+            </a:r>
+            <a:endParaRPr sz="1900" b="1" dirty="0">
+              <a:solidFill>
+                <a:srgbClr val="1E40AF"/>
+              </a:solidFill>
+              <a:latin typeface="游ゴシック"/>
+            </a:endParaRPr>
           </a:p>
         </p:txBody>
       </p:sp>
@@ -8389,7 +10118,7 @@
         </p:nvSpPr>
         <p:spPr>
           <a:xfrm>
-            <a:off x="540000" y="2160000"/>
+            <a:off x="540000" y="3033000"/>
             <a:ext cx="10800000" cy="288000"/>
           </a:xfrm>
           <a:prstGeom prst="rect">
@@ -8424,7 +10153,7 @@
         </p:nvSpPr>
         <p:spPr>
           <a:xfrm>
-            <a:off x="540000" y="2520000"/>
+            <a:off x="540000" y="3393000"/>
             <a:ext cx="3600000" cy="1620000"/>
           </a:xfrm>
           <a:prstGeom prst="rect">
@@ -8458,6 +10187,7 @@
           <a:lstStyle/>
           <a:p>
             <a:pPr algn="ctr"/>
+            <a:endParaRPr/>
           </a:p>
         </p:txBody>
       </p:sp>
@@ -8469,7 +10199,7 @@
         </p:nvSpPr>
         <p:spPr>
           <a:xfrm>
-            <a:off x="540000" y="2520000"/>
+            <a:off x="540000" y="3393000"/>
             <a:ext cx="3600000" cy="503999"/>
           </a:xfrm>
           <a:prstGeom prst="rect">
@@ -8501,6 +10231,7 @@
           <a:lstStyle/>
           <a:p>
             <a:pPr algn="ctr"/>
+            <a:endParaRPr/>
           </a:p>
         </p:txBody>
       </p:sp>
@@ -8512,7 +10243,7 @@
         </p:nvSpPr>
         <p:spPr>
           <a:xfrm>
-            <a:off x="612000" y="2556000"/>
+            <a:off x="612000" y="3429000"/>
             <a:ext cx="3456000" cy="432000"/>
           </a:xfrm>
           <a:prstGeom prst="rect">
@@ -8547,8 +10278,8 @@
         </p:nvSpPr>
         <p:spPr>
           <a:xfrm>
-            <a:off x="612000" y="3096000"/>
-            <a:ext cx="3456000" cy="1080000"/>
+            <a:off x="612000" y="3969000"/>
+            <a:ext cx="3456000" cy="964559"/>
           </a:xfrm>
           <a:prstGeom prst="rect">
             <a:avLst/>
@@ -8561,16 +10292,96 @@
           </a:bodyPr>
           <a:lstStyle/>
           <a:p>
-            <a:pPr algn="ctr"/>
-            <a:r>
-              <a:rPr sz="1300" b="0">
+            <a:pPr algn="ctr">
+              <a:lnSpc>
+                <a:spcPct val="150000"/>
+              </a:lnSpc>
+            </a:pPr>
+            <a:r>
+              <a:rPr sz="1300" b="0" dirty="0" err="1">
                 <a:solidFill>
                   <a:srgbClr val="1E293B"/>
                 </a:solidFill>
                 <a:latin typeface="游ゴシック"/>
               </a:rPr>
-              <a:t>静的な避難経路検索
-（浸水×道路ネットワーク → 経路の有無を確認）</a:t>
+              <a:t>静的な避難経路検索</a:t>
+            </a:r>
+            <a:r>
+              <a:rPr sz="1300" b="0" dirty="0">
+                <a:solidFill>
+                  <a:srgbClr val="1E293B"/>
+                </a:solidFill>
+                <a:latin typeface="游ゴシック"/>
+              </a:rPr>
+              <a:t>
+（</a:t>
+            </a:r>
+            <a:r>
+              <a:rPr sz="1300" b="0" dirty="0" err="1">
+                <a:solidFill>
+                  <a:srgbClr val="1E293B"/>
+                </a:solidFill>
+                <a:latin typeface="游ゴシック"/>
+              </a:rPr>
+              <a:t>浸水×道路ネットワーク</a:t>
+            </a:r>
+            <a:r>
+              <a:rPr sz="1300" b="0" dirty="0">
+                <a:solidFill>
+                  <a:srgbClr val="1E293B"/>
+                </a:solidFill>
+                <a:latin typeface="游ゴシック"/>
+              </a:rPr>
+              <a:t> </a:t>
+            </a:r>
+            <a:endParaRPr lang="en-US" sz="1300" b="0" dirty="0">
+              <a:solidFill>
+                <a:srgbClr val="1E293B"/>
+              </a:solidFill>
+              <a:latin typeface="游ゴシック"/>
+            </a:endParaRPr>
+          </a:p>
+          <a:p>
+            <a:pPr algn="ctr">
+              <a:lnSpc>
+                <a:spcPct val="150000"/>
+              </a:lnSpc>
+            </a:pPr>
+            <a:r>
+              <a:rPr lang="ja-JP" altLang="en-US" sz="1300" dirty="0">
+                <a:solidFill>
+                  <a:srgbClr val="1E293B"/>
+                </a:solidFill>
+                <a:latin typeface="游ゴシック"/>
+              </a:rPr>
+              <a:t>　</a:t>
+            </a:r>
+            <a:r>
+              <a:rPr sz="1300" b="0" dirty="0">
+                <a:solidFill>
+                  <a:srgbClr val="1E293B"/>
+                </a:solidFill>
+                <a:latin typeface="游ゴシック"/>
+              </a:rPr>
+              <a:t>→ </a:t>
+            </a:r>
+            <a:r>
+              <a:rPr sz="1300" b="0" dirty="0" err="1">
+                <a:solidFill>
+                  <a:srgbClr val="1E293B"/>
+                </a:solidFill>
+                <a:latin typeface="游ゴシック"/>
+              </a:rPr>
+              <a:t>経路の有無を確認</a:t>
+            </a:r>
+            <a:r>
+              <a:rPr sz="1300" b="0" dirty="0">
+                <a:solidFill>
+                  <a:srgbClr val="1E293B"/>
+                </a:solidFill>
+                <a:latin typeface="游ゴシック"/>
+              </a:rPr>
+              <a:t>）</a:t>
             </a:r>
           </a:p>
         </p:txBody>
@@ -8583,7 +10394,7 @@
         </p:nvSpPr>
         <p:spPr>
           <a:xfrm>
-            <a:off x="4176000" y="3060000"/>
+            <a:off x="4093590" y="3964500"/>
             <a:ext cx="288000" cy="360000"/>
           </a:xfrm>
           <a:prstGeom prst="rect">
@@ -8618,7 +10429,7 @@
         </p:nvSpPr>
         <p:spPr>
           <a:xfrm>
-            <a:off x="4356000" y="2520000"/>
+            <a:off x="4356000" y="3393000"/>
             <a:ext cx="3600000" cy="1620000"/>
           </a:xfrm>
           <a:prstGeom prst="rect">
@@ -8652,6 +10463,7 @@
           <a:lstStyle/>
           <a:p>
             <a:pPr algn="ctr"/>
+            <a:endParaRPr/>
           </a:p>
         </p:txBody>
       </p:sp>
@@ -8663,7 +10475,7 @@
         </p:nvSpPr>
         <p:spPr>
           <a:xfrm>
-            <a:off x="4356000" y="2520000"/>
+            <a:off x="4356000" y="3393000"/>
             <a:ext cx="3600000" cy="503999"/>
           </a:xfrm>
           <a:prstGeom prst="rect">
@@ -8695,6 +10507,7 @@
           <a:lstStyle/>
           <a:p>
             <a:pPr algn="ctr"/>
+            <a:endParaRPr/>
           </a:p>
         </p:txBody>
       </p:sp>
@@ -8706,7 +10519,7 @@
         </p:nvSpPr>
         <p:spPr>
           <a:xfrm>
-            <a:off x="4428000" y="2556000"/>
+            <a:off x="4428000" y="3429000"/>
             <a:ext cx="3456000" cy="432000"/>
           </a:xfrm>
           <a:prstGeom prst="rect">
@@ -8741,8 +10554,8 @@
         </p:nvSpPr>
         <p:spPr>
           <a:xfrm>
-            <a:off x="4428000" y="3096000"/>
-            <a:ext cx="3456000" cy="1080000"/>
+            <a:off x="4428000" y="3969000"/>
+            <a:ext cx="3456000" cy="864532"/>
           </a:xfrm>
           <a:prstGeom prst="rect">
             <a:avLst/>
@@ -8757,14 +10570,63 @@
           <a:p>
             <a:pPr algn="ctr"/>
             <a:r>
-              <a:rPr sz="1300" b="0">
+              <a:rPr sz="1300" b="0" dirty="0" err="1">
                 <a:solidFill>
                   <a:srgbClr val="1E293B"/>
                 </a:solidFill>
                 <a:latin typeface="游ゴシック"/>
               </a:rPr>
-              <a:t>SUMOによる自家用車避難シミュレーション
-（車両走行・動的道路閉鎖・混雑評価）</a:t>
+              <a:t>SUMOによる自家用車避難</a:t>
+            </a:r>
+            <a:endParaRPr lang="en-US" sz="1300" b="0" dirty="0">
+              <a:solidFill>
+                <a:srgbClr val="1E293B"/>
+              </a:solidFill>
+              <a:latin typeface="游ゴシック"/>
+            </a:endParaRPr>
+          </a:p>
+          <a:p>
+            <a:pPr algn="ctr">
+              <a:lnSpc>
+                <a:spcPct val="150000"/>
+              </a:lnSpc>
+            </a:pPr>
+            <a:r>
+              <a:rPr sz="1300" b="0" dirty="0" err="1">
+                <a:solidFill>
+                  <a:srgbClr val="1E293B"/>
+                </a:solidFill>
+                <a:latin typeface="游ゴシック"/>
+              </a:rPr>
+              <a:t>シミュレーション</a:t>
+            </a:r>
+            <a:r>
+              <a:rPr sz="1300" b="0" dirty="0">
+                <a:solidFill>
+                  <a:srgbClr val="1E293B"/>
+                </a:solidFill>
+                <a:latin typeface="游ゴシック"/>
+              </a:rPr>
+              <a:t>
+（</a:t>
+            </a:r>
+            <a:r>
+              <a:rPr sz="1300" b="0" dirty="0" err="1">
+                <a:solidFill>
+                  <a:srgbClr val="1E293B"/>
+                </a:solidFill>
+                <a:latin typeface="游ゴシック"/>
+              </a:rPr>
+              <a:t>車両走行・動的道路閉鎖・混雑評価</a:t>
+            </a:r>
+            <a:r>
+              <a:rPr sz="1300" b="0" dirty="0">
+                <a:solidFill>
+                  <a:srgbClr val="1E293B"/>
+                </a:solidFill>
+                <a:latin typeface="游ゴシック"/>
+              </a:rPr>
+              <a:t>）</a:t>
             </a:r>
           </a:p>
         </p:txBody>
@@ -8777,7 +10639,7 @@
         </p:nvSpPr>
         <p:spPr>
           <a:xfrm>
-            <a:off x="7992000" y="3060000"/>
+            <a:off x="7909590" y="3964500"/>
             <a:ext cx="288000" cy="360000"/>
           </a:xfrm>
           <a:prstGeom prst="rect">
@@ -8812,7 +10674,7 @@
         </p:nvSpPr>
         <p:spPr>
           <a:xfrm>
-            <a:off x="8172000" y="2520000"/>
+            <a:off x="8172000" y="3393000"/>
             <a:ext cx="3600000" cy="1620000"/>
           </a:xfrm>
           <a:prstGeom prst="rect">
@@ -8846,6 +10708,7 @@
           <a:lstStyle/>
           <a:p>
             <a:pPr algn="ctr"/>
+            <a:endParaRPr/>
           </a:p>
         </p:txBody>
       </p:sp>
@@ -8857,7 +10720,7 @@
         </p:nvSpPr>
         <p:spPr>
           <a:xfrm>
-            <a:off x="8172000" y="2520000"/>
+            <a:off x="8172000" y="3393000"/>
             <a:ext cx="3600000" cy="503999"/>
           </a:xfrm>
           <a:prstGeom prst="rect">
@@ -8889,6 +10752,7 @@
           <a:lstStyle/>
           <a:p>
             <a:pPr algn="ctr"/>
+            <a:endParaRPr/>
           </a:p>
         </p:txBody>
       </p:sp>
@@ -8900,7 +10764,7 @@
         </p:nvSpPr>
         <p:spPr>
           <a:xfrm>
-            <a:off x="8243999" y="2556000"/>
+            <a:off x="8243999" y="3429000"/>
             <a:ext cx="3456000" cy="432000"/>
           </a:xfrm>
           <a:prstGeom prst="rect">
@@ -8936,8 +10800,8 @@
         </p:nvSpPr>
         <p:spPr>
           <a:xfrm>
-            <a:off x="8243999" y="3096000"/>
-            <a:ext cx="3456000" cy="1080000"/>
+            <a:off x="8243999" y="3969000"/>
+            <a:ext cx="3456000" cy="964559"/>
           </a:xfrm>
           <a:prstGeom prst="rect">
             <a:avLst/>
@@ -8950,16 +10814,87 @@
           </a:bodyPr>
           <a:lstStyle/>
           <a:p>
-            <a:pPr algn="ctr"/>
-            <a:r>
-              <a:rPr sz="1300" b="0">
+            <a:pPr algn="ctr">
+              <a:lnSpc>
+                <a:spcPct val="150000"/>
+              </a:lnSpc>
+            </a:pPr>
+            <a:r>
+              <a:rPr sz="1300" b="0" dirty="0" err="1">
                 <a:solidFill>
                   <a:srgbClr val="1E293B"/>
                 </a:solidFill>
                 <a:latin typeface="游ゴシック"/>
               </a:rPr>
-              <a:t>デマンド交通バス導入・シナリオA/B比較
-（未着手）</a:t>
+              <a:t>デマンド交通バス導入</a:t>
+            </a:r>
+            <a:endParaRPr lang="en-US" sz="1300" b="0" dirty="0">
+              <a:solidFill>
+                <a:srgbClr val="1E293B"/>
+              </a:solidFill>
+              <a:latin typeface="游ゴシック"/>
+            </a:endParaRPr>
+          </a:p>
+          <a:p>
+            <a:pPr algn="ctr">
+              <a:lnSpc>
+                <a:spcPct val="150000"/>
+              </a:lnSpc>
+            </a:pPr>
+            <a:r>
+              <a:rPr sz="1300" b="0" dirty="0" err="1">
+                <a:solidFill>
+                  <a:srgbClr val="1E293B"/>
+                </a:solidFill>
+                <a:latin typeface="游ゴシック"/>
+              </a:rPr>
+              <a:t>シナリオA</a:t>
+            </a:r>
+            <a:r>
+              <a:rPr sz="1300" b="0" dirty="0">
+                <a:solidFill>
+                  <a:srgbClr val="1E293B"/>
+                </a:solidFill>
+                <a:latin typeface="游ゴシック"/>
+              </a:rPr>
+              <a:t>/</a:t>
+            </a:r>
+            <a:r>
+              <a:rPr sz="1300" b="0" dirty="0" err="1">
+                <a:solidFill>
+                  <a:srgbClr val="1E293B"/>
+                </a:solidFill>
+                <a:latin typeface="游ゴシック"/>
+              </a:rPr>
+              <a:t>B比較</a:t>
+            </a:r>
+            <a:r>
+              <a:rPr sz="1300" b="0" dirty="0">
+                <a:solidFill>
+                  <a:srgbClr val="1E293B"/>
+                </a:solidFill>
+                <a:latin typeface="游ゴシック"/>
+              </a:rPr>
+              <a:t>
+（</a:t>
+            </a:r>
+            <a:r>
+              <a:rPr sz="1300" b="0" dirty="0" err="1">
+                <a:solidFill>
+                  <a:srgbClr val="1E293B"/>
+                </a:solidFill>
+                <a:latin typeface="游ゴシック"/>
+              </a:rPr>
+              <a:t>未着手</a:t>
+            </a:r>
+            <a:r>
+              <a:rPr sz="1300" b="0" dirty="0">
+                <a:solidFill>
+                  <a:srgbClr val="1E293B"/>
+                </a:solidFill>
+                <a:latin typeface="游ゴシック"/>
+              </a:rPr>
+              <a:t>）</a:t>
             </a:r>
           </a:p>
         </p:txBody>
@@ -8973,7 +10908,7 @@
 </file>
 
 <file path=ppt/slides/slide4.xml><?xml version="1.0" encoding="utf-8"?>
-<p:sld xmlns:a="http://schemas.openxmlformats.org/drawingml/2006/main" xmlns:p="http://schemas.openxmlformats.org/presentationml/2006/main" xmlns:r="http://schemas.openxmlformats.org/officeDocument/2006/relationships">
+<p:sld xmlns:a="http://schemas.openxmlformats.org/drawingml/2006/main" xmlns:r="http://schemas.openxmlformats.org/officeDocument/2006/relationships" xmlns:p="http://schemas.openxmlformats.org/presentationml/2006/main">
   <p:cSld>
     <p:spTree>
       <p:nvGrpSpPr>
@@ -8981,7 +10916,14 @@
         <p:cNvGrpSpPr/>
         <p:nvPr/>
       </p:nvGrpSpPr>
-      <p:grpSpPr/>
+      <p:grpSpPr>
+        <a:xfrm>
+          <a:off x="0" y="0"/>
+          <a:ext cx="0" cy="0"/>
+          <a:chOff x="0" y="0"/>
+          <a:chExt cx="0" cy="0"/>
+        </a:xfrm>
+      </p:grpSpPr>
       <p:sp>
         <p:nvSpPr>
           <p:cNvPr id="2" name="Rectangle 1"/>
@@ -9022,6 +10964,7 @@
           <a:lstStyle/>
           <a:p>
             <a:pPr algn="ctr"/>
+            <a:endParaRPr/>
           </a:p>
         </p:txBody>
       </p:sp>
@@ -9065,6 +11008,7 @@
           <a:lstStyle/>
           <a:p>
             <a:pPr algn="ctr"/>
+            <a:endParaRPr/>
           </a:p>
         </p:txBody>
       </p:sp>
@@ -9143,6 +11087,7 @@
           <a:lstStyle/>
           <a:p>
             <a:pPr algn="ctr"/>
+            <a:endParaRPr/>
           </a:p>
         </p:txBody>
       </p:sp>
@@ -9169,15 +11114,7 @@
           <a:lstStyle/>
           <a:p>
             <a:pPr algn="r"/>
-            <a:r>
-              <a:rPr sz="1100" b="0">
-                <a:solidFill>
-                  <a:srgbClr val="64748B"/>
-                </a:solidFill>
-                <a:latin typeface="游ゴシック"/>
-              </a:rPr>
-              <a:t/>
-            </a:r>
+            <a:endParaRPr/>
           </a:p>
         </p:txBody>
       </p:sp>
@@ -9189,7 +11126,7 @@
         </p:nvSpPr>
         <p:spPr>
           <a:xfrm>
-            <a:off x="360000" y="1080000"/>
+            <a:off x="324001" y="1944000"/>
             <a:ext cx="2448000" cy="3240000"/>
           </a:xfrm>
           <a:prstGeom prst="rect">
@@ -9221,6 +11158,7 @@
           <a:lstStyle/>
           <a:p>
             <a:pPr algn="ctr"/>
+            <a:endParaRPr/>
           </a:p>
         </p:txBody>
       </p:sp>
@@ -9232,7 +11170,7 @@
         </p:nvSpPr>
         <p:spPr>
           <a:xfrm>
-            <a:off x="396000" y="1152000"/>
+            <a:off x="360001" y="2016000"/>
             <a:ext cx="2376000" cy="576000"/>
           </a:xfrm>
           <a:prstGeom prst="rect">
@@ -9248,7 +11186,7 @@
           <a:p>
             <a:pPr algn="ctr"/>
             <a:r>
-              <a:rPr sz="1600" b="1">
+              <a:rPr sz="1600" b="1" dirty="0" err="1">
                 <a:solidFill>
                   <a:srgbClr val="FFFFFF"/>
                 </a:solidFill>
@@ -9256,6 +11194,12 @@
               </a:rPr>
               <a:t>実データ</a:t>
             </a:r>
+            <a:endParaRPr sz="1600" b="1" dirty="0">
+              <a:solidFill>
+                <a:srgbClr val="FFFFFF"/>
+              </a:solidFill>
+              <a:latin typeface="游ゴシック"/>
+            </a:endParaRPr>
           </a:p>
         </p:txBody>
       </p:sp>
@@ -9267,8 +11211,8 @@
         </p:nvSpPr>
         <p:spPr>
           <a:xfrm>
-            <a:off x="396000" y="1800000"/>
-            <a:ext cx="2376000" cy="2340000"/>
+            <a:off x="360001" y="2809182"/>
+            <a:ext cx="2376000" cy="1239635"/>
           </a:xfrm>
           <a:prstGeom prst="rect">
             <a:avLst/>
@@ -9281,18 +11225,55 @@
           </a:bodyPr>
           <a:lstStyle/>
           <a:p>
-            <a:pPr algn="ctr"/>
-            <a:r>
-              <a:rPr sz="1300" b="0">
+            <a:pPr algn="ctr">
+              <a:lnSpc>
+                <a:spcPct val="200000"/>
+              </a:lnSpc>
+            </a:pPr>
+            <a:r>
+              <a:rPr sz="1300" b="0" dirty="0">
                 <a:solidFill>
                   <a:srgbClr val="FFFFFF"/>
                 </a:solidFill>
                 <a:latin typeface="游ゴシック"/>
               </a:rPr>
               <a:t>浸水KML・A31a
-道路NW・人口
-避難所・自動車保有</a:t>
-            </a:r>
+</a:t>
+            </a:r>
+            <a:r>
+              <a:rPr sz="1300" b="0" dirty="0" err="1">
+                <a:solidFill>
+                  <a:srgbClr val="FFFFFF"/>
+                </a:solidFill>
+                <a:latin typeface="游ゴシック"/>
+              </a:rPr>
+              <a:t>道路NW・人口</a:t>
+            </a:r>
+            <a:r>
+              <a:rPr sz="1300" b="0" dirty="0">
+                <a:solidFill>
+                  <a:srgbClr val="FFFFFF"/>
+                </a:solidFill>
+                <a:latin typeface="游ゴシック"/>
+              </a:rPr>
+              <a:t>
+</a:t>
+            </a:r>
+            <a:r>
+              <a:rPr sz="1300" b="0" dirty="0" err="1">
+                <a:solidFill>
+                  <a:srgbClr val="FFFFFF"/>
+                </a:solidFill>
+                <a:latin typeface="游ゴシック"/>
+              </a:rPr>
+              <a:t>避難所・自動車保有</a:t>
+            </a:r>
+            <a:endParaRPr sz="1300" b="0" dirty="0">
+              <a:solidFill>
+                <a:srgbClr val="FFFFFF"/>
+              </a:solidFill>
+              <a:latin typeface="游ゴシック"/>
+            </a:endParaRPr>
           </a:p>
         </p:txBody>
       </p:sp>
@@ -9304,7 +11285,7 @@
         </p:nvSpPr>
         <p:spPr>
           <a:xfrm>
-            <a:off x="2844000" y="2340000"/>
+            <a:off x="2844000" y="3363492"/>
             <a:ext cx="324000" cy="540000"/>
           </a:xfrm>
           <a:prstGeom prst="rect">
@@ -9339,7 +11320,7 @@
         </p:nvSpPr>
         <p:spPr>
           <a:xfrm>
-            <a:off x="3276000" y="1080000"/>
+            <a:off x="3240001" y="1944000"/>
             <a:ext cx="2448000" cy="3240000"/>
           </a:xfrm>
           <a:prstGeom prst="rect">
@@ -9371,6 +11352,7 @@
           <a:lstStyle/>
           <a:p>
             <a:pPr algn="ctr"/>
+            <a:endParaRPr/>
           </a:p>
         </p:txBody>
       </p:sp>
@@ -9382,7 +11364,7 @@
         </p:nvSpPr>
         <p:spPr>
           <a:xfrm>
-            <a:off x="3311999" y="1152000"/>
+            <a:off x="3276000" y="2016000"/>
             <a:ext cx="2376000" cy="576000"/>
           </a:xfrm>
           <a:prstGeom prst="rect">
@@ -9417,8 +11399,8 @@
         </p:nvSpPr>
         <p:spPr>
           <a:xfrm>
-            <a:off x="3311999" y="1800000"/>
-            <a:ext cx="2376000" cy="2340000"/>
+            <a:off x="3276000" y="2809182"/>
+            <a:ext cx="2376000" cy="1239635"/>
           </a:xfrm>
           <a:prstGeom prst="rect">
             <a:avLst/>
@@ -9431,7 +11413,11 @@
           </a:bodyPr>
           <a:lstStyle/>
           <a:p>
-            <a:pPr algn="ctr"/>
+            <a:pPr algn="ctr">
+              <a:lnSpc>
+                <a:spcPct val="200000"/>
+              </a:lnSpc>
+            </a:pPr>
             <a:r>
               <a:rPr sz="1300" b="0">
                 <a:solidFill>
@@ -9454,7 +11440,7 @@
         </p:nvSpPr>
         <p:spPr>
           <a:xfrm>
-            <a:off x="5759999" y="2340000"/>
+            <a:off x="5759999" y="3363492"/>
             <a:ext cx="324000" cy="540000"/>
           </a:xfrm>
           <a:prstGeom prst="rect">
@@ -9489,7 +11475,7 @@
         </p:nvSpPr>
         <p:spPr>
           <a:xfrm>
-            <a:off x="6192000" y="1080000"/>
+            <a:off x="6156001" y="1944000"/>
             <a:ext cx="2448000" cy="3240000"/>
           </a:xfrm>
           <a:prstGeom prst="rect">
@@ -9521,6 +11507,7 @@
           <a:lstStyle/>
           <a:p>
             <a:pPr algn="ctr"/>
+            <a:endParaRPr/>
           </a:p>
         </p:txBody>
       </p:sp>
@@ -9532,7 +11519,7 @@
         </p:nvSpPr>
         <p:spPr>
           <a:xfrm>
-            <a:off x="6228000" y="1152000"/>
+            <a:off x="6192001" y="2016000"/>
             <a:ext cx="2376000" cy="576000"/>
           </a:xfrm>
           <a:prstGeom prst="rect">
@@ -9567,8 +11554,8 @@
         </p:nvSpPr>
         <p:spPr>
           <a:xfrm>
-            <a:off x="6228000" y="1800000"/>
-            <a:ext cx="2376000" cy="2340000"/>
+            <a:off x="6192001" y="2809182"/>
+            <a:ext cx="2376000" cy="1239635"/>
           </a:xfrm>
           <a:prstGeom prst="rect">
             <a:avLst/>
@@ -9581,7 +11568,11 @@
           </a:bodyPr>
           <a:lstStyle/>
           <a:p>
-            <a:pPr algn="ctr"/>
+            <a:pPr algn="ctr">
+              <a:lnSpc>
+                <a:spcPct val="200000"/>
+              </a:lnSpc>
+            </a:pPr>
             <a:r>
               <a:rPr sz="1300" b="0">
                 <a:solidFill>
@@ -9604,7 +11595,7 @@
         </p:nvSpPr>
         <p:spPr>
           <a:xfrm>
-            <a:off x="8676000" y="2340000"/>
+            <a:off x="8676000" y="3363492"/>
             <a:ext cx="324000" cy="540000"/>
           </a:xfrm>
           <a:prstGeom prst="rect">
@@ -9639,7 +11630,7 @@
         </p:nvSpPr>
         <p:spPr>
           <a:xfrm>
-            <a:off x="9107999" y="1080000"/>
+            <a:off x="9072000" y="1944000"/>
             <a:ext cx="2448000" cy="3240000"/>
           </a:xfrm>
           <a:prstGeom prst="rect">
@@ -9671,6 +11662,7 @@
           <a:lstStyle/>
           <a:p>
             <a:pPr algn="ctr"/>
+            <a:endParaRPr/>
           </a:p>
         </p:txBody>
       </p:sp>
@@ -9682,7 +11674,7 @@
         </p:nvSpPr>
         <p:spPr>
           <a:xfrm>
-            <a:off x="9144000" y="1152000"/>
+            <a:off x="9108001" y="2016000"/>
             <a:ext cx="2376000" cy="576000"/>
           </a:xfrm>
           <a:prstGeom prst="rect">
@@ -9718,8 +11710,8 @@
         </p:nvSpPr>
         <p:spPr>
           <a:xfrm>
-            <a:off x="9144000" y="1800000"/>
-            <a:ext cx="2376000" cy="2340000"/>
+            <a:off x="9108001" y="2809182"/>
+            <a:ext cx="2376000" cy="1239635"/>
           </a:xfrm>
           <a:prstGeom prst="rect">
             <a:avLst/>
@@ -9732,7 +11724,11 @@
           </a:bodyPr>
           <a:lstStyle/>
           <a:p>
-            <a:pPr algn="ctr"/>
+            <a:pPr algn="ctr">
+              <a:lnSpc>
+                <a:spcPct val="200000"/>
+              </a:lnSpc>
+            </a:pPr>
             <a:r>
               <a:rPr sz="1300" b="0">
                 <a:solidFill>
@@ -9755,8 +11751,8 @@
         </p:nvSpPr>
         <p:spPr>
           <a:xfrm>
-            <a:off x="792000" y="4500000"/>
-            <a:ext cx="2160000" cy="288000"/>
+            <a:off x="473016" y="5778000"/>
+            <a:ext cx="2160000" cy="369332"/>
           </a:xfrm>
           <a:prstGeom prst="rect">
             <a:avLst/>
@@ -9771,7 +11767,7 @@
           <a:p>
             <a:pPr algn="ctr"/>
             <a:r>
-              <a:rPr sz="1300" b="1">
+              <a:rPr b="1" dirty="0" err="1">
                 <a:solidFill>
                   <a:srgbClr val="16A34A"/>
                 </a:solidFill>
@@ -9779,6 +11775,12 @@
               </a:rPr>
               <a:t>完了</a:t>
             </a:r>
+            <a:endParaRPr b="1" dirty="0">
+              <a:solidFill>
+                <a:srgbClr val="16A34A"/>
+              </a:solidFill>
+              <a:latin typeface="游ゴシック"/>
+            </a:endParaRPr>
           </a:p>
         </p:txBody>
       </p:sp>
@@ -9790,8 +11792,8 @@
         </p:nvSpPr>
         <p:spPr>
           <a:xfrm>
-            <a:off x="3708000" y="4500000"/>
-            <a:ext cx="2160000" cy="288000"/>
+            <a:off x="3389016" y="5778000"/>
+            <a:ext cx="2160000" cy="369332"/>
           </a:xfrm>
           <a:prstGeom prst="rect">
             <a:avLst/>
@@ -9806,7 +11808,7 @@
           <a:p>
             <a:pPr algn="ctr"/>
             <a:r>
-              <a:rPr sz="1300" b="1">
+              <a:rPr b="1" dirty="0" err="1">
                 <a:solidFill>
                   <a:srgbClr val="16A34A"/>
                 </a:solidFill>
@@ -9814,6 +11816,12 @@
               </a:rPr>
               <a:t>完了</a:t>
             </a:r>
+            <a:endParaRPr b="1" dirty="0">
+              <a:solidFill>
+                <a:srgbClr val="16A34A"/>
+              </a:solidFill>
+              <a:latin typeface="游ゴシック"/>
+            </a:endParaRPr>
           </a:p>
         </p:txBody>
       </p:sp>
@@ -9825,8 +11833,8 @@
         </p:nvSpPr>
         <p:spPr>
           <a:xfrm>
-            <a:off x="6623999" y="4500000"/>
-            <a:ext cx="2160000" cy="288000"/>
+            <a:off x="6305015" y="5778000"/>
+            <a:ext cx="2160000" cy="369332"/>
           </a:xfrm>
           <a:prstGeom prst="rect">
             <a:avLst/>
@@ -9841,7 +11849,7 @@
           <a:p>
             <a:pPr algn="ctr"/>
             <a:r>
-              <a:rPr sz="1300" b="1">
+              <a:rPr b="1">
                 <a:solidFill>
                   <a:srgbClr val="F59E0B"/>
                 </a:solidFill>
@@ -9861,7 +11869,7 @@
 </file>
 
 <file path=ppt/slides/slide5.xml><?xml version="1.0" encoding="utf-8"?>
-<p:sld xmlns:a="http://schemas.openxmlformats.org/drawingml/2006/main" xmlns:p="http://schemas.openxmlformats.org/presentationml/2006/main" xmlns:r="http://schemas.openxmlformats.org/officeDocument/2006/relationships">
+<p:sld xmlns:a="http://schemas.openxmlformats.org/drawingml/2006/main" xmlns:r="http://schemas.openxmlformats.org/officeDocument/2006/relationships" xmlns:p="http://schemas.openxmlformats.org/presentationml/2006/main">
   <p:cSld>
     <p:spTree>
       <p:nvGrpSpPr>
@@ -9869,7 +11877,14 @@
         <p:cNvGrpSpPr/>
         <p:nvPr/>
       </p:nvGrpSpPr>
-      <p:grpSpPr/>
+      <p:grpSpPr>
+        <a:xfrm>
+          <a:off x="0" y="0"/>
+          <a:ext cx="0" cy="0"/>
+          <a:chOff x="0" y="0"/>
+          <a:chExt cx="0" cy="0"/>
+        </a:xfrm>
+      </p:grpSpPr>
       <p:sp>
         <p:nvSpPr>
           <p:cNvPr id="2" name="Rectangle 1"/>
@@ -9910,6 +11925,7 @@
           <a:lstStyle/>
           <a:p>
             <a:pPr algn="ctr"/>
+            <a:endParaRPr/>
           </a:p>
         </p:txBody>
       </p:sp>
@@ -9953,6 +11969,7 @@
           <a:lstStyle/>
           <a:p>
             <a:pPr algn="ctr"/>
+            <a:endParaRPr/>
           </a:p>
         </p:txBody>
       </p:sp>
@@ -10066,6 +12083,7 @@
           <a:lstStyle/>
           <a:p>
             <a:pPr algn="ctr"/>
+            <a:endParaRPr/>
           </a:p>
         </p:txBody>
       </p:sp>
@@ -10092,15 +12110,7 @@
           <a:lstStyle/>
           <a:p>
             <a:pPr algn="r"/>
-            <a:r>
-              <a:rPr sz="1100" b="0">
-                <a:solidFill>
-                  <a:srgbClr val="64748B"/>
-                </a:solidFill>
-                <a:latin typeface="游ゴシック"/>
-              </a:rPr>
-              <a:t/>
-            </a:r>
+            <a:endParaRPr/>
           </a:p>
         </p:txBody>
       </p:sp>
@@ -10123,9 +12133,27 @@
                 <a:tableStyleId>{5C22544A-7EE6-4342-B048-85BDC9FD1C3A}</a:tableStyleId>
               </a:tblPr>
               <a:tblGrid>
-                <a:gridCol w="1620000"/>
-                <a:gridCol w="4320000"/>
-                <a:gridCol w="5533200"/>
+                <a:gridCol w="1620000">
+                  <a:extLst>
+                    <a:ext uri="{9D8B030D-6E8A-4147-A177-3AD203B41FA5}">
+                      <a16:colId xmlns:a16="http://schemas.microsoft.com/office/drawing/2014/main" val="20000"/>
+                    </a:ext>
+                  </a:extLst>
+                </a:gridCol>
+                <a:gridCol w="4320000">
+                  <a:extLst>
+                    <a:ext uri="{9D8B030D-6E8A-4147-A177-3AD203B41FA5}">
+                      <a16:colId xmlns:a16="http://schemas.microsoft.com/office/drawing/2014/main" val="20001"/>
+                    </a:ext>
+                  </a:extLst>
+                </a:gridCol>
+                <a:gridCol w="5533200">
+                  <a:extLst>
+                    <a:ext uri="{9D8B030D-6E8A-4147-A177-3AD203B41FA5}">
+                      <a16:colId xmlns:a16="http://schemas.microsoft.com/office/drawing/2014/main" val="20002"/>
+                    </a:ext>
+                  </a:extLst>
+                </a:gridCol>
               </a:tblGrid>
               <a:tr h="675000">
                 <a:tc>
@@ -10197,6 +12225,11 @@
                     </a:solidFill>
                   </a:tcPr>
                 </a:tc>
+                <a:extLst>
+                  <a:ext uri="{0D108BD9-81ED-4DB2-BD59-A6C34878D82A}">
+                    <a16:rowId xmlns:a16="http://schemas.microsoft.com/office/drawing/2014/main" val="10000"/>
+                  </a:ext>
+                </a:extLst>
               </a:tr>
               <a:tr h="675000">
                 <a:tc>
@@ -10206,11 +12239,14 @@
                     <a:p>
                       <a:pPr algn="ctr"/>
                       <a:r>
-                        <a:rPr sz="1400">
+                        <a:rPr sz="1400" dirty="0" err="1">
                           <a:latin typeface="游ゴシック"/>
                         </a:rPr>
                         <a:t>浸水範囲</a:t>
                       </a:r>
+                      <a:endParaRPr sz="1400" dirty="0">
+                        <a:latin typeface="游ゴシック"/>
+                      </a:endParaRPr>
                     </a:p>
                   </a:txBody>
                   <a:tcPr/>
@@ -10222,7 +12258,7 @@
                     <a:p>
                       <a:pPr algn="ctr"/>
                       <a:r>
-                        <a:rPr sz="1400">
+                        <a:rPr sz="1400" dirty="0">
                           <a:latin typeface="游ゴシック"/>
                         </a:rPr>
                         <a:t>GSI KML・A31a浸水想定区域</a:t>
@@ -10247,6 +12283,11 @@
                   </a:txBody>
                   <a:tcPr/>
                 </a:tc>
+                <a:extLst>
+                  <a:ext uri="{0D108BD9-81ED-4DB2-BD59-A6C34878D82A}">
+                    <a16:rowId xmlns:a16="http://schemas.microsoft.com/office/drawing/2014/main" val="10001"/>
+                  </a:ext>
+                </a:extLst>
               </a:tr>
               <a:tr h="675000">
                 <a:tc>
@@ -10309,6 +12350,11 @@
                     </a:solidFill>
                   </a:tcPr>
                 </a:tc>
+                <a:extLst>
+                  <a:ext uri="{0D108BD9-81ED-4DB2-BD59-A6C34878D82A}">
+                    <a16:rowId xmlns:a16="http://schemas.microsoft.com/office/drawing/2014/main" val="10002"/>
+                  </a:ext>
+                </a:extLst>
               </a:tr>
               <a:tr h="675000">
                 <a:tc>
@@ -10359,6 +12405,11 @@
                   </a:txBody>
                   <a:tcPr/>
                 </a:tc>
+                <a:extLst>
+                  <a:ext uri="{0D108BD9-81ED-4DB2-BD59-A6C34878D82A}">
+                    <a16:rowId xmlns:a16="http://schemas.microsoft.com/office/drawing/2014/main" val="10003"/>
+                  </a:ext>
+                </a:extLst>
               </a:tr>
               <a:tr h="675000">
                 <a:tc>
@@ -10421,6 +12472,11 @@
                     </a:solidFill>
                   </a:tcPr>
                 </a:tc>
+                <a:extLst>
+                  <a:ext uri="{0D108BD9-81ED-4DB2-BD59-A6C34878D82A}">
+                    <a16:rowId xmlns:a16="http://schemas.microsoft.com/office/drawing/2014/main" val="10004"/>
+                  </a:ext>
+                </a:extLst>
               </a:tr>
               <a:tr h="675000">
                 <a:tc>
@@ -10471,6 +12527,11 @@
                   </a:txBody>
                   <a:tcPr/>
                 </a:tc>
+                <a:extLst>
+                  <a:ext uri="{0D108BD9-81ED-4DB2-BD59-A6C34878D82A}">
+                    <a16:rowId xmlns:a16="http://schemas.microsoft.com/office/drawing/2014/main" val="10005"/>
+                  </a:ext>
+                </a:extLst>
               </a:tr>
               <a:tr h="675000">
                 <a:tc>
@@ -10533,6 +12594,11 @@
                     </a:solidFill>
                   </a:tcPr>
                 </a:tc>
+                <a:extLst>
+                  <a:ext uri="{0D108BD9-81ED-4DB2-BD59-A6C34878D82A}">
+                    <a16:rowId xmlns:a16="http://schemas.microsoft.com/office/drawing/2014/main" val="10006"/>
+                  </a:ext>
+                </a:extLst>
               </a:tr>
               <a:tr h="675000">
                 <a:tc>
@@ -10574,7 +12640,7 @@
                     <a:p>
                       <a:pPr algn="ctr"/>
                       <a:r>
-                        <a:rPr sz="1400">
+                        <a:rPr sz="1400" dirty="0">
                           <a:latin typeface="游ゴシック"/>
                         </a:rPr>
                         <a:t>TraCIによる動的通行止め</a:t>
@@ -10583,6 +12649,11 @@
                   </a:txBody>
                   <a:tcPr/>
                 </a:tc>
+                <a:extLst>
+                  <a:ext uri="{0D108BD9-81ED-4DB2-BD59-A6C34878D82A}">
+                    <a16:rowId xmlns:a16="http://schemas.microsoft.com/office/drawing/2014/main" val="10007"/>
+                  </a:ext>
+                </a:extLst>
               </a:tr>
             </a:tbl>
           </a:graphicData>
@@ -10597,7 +12668,7 @@
 </file>
 
 <file path=ppt/slides/slide6.xml><?xml version="1.0" encoding="utf-8"?>
-<p:sld xmlns:a="http://schemas.openxmlformats.org/drawingml/2006/main" xmlns:p="http://schemas.openxmlformats.org/presentationml/2006/main" xmlns:r="http://schemas.openxmlformats.org/officeDocument/2006/relationships">
+<p:sld xmlns:a="http://schemas.openxmlformats.org/drawingml/2006/main" xmlns:r="http://schemas.openxmlformats.org/officeDocument/2006/relationships" xmlns:p="http://schemas.openxmlformats.org/presentationml/2006/main">
   <p:cSld>
     <p:spTree>
       <p:nvGrpSpPr>
@@ -10605,7 +12676,14 @@
         <p:cNvGrpSpPr/>
         <p:nvPr/>
       </p:nvGrpSpPr>
-      <p:grpSpPr/>
+      <p:grpSpPr>
+        <a:xfrm>
+          <a:off x="0" y="0"/>
+          <a:ext cx="0" cy="0"/>
+          <a:chOff x="0" y="0"/>
+          <a:chExt cx="0" cy="0"/>
+        </a:xfrm>
+      </p:grpSpPr>
       <p:sp>
         <p:nvSpPr>
           <p:cNvPr id="2" name="Rectangle 1"/>
@@ -10646,6 +12724,7 @@
           <a:lstStyle/>
           <a:p>
             <a:pPr algn="ctr"/>
+            <a:endParaRPr/>
           </a:p>
         </p:txBody>
       </p:sp>
@@ -10689,6 +12768,7 @@
           <a:lstStyle/>
           <a:p>
             <a:pPr algn="ctr"/>
+            <a:endParaRPr/>
           </a:p>
         </p:txBody>
       </p:sp>
@@ -10802,6 +12882,7 @@
           <a:lstStyle/>
           <a:p>
             <a:pPr algn="ctr"/>
+            <a:endParaRPr/>
           </a:p>
         </p:txBody>
       </p:sp>
@@ -10828,15 +12909,7 @@
           <a:lstStyle/>
           <a:p>
             <a:pPr algn="r"/>
-            <a:r>
-              <a:rPr sz="1100" b="0">
-                <a:solidFill>
-                  <a:srgbClr val="64748B"/>
-                </a:solidFill>
-                <a:latin typeface="游ゴシック"/>
-              </a:rPr>
-              <a:t/>
-            </a:r>
+            <a:endParaRPr/>
           </a:p>
         </p:txBody>
       </p:sp>
@@ -10880,6 +12953,7 @@
           <a:lstStyle/>
           <a:p>
             <a:pPr algn="ctr"/>
+            <a:endParaRPr/>
           </a:p>
         </p:txBody>
       </p:sp>
@@ -11032,6 +13106,7 @@
           <a:lstStyle/>
           <a:p>
             <a:pPr algn="ctr"/>
+            <a:endParaRPr/>
           </a:p>
         </p:txBody>
       </p:sp>
@@ -11183,6 +13258,7 @@
           <a:lstStyle/>
           <a:p>
             <a:pPr algn="ctr"/>
+            <a:endParaRPr/>
           </a:p>
         </p:txBody>
       </p:sp>
@@ -11334,6 +13410,7 @@
           <a:lstStyle/>
           <a:p>
             <a:pPr algn="ctr"/>
+            <a:endParaRPr/>
           </a:p>
         </p:txBody>
       </p:sp>
@@ -11419,7 +13496,7 @@
 </file>
 
 <file path=ppt/slides/slide7.xml><?xml version="1.0" encoding="utf-8"?>
-<p:sld xmlns:a="http://schemas.openxmlformats.org/drawingml/2006/main" xmlns:p="http://schemas.openxmlformats.org/presentationml/2006/main" xmlns:r="http://schemas.openxmlformats.org/officeDocument/2006/relationships">
+<p:sld xmlns:a="http://schemas.openxmlformats.org/drawingml/2006/main" xmlns:r="http://schemas.openxmlformats.org/officeDocument/2006/relationships" xmlns:p="http://schemas.openxmlformats.org/presentationml/2006/main">
   <p:cSld>
     <p:spTree>
       <p:nvGrpSpPr>
@@ -11427,7 +13504,14 @@
         <p:cNvGrpSpPr/>
         <p:nvPr/>
       </p:nvGrpSpPr>
-      <p:grpSpPr/>
+      <p:grpSpPr>
+        <a:xfrm>
+          <a:off x="0" y="0"/>
+          <a:ext cx="0" cy="0"/>
+          <a:chOff x="0" y="0"/>
+          <a:chExt cx="0" cy="0"/>
+        </a:xfrm>
+      </p:grpSpPr>
       <p:sp>
         <p:nvSpPr>
           <p:cNvPr id="2" name="Rectangle 1"/>
@@ -11468,6 +13552,7 @@
           <a:lstStyle/>
           <a:p>
             <a:pPr algn="ctr"/>
+            <a:endParaRPr/>
           </a:p>
         </p:txBody>
       </p:sp>
@@ -11511,6 +13596,7 @@
           <a:lstStyle/>
           <a:p>
             <a:pPr algn="ctr"/>
+            <a:endParaRPr/>
           </a:p>
         </p:txBody>
       </p:sp>
@@ -11589,6 +13675,7 @@
           <a:lstStyle/>
           <a:p>
             <a:pPr algn="ctr"/>
+            <a:endParaRPr/>
           </a:p>
         </p:txBody>
       </p:sp>
@@ -11615,15 +13702,7 @@
           <a:lstStyle/>
           <a:p>
             <a:pPr algn="r"/>
-            <a:r>
-              <a:rPr sz="1100" b="0">
-                <a:solidFill>
-                  <a:srgbClr val="64748B"/>
-                </a:solidFill>
-                <a:latin typeface="游ゴシック"/>
-              </a:rPr>
-              <a:t/>
-            </a:r>
+            <a:endParaRPr/>
           </a:p>
         </p:txBody>
       </p:sp>
@@ -11669,6 +13748,7 @@
           <a:lstStyle/>
           <a:p>
             <a:pPr algn="ctr"/>
+            <a:endParaRPr/>
           </a:p>
         </p:txBody>
       </p:sp>
@@ -11852,6 +13932,7 @@
           <a:lstStyle/>
           <a:p>
             <a:pPr algn="ctr"/>
+            <a:endParaRPr/>
           </a:p>
         </p:txBody>
       </p:sp>
@@ -11968,6 +14049,7 @@
           <a:lstStyle/>
           <a:p>
             <a:pPr algn="ctr"/>
+            <a:endParaRPr/>
           </a:p>
         </p:txBody>
       </p:sp>
@@ -12046,6 +14128,7 @@
           <a:lstStyle/>
           <a:p>
             <a:pPr algn="ctr"/>
+            <a:endParaRPr/>
           </a:p>
         </p:txBody>
       </p:sp>
@@ -12159,6 +14242,7 @@
           <a:lstStyle/>
           <a:p>
             <a:pPr algn="ctr"/>
+            <a:endParaRPr/>
           </a:p>
         </p:txBody>
       </p:sp>
@@ -12273,6 +14357,7 @@
           <a:lstStyle/>
           <a:p>
             <a:pPr algn="ctr"/>
+            <a:endParaRPr/>
           </a:p>
         </p:txBody>
       </p:sp>
@@ -12321,7 +14406,7 @@
 </file>
 
 <file path=ppt/slides/slide8.xml><?xml version="1.0" encoding="utf-8"?>
-<p:sld xmlns:a="http://schemas.openxmlformats.org/drawingml/2006/main" xmlns:p="http://schemas.openxmlformats.org/presentationml/2006/main" xmlns:r="http://schemas.openxmlformats.org/officeDocument/2006/relationships">
+<p:sld xmlns:a="http://schemas.openxmlformats.org/drawingml/2006/main" xmlns:r="http://schemas.openxmlformats.org/officeDocument/2006/relationships" xmlns:p="http://schemas.openxmlformats.org/presentationml/2006/main">
   <p:cSld>
     <p:spTree>
       <p:nvGrpSpPr>
@@ -12329,7 +14414,14 @@
         <p:cNvGrpSpPr/>
         <p:nvPr/>
       </p:nvGrpSpPr>
-      <p:grpSpPr/>
+      <p:grpSpPr>
+        <a:xfrm>
+          <a:off x="0" y="0"/>
+          <a:ext cx="0" cy="0"/>
+          <a:chOff x="0" y="0"/>
+          <a:chExt cx="0" cy="0"/>
+        </a:xfrm>
+      </p:grpSpPr>
       <p:sp>
         <p:nvSpPr>
           <p:cNvPr id="2" name="Rectangle 1"/>
@@ -12370,6 +14462,7 @@
           <a:lstStyle/>
           <a:p>
             <a:pPr algn="ctr"/>
+            <a:endParaRPr/>
           </a:p>
         </p:txBody>
       </p:sp>
@@ -12413,6 +14506,7 @@
           <a:lstStyle/>
           <a:p>
             <a:pPr algn="ctr"/>
+            <a:endParaRPr/>
           </a:p>
         </p:txBody>
       </p:sp>
@@ -12526,6 +14620,7 @@
           <a:lstStyle/>
           <a:p>
             <a:pPr algn="ctr"/>
+            <a:endParaRPr/>
           </a:p>
         </p:txBody>
       </p:sp>
@@ -12552,15 +14647,7 @@
           <a:lstStyle/>
           <a:p>
             <a:pPr algn="r"/>
-            <a:r>
-              <a:rPr sz="1100" b="0">
-                <a:solidFill>
-                  <a:srgbClr val="64748B"/>
-                </a:solidFill>
-                <a:latin typeface="游ゴシック"/>
-              </a:rPr>
-              <a:t/>
-            </a:r>
+            <a:endParaRPr/>
           </a:p>
         </p:txBody>
       </p:sp>
@@ -12604,6 +14691,7 @@
           <a:lstStyle/>
           <a:p>
             <a:pPr algn="ctr"/>
+            <a:endParaRPr/>
           </a:p>
         </p:txBody>
       </p:sp>
@@ -12649,6 +14737,7 @@
           <a:lstStyle/>
           <a:p>
             <a:pPr algn="ctr"/>
+            <a:endParaRPr/>
           </a:p>
         </p:txBody>
       </p:sp>
@@ -12763,6 +14852,7 @@
           <a:lstStyle/>
           <a:p>
             <a:pPr algn="ctr"/>
+            <a:endParaRPr/>
           </a:p>
         </p:txBody>
       </p:sp>
@@ -12808,6 +14898,7 @@
           <a:lstStyle/>
           <a:p>
             <a:pPr algn="ctr"/>
+            <a:endParaRPr/>
           </a:p>
         </p:txBody>
       </p:sp>
@@ -12922,6 +15013,7 @@
           <a:lstStyle/>
           <a:p>
             <a:pPr algn="ctr"/>
+            <a:endParaRPr/>
           </a:p>
         </p:txBody>
       </p:sp>
@@ -12967,6 +15059,7 @@
           <a:lstStyle/>
           <a:p>
             <a:pPr algn="ctr"/>
+            <a:endParaRPr/>
           </a:p>
         </p:txBody>
       </p:sp>
@@ -13081,6 +15174,7 @@
           <a:lstStyle/>
           <a:p>
             <a:pPr algn="ctr"/>
+            <a:endParaRPr/>
           </a:p>
         </p:txBody>
       </p:sp>
@@ -13126,6 +15220,7 @@
           <a:lstStyle/>
           <a:p>
             <a:pPr algn="ctr"/>
+            <a:endParaRPr/>
           </a:p>
         </p:txBody>
       </p:sp>
@@ -13240,6 +15335,7 @@
           <a:lstStyle/>
           <a:p>
             <a:pPr algn="ctr"/>
+            <a:endParaRPr/>
           </a:p>
         </p:txBody>
       </p:sp>
@@ -13285,6 +15381,7 @@
           <a:lstStyle/>
           <a:p>
             <a:pPr algn="ctr"/>
+            <a:endParaRPr/>
           </a:p>
         </p:txBody>
       </p:sp>
@@ -13368,7 +15465,7 @@
 </file>
 
 <file path=ppt/slides/slide9.xml><?xml version="1.0" encoding="utf-8"?>
-<p:sld xmlns:a="http://schemas.openxmlformats.org/drawingml/2006/main" xmlns:p="http://schemas.openxmlformats.org/presentationml/2006/main" xmlns:r="http://schemas.openxmlformats.org/officeDocument/2006/relationships">
+<p:sld xmlns:a="http://schemas.openxmlformats.org/drawingml/2006/main" xmlns:r="http://schemas.openxmlformats.org/officeDocument/2006/relationships" xmlns:p="http://schemas.openxmlformats.org/presentationml/2006/main">
   <p:cSld>
     <p:spTree>
       <p:nvGrpSpPr>
@@ -13376,7 +15473,14 @@
         <p:cNvGrpSpPr/>
         <p:nvPr/>
       </p:nvGrpSpPr>
-      <p:grpSpPr/>
+      <p:grpSpPr>
+        <a:xfrm>
+          <a:off x="0" y="0"/>
+          <a:ext cx="0" cy="0"/>
+          <a:chOff x="0" y="0"/>
+          <a:chExt cx="0" cy="0"/>
+        </a:xfrm>
+      </p:grpSpPr>
       <p:sp>
         <p:nvSpPr>
           <p:cNvPr id="2" name="Rectangle 1"/>
@@ -13417,6 +15521,7 @@
           <a:lstStyle/>
           <a:p>
             <a:pPr algn="ctr"/>
+            <a:endParaRPr/>
           </a:p>
         </p:txBody>
       </p:sp>
@@ -13460,6 +15565,7 @@
           <a:lstStyle/>
           <a:p>
             <a:pPr algn="ctr"/>
+            <a:endParaRPr/>
           </a:p>
         </p:txBody>
       </p:sp>
@@ -13507,7 +15613,7 @@
         <p:spPr>
           <a:xfrm>
             <a:off x="180000" y="503999"/>
-            <a:ext cx="11520000" cy="216000"/>
+            <a:ext cx="11520000" cy="292388"/>
           </a:xfrm>
           <a:prstGeom prst="rect">
             <a:avLst/>
@@ -13522,14 +15628,38 @@
           <a:p>
             <a:pPr algn="l"/>
             <a:r>
-              <a:rPr sz="1300" b="0">
+              <a:rPr sz="1300" b="0" dirty="0" err="1">
                 <a:solidFill>
                   <a:srgbClr val="BFDBFE"/>
                 </a:solidFill>
                 <a:latin typeface="游ゴシック"/>
               </a:rPr>
-              <a:t>結果の解釈で質問されやすい設定を明示</a:t>
-            </a:r>
+              <a:t>結果の解釈</a:t>
+            </a:r>
+            <a:r>
+              <a:rPr lang="ja-JP" altLang="en-US" sz="1300" b="0" dirty="0">
+                <a:solidFill>
+                  <a:srgbClr val="BFDBFE"/>
+                </a:solidFill>
+                <a:latin typeface="游ゴシック"/>
+              </a:rPr>
+              <a:t>と</a:t>
+            </a:r>
+            <a:r>
+              <a:rPr sz="1300" b="0" dirty="0" err="1">
+                <a:solidFill>
+                  <a:srgbClr val="BFDBFE"/>
+                </a:solidFill>
+                <a:latin typeface="游ゴシック"/>
+              </a:rPr>
+              <a:t>設定</a:t>
+            </a:r>
+            <a:endParaRPr sz="1300" b="0" dirty="0">
+              <a:solidFill>
+                <a:srgbClr val="BFDBFE"/>
+              </a:solidFill>
+              <a:latin typeface="游ゴシック"/>
+            </a:endParaRPr>
           </a:p>
         </p:txBody>
       </p:sp>
@@ -13573,6 +15703,7 @@
           <a:lstStyle/>
           <a:p>
             <a:pPr algn="ctr"/>
+            <a:endParaRPr/>
           </a:p>
         </p:txBody>
       </p:sp>
@@ -13599,15 +15730,7 @@
           <a:lstStyle/>
           <a:p>
             <a:pPr algn="r"/>
-            <a:r>
-              <a:rPr sz="1100" b="0">
-                <a:solidFill>
-                  <a:srgbClr val="64748B"/>
-                </a:solidFill>
-                <a:latin typeface="游ゴシック"/>
-              </a:rPr>
-              <a:t/>
-            </a:r>
+            <a:endParaRPr/>
           </a:p>
         </p:txBody>
       </p:sp>
@@ -13630,9 +15753,27 @@
                 <a:tableStyleId>{5C22544A-7EE6-4342-B048-85BDC9FD1C3A}</a:tableStyleId>
               </a:tblPr>
               <a:tblGrid>
-                <a:gridCol w="1512000"/>
-                <a:gridCol w="1944000"/>
-                <a:gridCol w="2124000"/>
+                <a:gridCol w="1512000">
+                  <a:extLst>
+                    <a:ext uri="{9D8B030D-6E8A-4147-A177-3AD203B41FA5}">
+                      <a16:colId xmlns:a16="http://schemas.microsoft.com/office/drawing/2014/main" val="20000"/>
+                    </a:ext>
+                  </a:extLst>
+                </a:gridCol>
+                <a:gridCol w="1944000">
+                  <a:extLst>
+                    <a:ext uri="{9D8B030D-6E8A-4147-A177-3AD203B41FA5}">
+                      <a16:colId xmlns:a16="http://schemas.microsoft.com/office/drawing/2014/main" val="20001"/>
+                    </a:ext>
+                  </a:extLst>
+                </a:gridCol>
+                <a:gridCol w="2124000">
+                  <a:extLst>
+                    <a:ext uri="{9D8B030D-6E8A-4147-A177-3AD203B41FA5}">
+                      <a16:colId xmlns:a16="http://schemas.microsoft.com/office/drawing/2014/main" val="20002"/>
+                    </a:ext>
+                  </a:extLst>
+                </a:gridCol>
               </a:tblGrid>
               <a:tr h="576000">
                 <a:tc>
@@ -13704,6 +15845,11 @@
                     </a:solidFill>
                   </a:tcPr>
                 </a:tc>
+                <a:extLst>
+                  <a:ext uri="{0D108BD9-81ED-4DB2-BD59-A6C34878D82A}">
+                    <a16:rowId xmlns:a16="http://schemas.microsoft.com/office/drawing/2014/main" val="10000"/>
+                  </a:ext>
+                </a:extLst>
               </a:tr>
               <a:tr h="576000">
                 <a:tc>
@@ -13754,6 +15900,11 @@
                   </a:txBody>
                   <a:tcPr/>
                 </a:tc>
+                <a:extLst>
+                  <a:ext uri="{0D108BD9-81ED-4DB2-BD59-A6C34878D82A}">
+                    <a16:rowId xmlns:a16="http://schemas.microsoft.com/office/drawing/2014/main" val="10001"/>
+                  </a:ext>
+                </a:extLst>
               </a:tr>
               <a:tr h="576000">
                 <a:tc>
@@ -13816,6 +15967,11 @@
                     </a:solidFill>
                   </a:tcPr>
                 </a:tc>
+                <a:extLst>
+                  <a:ext uri="{0D108BD9-81ED-4DB2-BD59-A6C34878D82A}">
+                    <a16:rowId xmlns:a16="http://schemas.microsoft.com/office/drawing/2014/main" val="10002"/>
+                  </a:ext>
+                </a:extLst>
               </a:tr>
               <a:tr h="576000">
                 <a:tc>
@@ -13866,6 +16022,11 @@
                   </a:txBody>
                   <a:tcPr/>
                 </a:tc>
+                <a:extLst>
+                  <a:ext uri="{0D108BD9-81ED-4DB2-BD59-A6C34878D82A}">
+                    <a16:rowId xmlns:a16="http://schemas.microsoft.com/office/drawing/2014/main" val="10003"/>
+                  </a:ext>
+                </a:extLst>
               </a:tr>
               <a:tr h="576000">
                 <a:tc>
@@ -13928,6 +16089,11 @@
                     </a:solidFill>
                   </a:tcPr>
                 </a:tc>
+                <a:extLst>
+                  <a:ext uri="{0D108BD9-81ED-4DB2-BD59-A6C34878D82A}">
+                    <a16:rowId xmlns:a16="http://schemas.microsoft.com/office/drawing/2014/main" val="10004"/>
+                  </a:ext>
+                </a:extLst>
               </a:tr>
             </a:tbl>
           </a:graphicData>
@@ -13952,9 +16118,27 @@
                 <a:tableStyleId>{5C22544A-7EE6-4342-B048-85BDC9FD1C3A}</a:tableStyleId>
               </a:tblPr>
               <a:tblGrid>
-                <a:gridCol w="1152000"/>
-                <a:gridCol w="1368000"/>
-                <a:gridCol w="3060000"/>
+                <a:gridCol w="1152000">
+                  <a:extLst>
+                    <a:ext uri="{9D8B030D-6E8A-4147-A177-3AD203B41FA5}">
+                      <a16:colId xmlns:a16="http://schemas.microsoft.com/office/drawing/2014/main" val="20000"/>
+                    </a:ext>
+                  </a:extLst>
+                </a:gridCol>
+                <a:gridCol w="1368000">
+                  <a:extLst>
+                    <a:ext uri="{9D8B030D-6E8A-4147-A177-3AD203B41FA5}">
+                      <a16:colId xmlns:a16="http://schemas.microsoft.com/office/drawing/2014/main" val="20001"/>
+                    </a:ext>
+                  </a:extLst>
+                </a:gridCol>
+                <a:gridCol w="3060000">
+                  <a:extLst>
+                    <a:ext uri="{9D8B030D-6E8A-4147-A177-3AD203B41FA5}">
+                      <a16:colId xmlns:a16="http://schemas.microsoft.com/office/drawing/2014/main" val="20002"/>
+                    </a:ext>
+                  </a:extLst>
+                </a:gridCol>
               </a:tblGrid>
               <a:tr h="576000">
                 <a:tc>
@@ -14026,6 +16210,11 @@
                     </a:solidFill>
                   </a:tcPr>
                 </a:tc>
+                <a:extLst>
+                  <a:ext uri="{0D108BD9-81ED-4DB2-BD59-A6C34878D82A}">
+                    <a16:rowId xmlns:a16="http://schemas.microsoft.com/office/drawing/2014/main" val="10000"/>
+                  </a:ext>
+                </a:extLst>
               </a:tr>
               <a:tr h="576000">
                 <a:tc>
@@ -14076,6 +16265,11 @@
                   </a:txBody>
                   <a:tcPr/>
                 </a:tc>
+                <a:extLst>
+                  <a:ext uri="{0D108BD9-81ED-4DB2-BD59-A6C34878D82A}">
+                    <a16:rowId xmlns:a16="http://schemas.microsoft.com/office/drawing/2014/main" val="10001"/>
+                  </a:ext>
+                </a:extLst>
               </a:tr>
               <a:tr h="576000">
                 <a:tc>
@@ -14138,6 +16332,11 @@
                     </a:solidFill>
                   </a:tcPr>
                 </a:tc>
+                <a:extLst>
+                  <a:ext uri="{0D108BD9-81ED-4DB2-BD59-A6C34878D82A}">
+                    <a16:rowId xmlns:a16="http://schemas.microsoft.com/office/drawing/2014/main" val="10002"/>
+                  </a:ext>
+                </a:extLst>
               </a:tr>
               <a:tr h="576000">
                 <a:tc>
@@ -14188,6 +16387,11 @@
                   </a:txBody>
                   <a:tcPr/>
                 </a:tc>
+                <a:extLst>
+                  <a:ext uri="{0D108BD9-81ED-4DB2-BD59-A6C34878D82A}">
+                    <a16:rowId xmlns:a16="http://schemas.microsoft.com/office/drawing/2014/main" val="10003"/>
+                  </a:ext>
+                </a:extLst>
               </a:tr>
               <a:tr h="576000">
                 <a:tc>
@@ -14250,6 +16454,11 @@
                     </a:solidFill>
                   </a:tcPr>
                 </a:tc>
+                <a:extLst>
+                  <a:ext uri="{0D108BD9-81ED-4DB2-BD59-A6C34878D82A}">
+                    <a16:rowId xmlns:a16="http://schemas.microsoft.com/office/drawing/2014/main" val="10004"/>
+                  </a:ext>
+                </a:extLst>
               </a:tr>
               <a:tr h="576000">
                 <a:tc>
@@ -14300,6 +16509,11 @@
                   </a:txBody>
                   <a:tcPr/>
                 </a:tc>
+                <a:extLst>
+                  <a:ext uri="{0D108BD9-81ED-4DB2-BD59-A6C34878D82A}">
+                    <a16:rowId xmlns:a16="http://schemas.microsoft.com/office/drawing/2014/main" val="10005"/>
+                  </a:ext>
+                </a:extLst>
               </a:tr>
             </a:tbl>
           </a:graphicData>
@@ -14347,6 +16561,7 @@
           <a:lstStyle/>
           <a:p>
             <a:pPr algn="ctr"/>
+            <a:endParaRPr/>
           </a:p>
         </p:txBody>
       </p:sp>
@@ -14407,16 +16622,47 @@
           </a:bodyPr>
           <a:lstStyle/>
           <a:p>
-            <a:pPr algn="l"/>
-            <a:r>
-              <a:rPr sz="1350" b="0">
+            <a:pPr algn="l">
+              <a:lnSpc>
+                <a:spcPct val="150000"/>
+              </a:lnSpc>
+            </a:pPr>
+            <a:r>
+              <a:rPr sz="1350" b="0" dirty="0" err="1">
                 <a:solidFill>
                   <a:srgbClr val="1E293B"/>
                 </a:solidFill>
                 <a:latin typeface="游ゴシック"/>
               </a:rPr>
-              <a:t>現在のHTMLアニメーションはsmall/10pctの車両移動確認が中心であり、両試行はt0前に到着する。
-道路閉鎖後の交通挙動は、full試行の結果表・混雑指標・閉鎖時系列を併用して説明する。</a:t>
+              <a:t>現在のHTMLアニメーションはsmall</a:t>
+            </a:r>
+            <a:r>
+              <a:rPr sz="1350" b="0" dirty="0">
+                <a:solidFill>
+                  <a:srgbClr val="1E293B"/>
+                </a:solidFill>
+                <a:latin typeface="游ゴシック"/>
+              </a:rPr>
+              <a:t>/10pctの車両移動確認が中心であり、両試行はt0前に到着する。
+</a:t>
+            </a:r>
+            <a:r>
+              <a:rPr sz="1350" b="0" dirty="0" err="1">
+                <a:solidFill>
+                  <a:srgbClr val="1E293B"/>
+                </a:solidFill>
+                <a:latin typeface="游ゴシック"/>
+              </a:rPr>
+              <a:t>道路閉鎖後の交通挙動は、full試行の結果表・混雑指標・閉鎖時系列を併用して説明する</a:t>
+            </a:r>
+            <a:r>
+              <a:rPr sz="1350" b="0" dirty="0">
+                <a:solidFill>
+                  <a:srgbClr val="1E293B"/>
+                </a:solidFill>
+                <a:latin typeface="游ゴシック"/>
+              </a:rPr>
+              <a:t>。</a:t>
             </a:r>
           </a:p>
         </p:txBody>
@@ -14747,4 +16993,319 @@
   </a:objectDefaults>
   <a:extraClrSchemeLst/>
 </a:theme>
+</file>
+
+<file path=ppt/theme/theme2.xml><?xml version="1.0" encoding="utf-8"?>
+<a:theme xmlns:a="http://schemas.openxmlformats.org/drawingml/2006/main" name="Office テーマ">
+  <a:themeElements>
+    <a:clrScheme name="Office">
+      <a:dk1>
+        <a:sysClr val="windowText" lastClr="000000"/>
+      </a:dk1>
+      <a:lt1>
+        <a:sysClr val="window" lastClr="FFFFFF"/>
+      </a:lt1>
+      <a:dk2>
+        <a:srgbClr val="0E2841"/>
+      </a:dk2>
+      <a:lt2>
+        <a:srgbClr val="E8E8E8"/>
+      </a:lt2>
+      <a:accent1>
+        <a:srgbClr val="156082"/>
+      </a:accent1>
+      <a:accent2>
+        <a:srgbClr val="E97132"/>
+      </a:accent2>
+      <a:accent3>
+        <a:srgbClr val="196B24"/>
+      </a:accent3>
+      <a:accent4>
+        <a:srgbClr val="0F9ED5"/>
+      </a:accent4>
+      <a:accent5>
+        <a:srgbClr val="A02B93"/>
+      </a:accent5>
+      <a:accent6>
+        <a:srgbClr val="4EA72E"/>
+      </a:accent6>
+      <a:hlink>
+        <a:srgbClr val="467886"/>
+      </a:hlink>
+      <a:folHlink>
+        <a:srgbClr val="96607D"/>
+      </a:folHlink>
+    </a:clrScheme>
+    <a:fontScheme name="Office">
+      <a:majorFont>
+        <a:latin typeface="游ゴシック Light" panose="02110004020202020204"/>
+        <a:ea typeface=""/>
+        <a:cs typeface=""/>
+        <a:font script="Jpan" typeface="游ゴシック Light"/>
+        <a:font script="Hang" typeface="맑은 고딕"/>
+        <a:font script="Hans" typeface="等线 Light"/>
+        <a:font script="Hant" typeface="新細明體"/>
+        <a:font script="Arab" typeface="Times New Roman"/>
+        <a:font script="Hebr" typeface="Times New Roman"/>
+        <a:font script="Thai" typeface="Angsana New"/>
+        <a:font script="Ethi" typeface="Nyala"/>
+        <a:font script="Beng" typeface="Vrinda"/>
+        <a:font script="Gujr" typeface="Shruti"/>
+        <a:font script="Khmr" typeface="MoolBoran"/>
+        <a:font script="Knda" typeface="Tunga"/>
+        <a:font script="Guru" typeface="Raavi"/>
+        <a:font script="Cans" typeface="Euphemia"/>
+        <a:font script="Cher" typeface="Plantagenet Cherokee"/>
+        <a:font script="Yiii" typeface="Microsoft Yi Baiti"/>
+        <a:font script="Tibt" typeface="Microsoft Himalaya"/>
+        <a:font script="Thaa" typeface="MV Boli"/>
+        <a:font script="Deva" typeface="Mangal"/>
+        <a:font script="Telu" typeface="Gautami"/>
+        <a:font script="Taml" typeface="Latha"/>
+        <a:font script="Syrc" typeface="Estrangelo Edessa"/>
+        <a:font script="Orya" typeface="Kalinga"/>
+        <a:font script="Mlym" typeface="Kartika"/>
+        <a:font script="Laoo" typeface="DokChampa"/>
+        <a:font script="Sinh" typeface="Iskoola Pota"/>
+        <a:font script="Mong" typeface="Mongolian Baiti"/>
+        <a:font script="Viet" typeface="Times New Roman"/>
+        <a:font script="Uigh" typeface="Microsoft Uighur"/>
+        <a:font script="Geor" typeface="Sylfaen"/>
+        <a:font script="Armn" typeface="Arial"/>
+        <a:font script="Bugi" typeface="Leelawadee UI"/>
+        <a:font script="Bopo" typeface="Microsoft JhengHei"/>
+        <a:font script="Java" typeface="Javanese Text"/>
+        <a:font script="Lisu" typeface="Segoe UI"/>
+        <a:font script="Mymr" typeface="Myanmar Text"/>
+        <a:font script="Nkoo" typeface="Ebrima"/>
+        <a:font script="Olck" typeface="Nirmala UI"/>
+        <a:font script="Osma" typeface="Ebrima"/>
+        <a:font script="Phag" typeface="Phagspa"/>
+        <a:font script="Syrn" typeface="Estrangelo Edessa"/>
+        <a:font script="Syrj" typeface="Estrangelo Edessa"/>
+        <a:font script="Syre" typeface="Estrangelo Edessa"/>
+        <a:font script="Sora" typeface="Nirmala UI"/>
+        <a:font script="Tale" typeface="Microsoft Tai Le"/>
+        <a:font script="Talu" typeface="Microsoft New Tai Lue"/>
+        <a:font script="Tfng" typeface="Ebrima"/>
+      </a:majorFont>
+      <a:minorFont>
+        <a:latin typeface="游ゴシック" panose="02110004020202020204"/>
+        <a:ea typeface=""/>
+        <a:cs typeface=""/>
+        <a:font script="Jpan" typeface="游ゴシック"/>
+        <a:font script="Hang" typeface="맑은 고딕"/>
+        <a:font script="Hans" typeface="等线"/>
+        <a:font script="Hant" typeface="新細明體"/>
+        <a:font script="Arab" typeface="Arial"/>
+        <a:font script="Hebr" typeface="Arial"/>
+        <a:font script="Thai" typeface="Cordia New"/>
+        <a:font script="Ethi" typeface="Nyala"/>
+        <a:font script="Beng" typeface="Vrinda"/>
+        <a:font script="Gujr" typeface="Shruti"/>
+        <a:font script="Khmr" typeface="DaunPenh"/>
+        <a:font script="Knda" typeface="Tunga"/>
+        <a:font script="Guru" typeface="Raavi"/>
+        <a:font script="Cans" typeface="Euphemia"/>
+        <a:font script="Cher" typeface="Plantagenet Cherokee"/>
+        <a:font script="Yiii" typeface="Microsoft Yi Baiti"/>
+        <a:font script="Tibt" typeface="Microsoft Himalaya"/>
+        <a:font script="Thaa" typeface="MV Boli"/>
+        <a:font script="Deva" typeface="Mangal"/>
+        <a:font script="Telu" typeface="Gautami"/>
+        <a:font script="Taml" typeface="Latha"/>
+        <a:font script="Syrc" typeface="Estrangelo Edessa"/>
+        <a:font script="Orya" typeface="Kalinga"/>
+        <a:font script="Mlym" typeface="Kartika"/>
+        <a:font script="Laoo" typeface="DokChampa"/>
+        <a:font script="Sinh" typeface="Iskoola Pota"/>
+        <a:font script="Mong" typeface="Mongolian Baiti"/>
+        <a:font script="Viet" typeface="Arial"/>
+        <a:font script="Uigh" typeface="Microsoft Uighur"/>
+        <a:font script="Geor" typeface="Sylfaen"/>
+        <a:font script="Armn" typeface="Arial"/>
+        <a:font script="Bugi" typeface="Leelawadee UI"/>
+        <a:font script="Bopo" typeface="Microsoft JhengHei"/>
+        <a:font script="Java" typeface="Javanese Text"/>
+        <a:font script="Lisu" typeface="Segoe UI"/>
+        <a:font script="Mymr" typeface="Myanmar Text"/>
+        <a:font script="Nkoo" typeface="Ebrima"/>
+        <a:font script="Olck" typeface="Nirmala UI"/>
+        <a:font script="Osma" typeface="Ebrima"/>
+        <a:font script="Phag" typeface="Phagspa"/>
+        <a:font script="Syrn" typeface="Estrangelo Edessa"/>
+        <a:font script="Syrj" typeface="Estrangelo Edessa"/>
+        <a:font script="Syre" typeface="Estrangelo Edessa"/>
+        <a:font script="Sora" typeface="Nirmala UI"/>
+        <a:font script="Tale" typeface="Microsoft Tai Le"/>
+        <a:font script="Talu" typeface="Microsoft New Tai Lue"/>
+        <a:font script="Tfng" typeface="Ebrima"/>
+      </a:minorFont>
+    </a:fontScheme>
+    <a:fmtScheme name="Office">
+      <a:fillStyleLst>
+        <a:solidFill>
+          <a:schemeClr val="phClr"/>
+        </a:solidFill>
+        <a:gradFill rotWithShape="1">
+          <a:gsLst>
+            <a:gs pos="0">
+              <a:schemeClr val="phClr">
+                <a:lumMod val="110000"/>
+                <a:satMod val="105000"/>
+                <a:tint val="67000"/>
+              </a:schemeClr>
+            </a:gs>
+            <a:gs pos="50000">
+              <a:schemeClr val="phClr">
+                <a:lumMod val="105000"/>
+                <a:satMod val="103000"/>
+                <a:tint val="73000"/>
+              </a:schemeClr>
+            </a:gs>
+            <a:gs pos="100000">
+              <a:schemeClr val="phClr">
+                <a:lumMod val="105000"/>
+                <a:satMod val="109000"/>
+                <a:tint val="81000"/>
+              </a:schemeClr>
+            </a:gs>
+          </a:gsLst>
+          <a:lin ang="5400000" scaled="0"/>
+        </a:gradFill>
+        <a:gradFill rotWithShape="1">
+          <a:gsLst>
+            <a:gs pos="0">
+              <a:schemeClr val="phClr">
+                <a:satMod val="103000"/>
+                <a:lumMod val="102000"/>
+                <a:tint val="94000"/>
+              </a:schemeClr>
+            </a:gs>
+            <a:gs pos="50000">
+              <a:schemeClr val="phClr">
+                <a:satMod val="110000"/>
+                <a:lumMod val="100000"/>
+                <a:shade val="100000"/>
+              </a:schemeClr>
+            </a:gs>
+            <a:gs pos="100000">
+              <a:schemeClr val="phClr">
+                <a:lumMod val="99000"/>
+                <a:satMod val="120000"/>
+                <a:shade val="78000"/>
+              </a:schemeClr>
+            </a:gs>
+          </a:gsLst>
+          <a:lin ang="5400000" scaled="0"/>
+        </a:gradFill>
+      </a:fillStyleLst>
+      <a:lnStyleLst>
+        <a:ln w="12700" cap="flat" cmpd="sng" algn="ctr">
+          <a:solidFill>
+            <a:schemeClr val="phClr"/>
+          </a:solidFill>
+          <a:prstDash val="solid"/>
+          <a:miter lim="800000"/>
+        </a:ln>
+        <a:ln w="19050" cap="flat" cmpd="sng" algn="ctr">
+          <a:solidFill>
+            <a:schemeClr val="phClr"/>
+          </a:solidFill>
+          <a:prstDash val="solid"/>
+          <a:miter lim="800000"/>
+        </a:ln>
+        <a:ln w="25400" cap="flat" cmpd="sng" algn="ctr">
+          <a:solidFill>
+            <a:schemeClr val="phClr"/>
+          </a:solidFill>
+          <a:prstDash val="solid"/>
+          <a:miter lim="800000"/>
+        </a:ln>
+      </a:lnStyleLst>
+      <a:effectStyleLst>
+        <a:effectStyle>
+          <a:effectLst/>
+        </a:effectStyle>
+        <a:effectStyle>
+          <a:effectLst/>
+        </a:effectStyle>
+        <a:effectStyle>
+          <a:effectLst>
+            <a:outerShdw blurRad="57150" dist="19050" dir="5400000" algn="ctr" rotWithShape="0">
+              <a:srgbClr val="000000">
+                <a:alpha val="63000"/>
+              </a:srgbClr>
+            </a:outerShdw>
+          </a:effectLst>
+        </a:effectStyle>
+      </a:effectStyleLst>
+      <a:bgFillStyleLst>
+        <a:solidFill>
+          <a:schemeClr val="phClr"/>
+        </a:solidFill>
+        <a:solidFill>
+          <a:schemeClr val="phClr">
+            <a:tint val="95000"/>
+            <a:satMod val="170000"/>
+          </a:schemeClr>
+        </a:solidFill>
+        <a:gradFill rotWithShape="1">
+          <a:gsLst>
+            <a:gs pos="0">
+              <a:schemeClr val="phClr">
+                <a:tint val="93000"/>
+                <a:satMod val="150000"/>
+                <a:shade val="98000"/>
+                <a:lumMod val="102000"/>
+              </a:schemeClr>
+            </a:gs>
+            <a:gs pos="50000">
+              <a:schemeClr val="phClr">
+                <a:tint val="98000"/>
+                <a:satMod val="130000"/>
+                <a:shade val="90000"/>
+                <a:lumMod val="103000"/>
+              </a:schemeClr>
+            </a:gs>
+            <a:gs pos="100000">
+              <a:schemeClr val="phClr">
+                <a:shade val="63000"/>
+                <a:satMod val="120000"/>
+              </a:schemeClr>
+            </a:gs>
+          </a:gsLst>
+          <a:lin ang="5400000" scaled="0"/>
+        </a:gradFill>
+      </a:bgFillStyleLst>
+    </a:fmtScheme>
+  </a:themeElements>
+  <a:objectDefaults>
+    <a:lnDef>
+      <a:spPr/>
+      <a:bodyPr/>
+      <a:lstStyle/>
+      <a:style>
+        <a:lnRef idx="2">
+          <a:schemeClr val="accent1"/>
+        </a:lnRef>
+        <a:fillRef idx="0">
+          <a:schemeClr val="accent1"/>
+        </a:fillRef>
+        <a:effectRef idx="1">
+          <a:schemeClr val="accent1"/>
+        </a:effectRef>
+        <a:fontRef idx="minor">
+          <a:schemeClr val="tx1"/>
+        </a:fontRef>
+      </a:style>
+    </a:lnDef>
+  </a:objectDefaults>
+  <a:extraClrSchemeLst/>
+  <a:extLst>
+    <a:ext uri="{05A4C25C-085E-4340-85A3-A5531E510DB2}">
+      <thm15:themeFamily xmlns:thm15="http://schemas.microsoft.com/office/thememl/2012/main" name="Office Theme" id="{2E142A2C-CD16-42D6-873A-C26D2A0506FA}" vid="{1BDDFF52-6CD6-40A5-AB3C-68EB2F1E4D0A}"/>
+    </a:ext>
+  </a:extLst>
+</a:theme>
 </file>